--- a/exercises/unit-tests/instructions.pptx
+++ b/exercises/unit-tests/instructions.pptx
@@ -5,7 +5,7 @@
     <p:sldMasterId id="2147483648" r:id="rId1"/>
   </p:sldMasterIdLst>
   <p:notesMasterIdLst>
-    <p:notesMasterId r:id="rId15"/>
+    <p:notesMasterId r:id="rId17"/>
   </p:notesMasterIdLst>
   <p:sldIdLst>
     <p:sldId id="256" r:id="rId2"/>
@@ -20,7 +20,9 @@
     <p:sldId id="409" r:id="rId11"/>
     <p:sldId id="410" r:id="rId12"/>
     <p:sldId id="402" r:id="rId13"/>
-    <p:sldId id="407" r:id="rId14"/>
+    <p:sldId id="412" r:id="rId14"/>
+    <p:sldId id="411" r:id="rId15"/>
+    <p:sldId id="413" r:id="rId16"/>
   </p:sldIdLst>
   <p:sldSz cx="12192000" cy="6858000"/>
   <p:notesSz cx="6858000" cy="9144000"/>
@@ -2388,6 +2390,3560 @@
     <p:extLst>
       <p:ext uri="{BB962C8B-B14F-4D97-AF65-F5344CB8AC3E}">
         <p14:creationId xmlns:p14="http://schemas.microsoft.com/office/powerpoint/2010/main" val="786933248"/>
+      </p:ext>
+    </p:extLst>
+  </p:cSld>
+  <p:clrMapOvr>
+    <a:masterClrMapping/>
+  </p:clrMapOvr>
+</p:notes>
+</file>
+
+<file path=ppt/notesSlides/notesSlide4.xml><?xml version="1.0" encoding="utf-8"?>
+<p:notes xmlns:a="http://schemas.openxmlformats.org/drawingml/2006/main" xmlns:r="http://schemas.openxmlformats.org/officeDocument/2006/relationships" xmlns:p="http://schemas.openxmlformats.org/presentationml/2006/main">
+  <p:cSld>
+    <p:spTree>
+      <p:nvGrpSpPr>
+        <p:cNvPr id="1" name="">
+          <a:extLst>
+            <a:ext uri="{FF2B5EF4-FFF2-40B4-BE49-F238E27FC236}">
+              <a16:creationId xmlns:a16="http://schemas.microsoft.com/office/drawing/2014/main" id="{8605595A-ABC1-D391-4B3D-F5198D4F42F1}"/>
+            </a:ext>
+          </a:extLst>
+        </p:cNvPr>
+        <p:cNvGrpSpPr/>
+        <p:nvPr/>
+      </p:nvGrpSpPr>
+      <p:grpSpPr>
+        <a:xfrm>
+          <a:off x="0" y="0"/>
+          <a:ext cx="0" cy="0"/>
+          <a:chOff x="0" y="0"/>
+          <a:chExt cx="0" cy="0"/>
+        </a:xfrm>
+      </p:grpSpPr>
+      <p:sp>
+        <p:nvSpPr>
+          <p:cNvPr id="2" name="Slide Image Placeholder 1">
+            <a:extLst>
+              <a:ext uri="{FF2B5EF4-FFF2-40B4-BE49-F238E27FC236}">
+                <a16:creationId xmlns:a16="http://schemas.microsoft.com/office/drawing/2014/main" id="{E8E6E648-2D0A-ED09-EBCB-221318E46450}"/>
+              </a:ext>
+            </a:extLst>
+          </p:cNvPr>
+          <p:cNvSpPr>
+            <a:spLocks noGrp="1" noRot="1" noChangeAspect="1"/>
+          </p:cNvSpPr>
+          <p:nvPr>
+            <p:ph type="sldImg"/>
+          </p:nvPr>
+        </p:nvSpPr>
+        <p:spPr/>
+      </p:sp>
+      <p:sp>
+        <p:nvSpPr>
+          <p:cNvPr id="3" name="Notes Placeholder 2">
+            <a:extLst>
+              <a:ext uri="{FF2B5EF4-FFF2-40B4-BE49-F238E27FC236}">
+                <a16:creationId xmlns:a16="http://schemas.microsoft.com/office/drawing/2014/main" id="{71587C88-0F1E-A545-CD00-32D9A441D8C1}"/>
+              </a:ext>
+            </a:extLst>
+          </p:cNvPr>
+          <p:cNvSpPr>
+            <a:spLocks noGrp="1"/>
+          </p:cNvSpPr>
+          <p:nvPr>
+            <p:ph type="body" idx="1"/>
+          </p:nvPr>
+        </p:nvSpPr>
+        <p:spPr/>
+        <p:txBody>
+          <a:bodyPr/>
+          <a:lstStyle/>
+          <a:p>
+            <a:pPr marL="0" marR="0" lvl="0" indent="0" algn="l" defTabSz="914400" rtl="0" eaLnBrk="1" fontAlgn="auto" latinLnBrk="0" hangingPunct="1">
+              <a:lnSpc>
+                <a:spcPct val="100000"/>
+              </a:lnSpc>
+              <a:spcBef>
+                <a:spcPts val="0"/>
+              </a:spcBef>
+              <a:spcAft>
+                <a:spcPts val="0"/>
+              </a:spcAft>
+              <a:buClrTx/>
+              <a:buSzTx/>
+              <a:buFontTx/>
+              <a:buNone/>
+              <a:tabLst/>
+              <a:defRPr/>
+            </a:pPr>
+            <a:r>
+              <a:rPr lang="en-US" sz="1200" kern="1200" dirty="0">
+                <a:solidFill>
+                  <a:schemeClr val="tx1"/>
+                </a:solidFill>
+                <a:effectLst/>
+                <a:latin typeface="+mn-lt"/>
+                <a:ea typeface="+mn-ea"/>
+                <a:cs typeface="+mn-cs"/>
+              </a:rPr>
+              <a:t>import sys</a:t>
+            </a:r>
+            <a:br>
+              <a:rPr lang="en-US" sz="1200" kern="1200" dirty="0">
+                <a:solidFill>
+                  <a:schemeClr val="tx1"/>
+                </a:solidFill>
+                <a:effectLst/>
+                <a:latin typeface="+mn-lt"/>
+                <a:ea typeface="+mn-ea"/>
+                <a:cs typeface="+mn-cs"/>
+              </a:rPr>
+            </a:br>
+            <a:br>
+              <a:rPr lang="en-US" sz="1200" kern="1200" dirty="0">
+                <a:solidFill>
+                  <a:schemeClr val="tx1"/>
+                </a:solidFill>
+                <a:effectLst/>
+                <a:latin typeface="+mn-lt"/>
+                <a:ea typeface="+mn-ea"/>
+                <a:cs typeface="+mn-cs"/>
+              </a:rPr>
+            </a:br>
+            <a:br>
+              <a:rPr lang="en-US" sz="1200" kern="1200" dirty="0">
+                <a:solidFill>
+                  <a:schemeClr val="tx1"/>
+                </a:solidFill>
+                <a:effectLst/>
+                <a:latin typeface="+mn-lt"/>
+                <a:ea typeface="+mn-ea"/>
+                <a:cs typeface="+mn-cs"/>
+              </a:rPr>
+            </a:br>
+            <a:r>
+              <a:rPr lang="en-US" sz="1200" kern="1200" dirty="0">
+                <a:solidFill>
+                  <a:schemeClr val="tx1"/>
+                </a:solidFill>
+                <a:effectLst/>
+                <a:latin typeface="+mn-lt"/>
+                <a:ea typeface="+mn-ea"/>
+                <a:cs typeface="+mn-cs"/>
+              </a:rPr>
+              <a:t>def add(x: int, y: int) -&gt; int:</a:t>
+            </a:r>
+            <a:br>
+              <a:rPr lang="en-US" sz="1200" kern="1200" dirty="0">
+                <a:solidFill>
+                  <a:schemeClr val="tx1"/>
+                </a:solidFill>
+                <a:effectLst/>
+                <a:latin typeface="+mn-lt"/>
+                <a:ea typeface="+mn-ea"/>
+                <a:cs typeface="+mn-cs"/>
+              </a:rPr>
+            </a:br>
+            <a:r>
+              <a:rPr lang="en-US" sz="1200" kern="1200" dirty="0">
+                <a:solidFill>
+                  <a:schemeClr val="tx1"/>
+                </a:solidFill>
+                <a:effectLst/>
+                <a:latin typeface="+mn-lt"/>
+                <a:ea typeface="+mn-ea"/>
+                <a:cs typeface="+mn-cs"/>
+              </a:rPr>
+              <a:t>    </a:t>
+            </a:r>
+            <a:r>
+              <a:rPr lang="en-US" sz="1200" i="1" kern="1200" dirty="0">
+                <a:solidFill>
+                  <a:schemeClr val="tx1"/>
+                </a:solidFill>
+                <a:effectLst/>
+                <a:latin typeface="+mn-lt"/>
+                <a:ea typeface="+mn-ea"/>
+                <a:cs typeface="+mn-cs"/>
+              </a:rPr>
+              <a:t>"""</a:t>
+            </a:r>
+            <a:br>
+              <a:rPr lang="en-US" sz="1200" i="1" kern="1200" dirty="0">
+                <a:solidFill>
+                  <a:schemeClr val="tx1"/>
+                </a:solidFill>
+                <a:effectLst/>
+                <a:latin typeface="+mn-lt"/>
+                <a:ea typeface="+mn-ea"/>
+                <a:cs typeface="+mn-cs"/>
+              </a:rPr>
+            </a:br>
+            <a:r>
+              <a:rPr lang="en-US" sz="1200" i="1" kern="1200" dirty="0">
+                <a:solidFill>
+                  <a:schemeClr val="tx1"/>
+                </a:solidFill>
+                <a:effectLst/>
+                <a:latin typeface="+mn-lt"/>
+                <a:ea typeface="+mn-ea"/>
+                <a:cs typeface="+mn-cs"/>
+              </a:rPr>
+              <a:t>    Add two integers with validation and overflow detection.</a:t>
+            </a:r>
+            <a:br>
+              <a:rPr lang="en-US" sz="1200" i="1" kern="1200" dirty="0">
+                <a:solidFill>
+                  <a:schemeClr val="tx1"/>
+                </a:solidFill>
+                <a:effectLst/>
+                <a:latin typeface="+mn-lt"/>
+                <a:ea typeface="+mn-ea"/>
+                <a:cs typeface="+mn-cs"/>
+              </a:rPr>
+            </a:br>
+            <a:r>
+              <a:rPr lang="en-US" sz="1200" i="1" kern="1200" dirty="0">
+                <a:solidFill>
+                  <a:schemeClr val="tx1"/>
+                </a:solidFill>
+                <a:effectLst/>
+                <a:latin typeface="+mn-lt"/>
+                <a:ea typeface="+mn-ea"/>
+                <a:cs typeface="+mn-cs"/>
+              </a:rPr>
+              <a:t>    - Complies with commutativity: add(</a:t>
+            </a:r>
+            <a:r>
+              <a:rPr lang="en-US" sz="1200" i="1" kern="1200" dirty="0" err="1">
+                <a:solidFill>
+                  <a:schemeClr val="tx1"/>
+                </a:solidFill>
+                <a:effectLst/>
+                <a:latin typeface="+mn-lt"/>
+                <a:ea typeface="+mn-ea"/>
+                <a:cs typeface="+mn-cs"/>
+              </a:rPr>
+              <a:t>x,y</a:t>
+            </a:r>
+            <a:r>
+              <a:rPr lang="en-US" sz="1200" i="1" kern="1200" dirty="0">
+                <a:solidFill>
+                  <a:schemeClr val="tx1"/>
+                </a:solidFill>
+                <a:effectLst/>
+                <a:latin typeface="+mn-lt"/>
+                <a:ea typeface="+mn-ea"/>
+                <a:cs typeface="+mn-cs"/>
+              </a:rPr>
+              <a:t>) = add(</a:t>
+            </a:r>
+            <a:r>
+              <a:rPr lang="en-US" sz="1200" i="1" kern="1200" dirty="0" err="1">
+                <a:solidFill>
+                  <a:schemeClr val="tx1"/>
+                </a:solidFill>
+                <a:effectLst/>
+                <a:latin typeface="+mn-lt"/>
+                <a:ea typeface="+mn-ea"/>
+                <a:cs typeface="+mn-cs"/>
+              </a:rPr>
+              <a:t>y,x</a:t>
+            </a:r>
+            <a:r>
+              <a:rPr lang="en-US" sz="1200" i="1" kern="1200" dirty="0">
+                <a:solidFill>
+                  <a:schemeClr val="tx1"/>
+                </a:solidFill>
+                <a:effectLst/>
+                <a:latin typeface="+mn-lt"/>
+                <a:ea typeface="+mn-ea"/>
+                <a:cs typeface="+mn-cs"/>
+              </a:rPr>
+              <a:t>)</a:t>
+            </a:r>
+            <a:br>
+              <a:rPr lang="en-US" sz="1200" i="1" kern="1200" dirty="0">
+                <a:solidFill>
+                  <a:schemeClr val="tx1"/>
+                </a:solidFill>
+                <a:effectLst/>
+                <a:latin typeface="+mn-lt"/>
+                <a:ea typeface="+mn-ea"/>
+                <a:cs typeface="+mn-cs"/>
+              </a:rPr>
+            </a:br>
+            <a:r>
+              <a:rPr lang="en-US" sz="1200" i="1" kern="1200" dirty="0">
+                <a:solidFill>
+                  <a:schemeClr val="tx1"/>
+                </a:solidFill>
+                <a:effectLst/>
+                <a:latin typeface="+mn-lt"/>
+                <a:ea typeface="+mn-ea"/>
+                <a:cs typeface="+mn-cs"/>
+              </a:rPr>
+              <a:t>    - Complies with identity: add(x,0) = add(0,x)</a:t>
+            </a:r>
+            <a:br>
+              <a:rPr lang="en-US" sz="1200" i="1" kern="1200" dirty="0">
+                <a:solidFill>
+                  <a:schemeClr val="tx1"/>
+                </a:solidFill>
+                <a:effectLst/>
+                <a:latin typeface="+mn-lt"/>
+                <a:ea typeface="+mn-ea"/>
+                <a:cs typeface="+mn-cs"/>
+              </a:rPr>
+            </a:br>
+            <a:br>
+              <a:rPr lang="en-US" sz="1200" i="1" kern="1200" dirty="0">
+                <a:solidFill>
+                  <a:schemeClr val="tx1"/>
+                </a:solidFill>
+                <a:effectLst/>
+                <a:latin typeface="+mn-lt"/>
+                <a:ea typeface="+mn-ea"/>
+                <a:cs typeface="+mn-cs"/>
+              </a:rPr>
+            </a:br>
+            <a:r>
+              <a:rPr lang="en-US" sz="1200" i="1" kern="1200" dirty="0">
+                <a:solidFill>
+                  <a:schemeClr val="tx1"/>
+                </a:solidFill>
+                <a:effectLst/>
+                <a:latin typeface="+mn-lt"/>
+                <a:ea typeface="+mn-ea"/>
+                <a:cs typeface="+mn-cs"/>
+              </a:rPr>
+              <a:t>    :param x: First integer to add</a:t>
+            </a:r>
+            <a:br>
+              <a:rPr lang="en-US" sz="1200" i="1" kern="1200" dirty="0">
+                <a:solidFill>
+                  <a:schemeClr val="tx1"/>
+                </a:solidFill>
+                <a:effectLst/>
+                <a:latin typeface="+mn-lt"/>
+                <a:ea typeface="+mn-ea"/>
+                <a:cs typeface="+mn-cs"/>
+              </a:rPr>
+            </a:br>
+            <a:r>
+              <a:rPr lang="en-US" sz="1200" i="1" kern="1200" dirty="0">
+                <a:solidFill>
+                  <a:schemeClr val="tx1"/>
+                </a:solidFill>
+                <a:effectLst/>
+                <a:latin typeface="+mn-lt"/>
+                <a:ea typeface="+mn-ea"/>
+                <a:cs typeface="+mn-cs"/>
+              </a:rPr>
+              <a:t>    :param y: Second integer to add</a:t>
+            </a:r>
+            <a:br>
+              <a:rPr lang="en-US" sz="1200" i="1" kern="1200" dirty="0">
+                <a:solidFill>
+                  <a:schemeClr val="tx1"/>
+                </a:solidFill>
+                <a:effectLst/>
+                <a:latin typeface="+mn-lt"/>
+                <a:ea typeface="+mn-ea"/>
+                <a:cs typeface="+mn-cs"/>
+              </a:rPr>
+            </a:br>
+            <a:r>
+              <a:rPr lang="en-US" sz="1200" i="1" kern="1200" dirty="0">
+                <a:solidFill>
+                  <a:schemeClr val="tx1"/>
+                </a:solidFill>
+                <a:effectLst/>
+                <a:latin typeface="+mn-lt"/>
+                <a:ea typeface="+mn-ea"/>
+                <a:cs typeface="+mn-cs"/>
+              </a:rPr>
+              <a:t>    :return: x + y</a:t>
+            </a:r>
+            <a:br>
+              <a:rPr lang="en-US" sz="1200" i="1" kern="1200" dirty="0">
+                <a:solidFill>
+                  <a:schemeClr val="tx1"/>
+                </a:solidFill>
+                <a:effectLst/>
+                <a:latin typeface="+mn-lt"/>
+                <a:ea typeface="+mn-ea"/>
+                <a:cs typeface="+mn-cs"/>
+              </a:rPr>
+            </a:br>
+            <a:r>
+              <a:rPr lang="en-US" sz="1200" i="1" kern="1200" dirty="0">
+                <a:solidFill>
+                  <a:schemeClr val="tx1"/>
+                </a:solidFill>
+                <a:effectLst/>
+                <a:latin typeface="+mn-lt"/>
+                <a:ea typeface="+mn-ea"/>
+                <a:cs typeface="+mn-cs"/>
+              </a:rPr>
+              <a:t>    :raises </a:t>
+            </a:r>
+            <a:r>
+              <a:rPr lang="en-US" sz="1200" i="1" kern="1200" dirty="0" err="1">
+                <a:solidFill>
+                  <a:schemeClr val="tx1"/>
+                </a:solidFill>
+                <a:effectLst/>
+                <a:latin typeface="+mn-lt"/>
+                <a:ea typeface="+mn-ea"/>
+                <a:cs typeface="+mn-cs"/>
+              </a:rPr>
+              <a:t>TypeError</a:t>
+            </a:r>
+            <a:r>
+              <a:rPr lang="en-US" sz="1200" i="1" kern="1200" dirty="0">
+                <a:solidFill>
+                  <a:schemeClr val="tx1"/>
+                </a:solidFill>
+                <a:effectLst/>
+                <a:latin typeface="+mn-lt"/>
+                <a:ea typeface="+mn-ea"/>
+                <a:cs typeface="+mn-cs"/>
+              </a:rPr>
+              <a:t>: If either x or y is not an integer</a:t>
+            </a:r>
+            <a:br>
+              <a:rPr lang="en-US" sz="1200" i="1" kern="1200" dirty="0">
+                <a:solidFill>
+                  <a:schemeClr val="tx1"/>
+                </a:solidFill>
+                <a:effectLst/>
+                <a:latin typeface="+mn-lt"/>
+                <a:ea typeface="+mn-ea"/>
+                <a:cs typeface="+mn-cs"/>
+              </a:rPr>
+            </a:br>
+            <a:r>
+              <a:rPr lang="en-US" sz="1200" i="1" kern="1200" dirty="0">
+                <a:solidFill>
+                  <a:schemeClr val="tx1"/>
+                </a:solidFill>
+                <a:effectLst/>
+                <a:latin typeface="+mn-lt"/>
+                <a:ea typeface="+mn-ea"/>
+                <a:cs typeface="+mn-cs"/>
+              </a:rPr>
+              <a:t>    :raises </a:t>
+            </a:r>
+            <a:r>
+              <a:rPr lang="en-US" sz="1200" i="1" kern="1200" dirty="0" err="1">
+                <a:solidFill>
+                  <a:schemeClr val="tx1"/>
+                </a:solidFill>
+                <a:effectLst/>
+                <a:latin typeface="+mn-lt"/>
+                <a:ea typeface="+mn-ea"/>
+                <a:cs typeface="+mn-cs"/>
+              </a:rPr>
+              <a:t>OverflowError</a:t>
+            </a:r>
+            <a:r>
+              <a:rPr lang="en-US" sz="1200" i="1" kern="1200" dirty="0">
+                <a:solidFill>
+                  <a:schemeClr val="tx1"/>
+                </a:solidFill>
+                <a:effectLst/>
+                <a:latin typeface="+mn-lt"/>
+                <a:ea typeface="+mn-ea"/>
+                <a:cs typeface="+mn-cs"/>
+              </a:rPr>
+              <a:t>: If the sum exceeds the maximum</a:t>
+            </a:r>
+            <a:br>
+              <a:rPr lang="en-US" sz="1200" i="1" kern="1200" dirty="0">
+                <a:solidFill>
+                  <a:schemeClr val="tx1"/>
+                </a:solidFill>
+                <a:effectLst/>
+                <a:latin typeface="+mn-lt"/>
+                <a:ea typeface="+mn-ea"/>
+                <a:cs typeface="+mn-cs"/>
+              </a:rPr>
+            </a:br>
+            <a:r>
+              <a:rPr lang="en-US" sz="1200" i="1" kern="1200" dirty="0">
+                <a:solidFill>
+                  <a:schemeClr val="tx1"/>
+                </a:solidFill>
+                <a:effectLst/>
+                <a:latin typeface="+mn-lt"/>
+                <a:ea typeface="+mn-ea"/>
+                <a:cs typeface="+mn-cs"/>
+              </a:rPr>
+              <a:t>    representable integer</a:t>
+            </a:r>
+            <a:br>
+              <a:rPr lang="en-US" sz="1200" i="1" kern="1200" dirty="0">
+                <a:solidFill>
+                  <a:schemeClr val="tx1"/>
+                </a:solidFill>
+                <a:effectLst/>
+                <a:latin typeface="+mn-lt"/>
+                <a:ea typeface="+mn-ea"/>
+                <a:cs typeface="+mn-cs"/>
+              </a:rPr>
+            </a:br>
+            <a:r>
+              <a:rPr lang="en-US" sz="1200" i="1" kern="1200" dirty="0">
+                <a:solidFill>
+                  <a:schemeClr val="tx1"/>
+                </a:solidFill>
+                <a:effectLst/>
+                <a:latin typeface="+mn-lt"/>
+                <a:ea typeface="+mn-ea"/>
+                <a:cs typeface="+mn-cs"/>
+              </a:rPr>
+              <a:t>    """</a:t>
+            </a:r>
+            <a:br>
+              <a:rPr lang="en-US" sz="1200" i="1" kern="1200" dirty="0">
+                <a:solidFill>
+                  <a:schemeClr val="tx1"/>
+                </a:solidFill>
+                <a:effectLst/>
+                <a:latin typeface="+mn-lt"/>
+                <a:ea typeface="+mn-ea"/>
+                <a:cs typeface="+mn-cs"/>
+              </a:rPr>
+            </a:br>
+            <a:r>
+              <a:rPr lang="en-US" sz="1200" i="1" kern="1200" dirty="0">
+                <a:solidFill>
+                  <a:schemeClr val="tx1"/>
+                </a:solidFill>
+                <a:effectLst/>
+                <a:latin typeface="+mn-lt"/>
+                <a:ea typeface="+mn-ea"/>
+                <a:cs typeface="+mn-cs"/>
+              </a:rPr>
+              <a:t>    </a:t>
+            </a:r>
+            <a:r>
+              <a:rPr lang="en-US" sz="1200" kern="1200" dirty="0">
+                <a:solidFill>
+                  <a:schemeClr val="tx1"/>
+                </a:solidFill>
+                <a:effectLst/>
+                <a:latin typeface="+mn-lt"/>
+                <a:ea typeface="+mn-ea"/>
+                <a:cs typeface="+mn-cs"/>
+              </a:rPr>
+              <a:t># Input validation</a:t>
+            </a:r>
+            <a:br>
+              <a:rPr lang="en-US" sz="1200" kern="1200" dirty="0">
+                <a:solidFill>
+                  <a:schemeClr val="tx1"/>
+                </a:solidFill>
+                <a:effectLst/>
+                <a:latin typeface="+mn-lt"/>
+                <a:ea typeface="+mn-ea"/>
+                <a:cs typeface="+mn-cs"/>
+              </a:rPr>
+            </a:br>
+            <a:r>
+              <a:rPr lang="en-US" sz="1200" kern="1200" dirty="0">
+                <a:solidFill>
+                  <a:schemeClr val="tx1"/>
+                </a:solidFill>
+                <a:effectLst/>
+                <a:latin typeface="+mn-lt"/>
+                <a:ea typeface="+mn-ea"/>
+                <a:cs typeface="+mn-cs"/>
+              </a:rPr>
+              <a:t>    if not </a:t>
+            </a:r>
+            <a:r>
+              <a:rPr lang="en-US" sz="1200" kern="1200" dirty="0" err="1">
+                <a:solidFill>
+                  <a:schemeClr val="tx1"/>
+                </a:solidFill>
+                <a:effectLst/>
+                <a:latin typeface="+mn-lt"/>
+                <a:ea typeface="+mn-ea"/>
+                <a:cs typeface="+mn-cs"/>
+              </a:rPr>
+              <a:t>isinstance</a:t>
+            </a:r>
+            <a:r>
+              <a:rPr lang="en-US" sz="1200" kern="1200" dirty="0">
+                <a:solidFill>
+                  <a:schemeClr val="tx1"/>
+                </a:solidFill>
+                <a:effectLst/>
+                <a:latin typeface="+mn-lt"/>
+                <a:ea typeface="+mn-ea"/>
+                <a:cs typeface="+mn-cs"/>
+              </a:rPr>
+              <a:t>(x, int) or </a:t>
+            </a:r>
+            <a:r>
+              <a:rPr lang="en-US" sz="1200" kern="1200" dirty="0" err="1">
+                <a:solidFill>
+                  <a:schemeClr val="tx1"/>
+                </a:solidFill>
+                <a:effectLst/>
+                <a:latin typeface="+mn-lt"/>
+                <a:ea typeface="+mn-ea"/>
+                <a:cs typeface="+mn-cs"/>
+              </a:rPr>
+              <a:t>isinstance</a:t>
+            </a:r>
+            <a:r>
+              <a:rPr lang="en-US" sz="1200" kern="1200" dirty="0">
+                <a:solidFill>
+                  <a:schemeClr val="tx1"/>
+                </a:solidFill>
+                <a:effectLst/>
+                <a:latin typeface="+mn-lt"/>
+                <a:ea typeface="+mn-ea"/>
+                <a:cs typeface="+mn-cs"/>
+              </a:rPr>
+              <a:t>(x, bool):</a:t>
+            </a:r>
+            <a:br>
+              <a:rPr lang="en-US" sz="1200" kern="1200" dirty="0">
+                <a:solidFill>
+                  <a:schemeClr val="tx1"/>
+                </a:solidFill>
+                <a:effectLst/>
+                <a:latin typeface="+mn-lt"/>
+                <a:ea typeface="+mn-ea"/>
+                <a:cs typeface="+mn-cs"/>
+              </a:rPr>
+            </a:br>
+            <a:r>
+              <a:rPr lang="en-US" sz="1200" kern="1200" dirty="0">
+                <a:solidFill>
+                  <a:schemeClr val="tx1"/>
+                </a:solidFill>
+                <a:effectLst/>
+                <a:latin typeface="+mn-lt"/>
+                <a:ea typeface="+mn-ea"/>
+                <a:cs typeface="+mn-cs"/>
+              </a:rPr>
+              <a:t>        raise </a:t>
+            </a:r>
+            <a:r>
+              <a:rPr lang="en-US" sz="1200" kern="1200" dirty="0" err="1">
+                <a:solidFill>
+                  <a:schemeClr val="tx1"/>
+                </a:solidFill>
+                <a:effectLst/>
+                <a:latin typeface="+mn-lt"/>
+                <a:ea typeface="+mn-ea"/>
+                <a:cs typeface="+mn-cs"/>
+              </a:rPr>
+              <a:t>TypeError</a:t>
+            </a:r>
+            <a:r>
+              <a:rPr lang="en-US" sz="1200" kern="1200" dirty="0">
+                <a:solidFill>
+                  <a:schemeClr val="tx1"/>
+                </a:solidFill>
+                <a:effectLst/>
+                <a:latin typeface="+mn-lt"/>
+                <a:ea typeface="+mn-ea"/>
+                <a:cs typeface="+mn-cs"/>
+              </a:rPr>
+              <a:t>("x is not an integer")</a:t>
+            </a:r>
+            <a:br>
+              <a:rPr lang="en-US" sz="1200" kern="1200" dirty="0">
+                <a:solidFill>
+                  <a:schemeClr val="tx1"/>
+                </a:solidFill>
+                <a:effectLst/>
+                <a:latin typeface="+mn-lt"/>
+                <a:ea typeface="+mn-ea"/>
+                <a:cs typeface="+mn-cs"/>
+              </a:rPr>
+            </a:br>
+            <a:r>
+              <a:rPr lang="en-US" sz="1200" kern="1200" dirty="0">
+                <a:solidFill>
+                  <a:schemeClr val="tx1"/>
+                </a:solidFill>
+                <a:effectLst/>
+                <a:latin typeface="+mn-lt"/>
+                <a:ea typeface="+mn-ea"/>
+                <a:cs typeface="+mn-cs"/>
+              </a:rPr>
+              <a:t>    if not </a:t>
+            </a:r>
+            <a:r>
+              <a:rPr lang="en-US" sz="1200" kern="1200" dirty="0" err="1">
+                <a:solidFill>
+                  <a:schemeClr val="tx1"/>
+                </a:solidFill>
+                <a:effectLst/>
+                <a:latin typeface="+mn-lt"/>
+                <a:ea typeface="+mn-ea"/>
+                <a:cs typeface="+mn-cs"/>
+              </a:rPr>
+              <a:t>isinstance</a:t>
+            </a:r>
+            <a:r>
+              <a:rPr lang="en-US" sz="1200" kern="1200" dirty="0">
+                <a:solidFill>
+                  <a:schemeClr val="tx1"/>
+                </a:solidFill>
+                <a:effectLst/>
+                <a:latin typeface="+mn-lt"/>
+                <a:ea typeface="+mn-ea"/>
+                <a:cs typeface="+mn-cs"/>
+              </a:rPr>
+              <a:t>(y, int) or </a:t>
+            </a:r>
+            <a:r>
+              <a:rPr lang="en-US" sz="1200" kern="1200" dirty="0" err="1">
+                <a:solidFill>
+                  <a:schemeClr val="tx1"/>
+                </a:solidFill>
+                <a:effectLst/>
+                <a:latin typeface="+mn-lt"/>
+                <a:ea typeface="+mn-ea"/>
+                <a:cs typeface="+mn-cs"/>
+              </a:rPr>
+              <a:t>isinstance</a:t>
+            </a:r>
+            <a:r>
+              <a:rPr lang="en-US" sz="1200" kern="1200" dirty="0">
+                <a:solidFill>
+                  <a:schemeClr val="tx1"/>
+                </a:solidFill>
+                <a:effectLst/>
+                <a:latin typeface="+mn-lt"/>
+                <a:ea typeface="+mn-ea"/>
+                <a:cs typeface="+mn-cs"/>
+              </a:rPr>
+              <a:t>(y, bool):</a:t>
+            </a:r>
+            <a:br>
+              <a:rPr lang="en-US" sz="1200" kern="1200" dirty="0">
+                <a:solidFill>
+                  <a:schemeClr val="tx1"/>
+                </a:solidFill>
+                <a:effectLst/>
+                <a:latin typeface="+mn-lt"/>
+                <a:ea typeface="+mn-ea"/>
+                <a:cs typeface="+mn-cs"/>
+              </a:rPr>
+            </a:br>
+            <a:r>
+              <a:rPr lang="en-US" sz="1200" kern="1200" dirty="0">
+                <a:solidFill>
+                  <a:schemeClr val="tx1"/>
+                </a:solidFill>
+                <a:effectLst/>
+                <a:latin typeface="+mn-lt"/>
+                <a:ea typeface="+mn-ea"/>
+                <a:cs typeface="+mn-cs"/>
+              </a:rPr>
+              <a:t>        raise </a:t>
+            </a:r>
+            <a:r>
+              <a:rPr lang="en-US" sz="1200" kern="1200" dirty="0" err="1">
+                <a:solidFill>
+                  <a:schemeClr val="tx1"/>
+                </a:solidFill>
+                <a:effectLst/>
+                <a:latin typeface="+mn-lt"/>
+                <a:ea typeface="+mn-ea"/>
+                <a:cs typeface="+mn-cs"/>
+              </a:rPr>
+              <a:t>TypeError</a:t>
+            </a:r>
+            <a:r>
+              <a:rPr lang="en-US" sz="1200" kern="1200" dirty="0">
+                <a:solidFill>
+                  <a:schemeClr val="tx1"/>
+                </a:solidFill>
+                <a:effectLst/>
+                <a:latin typeface="+mn-lt"/>
+                <a:ea typeface="+mn-ea"/>
+                <a:cs typeface="+mn-cs"/>
+              </a:rPr>
+              <a:t>("y is not an integer")</a:t>
+            </a:r>
+            <a:br>
+              <a:rPr lang="en-US" sz="1200" kern="1200" dirty="0">
+                <a:solidFill>
+                  <a:schemeClr val="tx1"/>
+                </a:solidFill>
+                <a:effectLst/>
+                <a:latin typeface="+mn-lt"/>
+                <a:ea typeface="+mn-ea"/>
+                <a:cs typeface="+mn-cs"/>
+              </a:rPr>
+            </a:br>
+            <a:br>
+              <a:rPr lang="en-US" sz="1200" kern="1200" dirty="0">
+                <a:solidFill>
+                  <a:schemeClr val="tx1"/>
+                </a:solidFill>
+                <a:effectLst/>
+                <a:latin typeface="+mn-lt"/>
+                <a:ea typeface="+mn-ea"/>
+                <a:cs typeface="+mn-cs"/>
+              </a:rPr>
+            </a:br>
+            <a:r>
+              <a:rPr lang="en-US" sz="1200" kern="1200" dirty="0">
+                <a:solidFill>
+                  <a:schemeClr val="tx1"/>
+                </a:solidFill>
+                <a:effectLst/>
+                <a:latin typeface="+mn-lt"/>
+                <a:ea typeface="+mn-ea"/>
+                <a:cs typeface="+mn-cs"/>
+              </a:rPr>
+              <a:t>    # Compute the sum</a:t>
+            </a:r>
+            <a:br>
+              <a:rPr lang="en-US" sz="1200" kern="1200" dirty="0">
+                <a:solidFill>
+                  <a:schemeClr val="tx1"/>
+                </a:solidFill>
+                <a:effectLst/>
+                <a:latin typeface="+mn-lt"/>
+                <a:ea typeface="+mn-ea"/>
+                <a:cs typeface="+mn-cs"/>
+              </a:rPr>
+            </a:br>
+            <a:r>
+              <a:rPr lang="en-US" sz="1200" kern="1200" dirty="0">
+                <a:solidFill>
+                  <a:schemeClr val="tx1"/>
+                </a:solidFill>
+                <a:effectLst/>
+                <a:latin typeface="+mn-lt"/>
+                <a:ea typeface="+mn-ea"/>
+                <a:cs typeface="+mn-cs"/>
+              </a:rPr>
+              <a:t>    result = x + y</a:t>
+            </a:r>
+            <a:br>
+              <a:rPr lang="en-US" sz="1200" kern="1200" dirty="0">
+                <a:solidFill>
+                  <a:schemeClr val="tx1"/>
+                </a:solidFill>
+                <a:effectLst/>
+                <a:latin typeface="+mn-lt"/>
+                <a:ea typeface="+mn-ea"/>
+                <a:cs typeface="+mn-cs"/>
+              </a:rPr>
+            </a:br>
+            <a:br>
+              <a:rPr lang="en-US" sz="1200" kern="1200" dirty="0">
+                <a:solidFill>
+                  <a:schemeClr val="tx1"/>
+                </a:solidFill>
+                <a:effectLst/>
+                <a:latin typeface="+mn-lt"/>
+                <a:ea typeface="+mn-ea"/>
+                <a:cs typeface="+mn-cs"/>
+              </a:rPr>
+            </a:br>
+            <a:r>
+              <a:rPr lang="en-US" sz="1200" kern="1200" dirty="0">
+                <a:solidFill>
+                  <a:schemeClr val="tx1"/>
+                </a:solidFill>
+                <a:effectLst/>
+                <a:latin typeface="+mn-lt"/>
+                <a:ea typeface="+mn-ea"/>
+                <a:cs typeface="+mn-cs"/>
+              </a:rPr>
+              <a:t>    # Check for overflow</a:t>
+            </a:r>
+            <a:br>
+              <a:rPr lang="en-US" sz="1200" kern="1200" dirty="0">
+                <a:solidFill>
+                  <a:schemeClr val="tx1"/>
+                </a:solidFill>
+                <a:effectLst/>
+                <a:latin typeface="+mn-lt"/>
+                <a:ea typeface="+mn-ea"/>
+                <a:cs typeface="+mn-cs"/>
+              </a:rPr>
+            </a:br>
+            <a:r>
+              <a:rPr lang="en-US" sz="1200" kern="1200" dirty="0">
+                <a:solidFill>
+                  <a:schemeClr val="tx1"/>
+                </a:solidFill>
+                <a:effectLst/>
+                <a:latin typeface="+mn-lt"/>
+                <a:ea typeface="+mn-ea"/>
+                <a:cs typeface="+mn-cs"/>
+              </a:rPr>
+              <a:t>    if result &gt; </a:t>
+            </a:r>
+            <a:r>
+              <a:rPr lang="en-US" sz="1200" kern="1200" dirty="0" err="1">
+                <a:solidFill>
+                  <a:schemeClr val="tx1"/>
+                </a:solidFill>
+                <a:effectLst/>
+                <a:latin typeface="+mn-lt"/>
+                <a:ea typeface="+mn-ea"/>
+                <a:cs typeface="+mn-cs"/>
+              </a:rPr>
+              <a:t>sys.maxsize</a:t>
+            </a:r>
+            <a:r>
+              <a:rPr lang="en-US" sz="1200" kern="1200" dirty="0">
+                <a:solidFill>
+                  <a:schemeClr val="tx1"/>
+                </a:solidFill>
+                <a:effectLst/>
+                <a:latin typeface="+mn-lt"/>
+                <a:ea typeface="+mn-ea"/>
+                <a:cs typeface="+mn-cs"/>
+              </a:rPr>
+              <a:t> or result &lt; -</a:t>
+            </a:r>
+            <a:r>
+              <a:rPr lang="en-US" sz="1200" kern="1200" dirty="0" err="1">
+                <a:solidFill>
+                  <a:schemeClr val="tx1"/>
+                </a:solidFill>
+                <a:effectLst/>
+                <a:latin typeface="+mn-lt"/>
+                <a:ea typeface="+mn-ea"/>
+                <a:cs typeface="+mn-cs"/>
+              </a:rPr>
+              <a:t>sys.maxsize</a:t>
+            </a:r>
+            <a:r>
+              <a:rPr lang="en-US" sz="1200" kern="1200" dirty="0">
+                <a:solidFill>
+                  <a:schemeClr val="tx1"/>
+                </a:solidFill>
+                <a:effectLst/>
+                <a:latin typeface="+mn-lt"/>
+                <a:ea typeface="+mn-ea"/>
+                <a:cs typeface="+mn-cs"/>
+              </a:rPr>
+              <a:t> - 1:</a:t>
+            </a:r>
+            <a:br>
+              <a:rPr lang="en-US" sz="1200" kern="1200" dirty="0">
+                <a:solidFill>
+                  <a:schemeClr val="tx1"/>
+                </a:solidFill>
+                <a:effectLst/>
+                <a:latin typeface="+mn-lt"/>
+                <a:ea typeface="+mn-ea"/>
+                <a:cs typeface="+mn-cs"/>
+              </a:rPr>
+            </a:br>
+            <a:r>
+              <a:rPr lang="en-US" sz="1200" kern="1200" dirty="0">
+                <a:solidFill>
+                  <a:schemeClr val="tx1"/>
+                </a:solidFill>
+                <a:effectLst/>
+                <a:latin typeface="+mn-lt"/>
+                <a:ea typeface="+mn-ea"/>
+                <a:cs typeface="+mn-cs"/>
+              </a:rPr>
+              <a:t>        raise </a:t>
+            </a:r>
+            <a:r>
+              <a:rPr lang="en-US" sz="1200" kern="1200" dirty="0" err="1">
+                <a:solidFill>
+                  <a:schemeClr val="tx1"/>
+                </a:solidFill>
+                <a:effectLst/>
+                <a:latin typeface="+mn-lt"/>
+                <a:ea typeface="+mn-ea"/>
+                <a:cs typeface="+mn-cs"/>
+              </a:rPr>
+              <a:t>OverflowError</a:t>
+            </a:r>
+            <a:r>
+              <a:rPr lang="en-US" sz="1200" kern="1200" dirty="0">
+                <a:solidFill>
+                  <a:schemeClr val="tx1"/>
+                </a:solidFill>
+                <a:effectLst/>
+                <a:latin typeface="+mn-lt"/>
+                <a:ea typeface="+mn-ea"/>
+                <a:cs typeface="+mn-cs"/>
+              </a:rPr>
+              <a:t>("Integer overflow")</a:t>
+            </a:r>
+            <a:br>
+              <a:rPr lang="en-US" sz="1200" kern="1200" dirty="0">
+                <a:solidFill>
+                  <a:schemeClr val="tx1"/>
+                </a:solidFill>
+                <a:effectLst/>
+                <a:latin typeface="+mn-lt"/>
+                <a:ea typeface="+mn-ea"/>
+                <a:cs typeface="+mn-cs"/>
+              </a:rPr>
+            </a:br>
+            <a:br>
+              <a:rPr lang="en-US" sz="1200" kern="1200" dirty="0">
+                <a:solidFill>
+                  <a:schemeClr val="tx1"/>
+                </a:solidFill>
+                <a:effectLst/>
+                <a:latin typeface="+mn-lt"/>
+                <a:ea typeface="+mn-ea"/>
+                <a:cs typeface="+mn-cs"/>
+              </a:rPr>
+            </a:br>
+            <a:r>
+              <a:rPr lang="en-US" sz="1200" kern="1200" dirty="0">
+                <a:solidFill>
+                  <a:schemeClr val="tx1"/>
+                </a:solidFill>
+                <a:effectLst/>
+                <a:latin typeface="+mn-lt"/>
+                <a:ea typeface="+mn-ea"/>
+                <a:cs typeface="+mn-cs"/>
+              </a:rPr>
+              <a:t>    return result</a:t>
+            </a:r>
+            <a:br>
+              <a:rPr lang="en-US" sz="1200" kern="1200" dirty="0">
+                <a:solidFill>
+                  <a:schemeClr val="tx1"/>
+                </a:solidFill>
+                <a:effectLst/>
+                <a:latin typeface="+mn-lt"/>
+                <a:ea typeface="+mn-ea"/>
+                <a:cs typeface="+mn-cs"/>
+              </a:rPr>
+            </a:br>
+            <a:br>
+              <a:rPr lang="en-US" sz="1200" kern="1200" dirty="0">
+                <a:solidFill>
+                  <a:schemeClr val="tx1"/>
+                </a:solidFill>
+                <a:effectLst/>
+                <a:latin typeface="+mn-lt"/>
+                <a:ea typeface="+mn-ea"/>
+                <a:cs typeface="+mn-cs"/>
+              </a:rPr>
+            </a:br>
+            <a:br>
+              <a:rPr lang="en-US" sz="1200" kern="1200" dirty="0">
+                <a:solidFill>
+                  <a:schemeClr val="tx1"/>
+                </a:solidFill>
+                <a:effectLst/>
+                <a:latin typeface="+mn-lt"/>
+                <a:ea typeface="+mn-ea"/>
+                <a:cs typeface="+mn-cs"/>
+              </a:rPr>
+            </a:br>
+            <a:br>
+              <a:rPr lang="en-US" sz="1200" kern="1200" dirty="0">
+                <a:solidFill>
+                  <a:schemeClr val="tx1"/>
+                </a:solidFill>
+                <a:effectLst/>
+                <a:latin typeface="+mn-lt"/>
+                <a:ea typeface="+mn-ea"/>
+                <a:cs typeface="+mn-cs"/>
+              </a:rPr>
+            </a:br>
+            <a:br>
+              <a:rPr lang="en-US" sz="1200" kern="1200" dirty="0">
+                <a:solidFill>
+                  <a:schemeClr val="tx1"/>
+                </a:solidFill>
+                <a:effectLst/>
+                <a:latin typeface="+mn-lt"/>
+                <a:ea typeface="+mn-ea"/>
+                <a:cs typeface="+mn-cs"/>
+              </a:rPr>
+            </a:br>
+            <a:br>
+              <a:rPr lang="en-US" sz="1200" kern="1200" dirty="0">
+                <a:solidFill>
+                  <a:schemeClr val="tx1"/>
+                </a:solidFill>
+                <a:effectLst/>
+                <a:latin typeface="+mn-lt"/>
+                <a:ea typeface="+mn-ea"/>
+                <a:cs typeface="+mn-cs"/>
+              </a:rPr>
+            </a:br>
+            <a:r>
+              <a:rPr lang="en-US" sz="1200" kern="1200" dirty="0">
+                <a:solidFill>
+                  <a:schemeClr val="tx1"/>
+                </a:solidFill>
+                <a:effectLst/>
+                <a:latin typeface="+mn-lt"/>
+                <a:ea typeface="+mn-ea"/>
+                <a:cs typeface="+mn-cs"/>
+              </a:rPr>
+              <a:t>if __name__ == "__main__":</a:t>
+            </a:r>
+            <a:br>
+              <a:rPr lang="en-US" sz="1200" kern="1200" dirty="0">
+                <a:solidFill>
+                  <a:schemeClr val="tx1"/>
+                </a:solidFill>
+                <a:effectLst/>
+                <a:latin typeface="+mn-lt"/>
+                <a:ea typeface="+mn-ea"/>
+                <a:cs typeface="+mn-cs"/>
+              </a:rPr>
+            </a:br>
+            <a:r>
+              <a:rPr lang="en-US" sz="1200" kern="1200" dirty="0">
+                <a:solidFill>
+                  <a:schemeClr val="tx1"/>
+                </a:solidFill>
+                <a:effectLst/>
+                <a:latin typeface="+mn-lt"/>
+                <a:ea typeface="+mn-ea"/>
+                <a:cs typeface="+mn-cs"/>
+              </a:rPr>
+              <a:t>    # Demonstrate normal usage</a:t>
+            </a:r>
+            <a:br>
+              <a:rPr lang="en-US" sz="1200" kern="1200" dirty="0">
+                <a:solidFill>
+                  <a:schemeClr val="tx1"/>
+                </a:solidFill>
+                <a:effectLst/>
+                <a:latin typeface="+mn-lt"/>
+                <a:ea typeface="+mn-ea"/>
+                <a:cs typeface="+mn-cs"/>
+              </a:rPr>
+            </a:br>
+            <a:r>
+              <a:rPr lang="en-US" sz="1200" kern="1200" dirty="0">
+                <a:solidFill>
+                  <a:schemeClr val="tx1"/>
+                </a:solidFill>
+                <a:effectLst/>
+                <a:latin typeface="+mn-lt"/>
+                <a:ea typeface="+mn-ea"/>
+                <a:cs typeface="+mn-cs"/>
+              </a:rPr>
+              <a:t>    print("=== Normal Usage ===")</a:t>
+            </a:r>
+            <a:br>
+              <a:rPr lang="en-US" sz="1200" kern="1200" dirty="0">
+                <a:solidFill>
+                  <a:schemeClr val="tx1"/>
+                </a:solidFill>
+                <a:effectLst/>
+                <a:latin typeface="+mn-lt"/>
+                <a:ea typeface="+mn-ea"/>
+                <a:cs typeface="+mn-cs"/>
+              </a:rPr>
+            </a:br>
+            <a:r>
+              <a:rPr lang="en-US" sz="1200" kern="1200" dirty="0">
+                <a:solidFill>
+                  <a:schemeClr val="tx1"/>
+                </a:solidFill>
+                <a:effectLst/>
+                <a:latin typeface="+mn-lt"/>
+                <a:ea typeface="+mn-ea"/>
+                <a:cs typeface="+mn-cs"/>
+              </a:rPr>
+              <a:t>    print(</a:t>
+            </a:r>
+            <a:r>
+              <a:rPr lang="en-US" sz="1200" kern="1200" dirty="0" err="1">
+                <a:solidFill>
+                  <a:schemeClr val="tx1"/>
+                </a:solidFill>
+                <a:effectLst/>
+                <a:latin typeface="+mn-lt"/>
+                <a:ea typeface="+mn-ea"/>
+                <a:cs typeface="+mn-cs"/>
+              </a:rPr>
+              <a:t>f"add</a:t>
+            </a:r>
+            <a:r>
+              <a:rPr lang="en-US" sz="1200" kern="1200" dirty="0">
+                <a:solidFill>
+                  <a:schemeClr val="tx1"/>
+                </a:solidFill>
+                <a:effectLst/>
+                <a:latin typeface="+mn-lt"/>
+                <a:ea typeface="+mn-ea"/>
+                <a:cs typeface="+mn-cs"/>
+              </a:rPr>
+              <a:t>(5, 3) = {add(5, 3)}")</a:t>
+            </a:r>
+            <a:br>
+              <a:rPr lang="en-US" sz="1200" kern="1200" dirty="0">
+                <a:solidFill>
+                  <a:schemeClr val="tx1"/>
+                </a:solidFill>
+                <a:effectLst/>
+                <a:latin typeface="+mn-lt"/>
+                <a:ea typeface="+mn-ea"/>
+                <a:cs typeface="+mn-cs"/>
+              </a:rPr>
+            </a:br>
+            <a:r>
+              <a:rPr lang="en-US" sz="1200" kern="1200" dirty="0">
+                <a:solidFill>
+                  <a:schemeClr val="tx1"/>
+                </a:solidFill>
+                <a:effectLst/>
+                <a:latin typeface="+mn-lt"/>
+                <a:ea typeface="+mn-ea"/>
+                <a:cs typeface="+mn-cs"/>
+              </a:rPr>
+              <a:t>    print(</a:t>
+            </a:r>
+            <a:r>
+              <a:rPr lang="en-US" sz="1200" kern="1200" dirty="0" err="1">
+                <a:solidFill>
+                  <a:schemeClr val="tx1"/>
+                </a:solidFill>
+                <a:effectLst/>
+                <a:latin typeface="+mn-lt"/>
+                <a:ea typeface="+mn-ea"/>
+                <a:cs typeface="+mn-cs"/>
+              </a:rPr>
+              <a:t>f"add</a:t>
+            </a:r>
+            <a:r>
+              <a:rPr lang="en-US" sz="1200" kern="1200" dirty="0">
+                <a:solidFill>
+                  <a:schemeClr val="tx1"/>
+                </a:solidFill>
+                <a:effectLst/>
+                <a:latin typeface="+mn-lt"/>
+                <a:ea typeface="+mn-ea"/>
+                <a:cs typeface="+mn-cs"/>
+              </a:rPr>
+              <a:t>(-10, 4) = {add(-10, 4)}")</a:t>
+            </a:r>
+            <a:br>
+              <a:rPr lang="en-US" sz="1200" kern="1200" dirty="0">
+                <a:solidFill>
+                  <a:schemeClr val="tx1"/>
+                </a:solidFill>
+                <a:effectLst/>
+                <a:latin typeface="+mn-lt"/>
+                <a:ea typeface="+mn-ea"/>
+                <a:cs typeface="+mn-cs"/>
+              </a:rPr>
+            </a:br>
+            <a:r>
+              <a:rPr lang="en-US" sz="1200" kern="1200" dirty="0">
+                <a:solidFill>
+                  <a:schemeClr val="tx1"/>
+                </a:solidFill>
+                <a:effectLst/>
+                <a:latin typeface="+mn-lt"/>
+                <a:ea typeface="+mn-ea"/>
+                <a:cs typeface="+mn-cs"/>
+              </a:rPr>
+              <a:t>    print(</a:t>
+            </a:r>
+            <a:r>
+              <a:rPr lang="en-US" sz="1200" kern="1200" dirty="0" err="1">
+                <a:solidFill>
+                  <a:schemeClr val="tx1"/>
+                </a:solidFill>
+                <a:effectLst/>
+                <a:latin typeface="+mn-lt"/>
+                <a:ea typeface="+mn-ea"/>
+                <a:cs typeface="+mn-cs"/>
+              </a:rPr>
+              <a:t>f"add</a:t>
+            </a:r>
+            <a:r>
+              <a:rPr lang="en-US" sz="1200" kern="1200" dirty="0">
+                <a:solidFill>
+                  <a:schemeClr val="tx1"/>
+                </a:solidFill>
+                <a:effectLst/>
+                <a:latin typeface="+mn-lt"/>
+                <a:ea typeface="+mn-ea"/>
+                <a:cs typeface="+mn-cs"/>
+              </a:rPr>
+              <a:t>(0, 42) = {add(0, 42)}")</a:t>
+            </a:r>
+            <a:br>
+              <a:rPr lang="en-US" sz="1200" kern="1200" dirty="0">
+                <a:solidFill>
+                  <a:schemeClr val="tx1"/>
+                </a:solidFill>
+                <a:effectLst/>
+                <a:latin typeface="+mn-lt"/>
+                <a:ea typeface="+mn-ea"/>
+                <a:cs typeface="+mn-cs"/>
+              </a:rPr>
+            </a:br>
+            <a:br>
+              <a:rPr lang="en-US" sz="1200" kern="1200" dirty="0">
+                <a:solidFill>
+                  <a:schemeClr val="tx1"/>
+                </a:solidFill>
+                <a:effectLst/>
+                <a:latin typeface="+mn-lt"/>
+                <a:ea typeface="+mn-ea"/>
+                <a:cs typeface="+mn-cs"/>
+              </a:rPr>
+            </a:br>
+            <a:r>
+              <a:rPr lang="en-US" sz="1200" kern="1200" dirty="0">
+                <a:solidFill>
+                  <a:schemeClr val="tx1"/>
+                </a:solidFill>
+                <a:effectLst/>
+                <a:latin typeface="+mn-lt"/>
+                <a:ea typeface="+mn-ea"/>
+                <a:cs typeface="+mn-cs"/>
+              </a:rPr>
+              <a:t>    # Demonstrate </a:t>
+            </a:r>
+            <a:r>
+              <a:rPr lang="en-US" sz="1200" kern="1200" dirty="0" err="1">
+                <a:solidFill>
+                  <a:schemeClr val="tx1"/>
+                </a:solidFill>
+                <a:effectLst/>
+                <a:latin typeface="+mn-lt"/>
+                <a:ea typeface="+mn-ea"/>
+                <a:cs typeface="+mn-cs"/>
+              </a:rPr>
+              <a:t>TypeError</a:t>
+            </a:r>
+            <a:br>
+              <a:rPr lang="en-US" sz="1200" kern="1200" dirty="0">
+                <a:solidFill>
+                  <a:schemeClr val="tx1"/>
+                </a:solidFill>
+                <a:effectLst/>
+                <a:latin typeface="+mn-lt"/>
+                <a:ea typeface="+mn-ea"/>
+                <a:cs typeface="+mn-cs"/>
+              </a:rPr>
+            </a:br>
+            <a:r>
+              <a:rPr lang="en-US" sz="1200" kern="1200" dirty="0">
+                <a:solidFill>
+                  <a:schemeClr val="tx1"/>
+                </a:solidFill>
+                <a:effectLst/>
+                <a:latin typeface="+mn-lt"/>
+                <a:ea typeface="+mn-ea"/>
+                <a:cs typeface="+mn-cs"/>
+              </a:rPr>
+              <a:t>    print("\n=== Type Error Handling ===")</a:t>
+            </a:r>
+            <a:br>
+              <a:rPr lang="en-US" sz="1200" kern="1200" dirty="0">
+                <a:solidFill>
+                  <a:schemeClr val="tx1"/>
+                </a:solidFill>
+                <a:effectLst/>
+                <a:latin typeface="+mn-lt"/>
+                <a:ea typeface="+mn-ea"/>
+                <a:cs typeface="+mn-cs"/>
+              </a:rPr>
+            </a:br>
+            <a:r>
+              <a:rPr lang="en-US" sz="1200" kern="1200" dirty="0">
+                <a:solidFill>
+                  <a:schemeClr val="tx1"/>
+                </a:solidFill>
+                <a:effectLst/>
+                <a:latin typeface="+mn-lt"/>
+                <a:ea typeface="+mn-ea"/>
+                <a:cs typeface="+mn-cs"/>
+              </a:rPr>
+              <a:t>    try:</a:t>
+            </a:r>
+            <a:br>
+              <a:rPr lang="en-US" sz="1200" kern="1200" dirty="0">
+                <a:solidFill>
+                  <a:schemeClr val="tx1"/>
+                </a:solidFill>
+                <a:effectLst/>
+                <a:latin typeface="+mn-lt"/>
+                <a:ea typeface="+mn-ea"/>
+                <a:cs typeface="+mn-cs"/>
+              </a:rPr>
+            </a:br>
+            <a:r>
+              <a:rPr lang="en-US" sz="1200" kern="1200" dirty="0">
+                <a:solidFill>
+                  <a:schemeClr val="tx1"/>
+                </a:solidFill>
+                <a:effectLst/>
+                <a:latin typeface="+mn-lt"/>
+                <a:ea typeface="+mn-ea"/>
+                <a:cs typeface="+mn-cs"/>
+              </a:rPr>
+              <a:t>        add("5", 3)</a:t>
+            </a:r>
+            <a:br>
+              <a:rPr lang="en-US" sz="1200" kern="1200" dirty="0">
+                <a:solidFill>
+                  <a:schemeClr val="tx1"/>
+                </a:solidFill>
+                <a:effectLst/>
+                <a:latin typeface="+mn-lt"/>
+                <a:ea typeface="+mn-ea"/>
+                <a:cs typeface="+mn-cs"/>
+              </a:rPr>
+            </a:br>
+            <a:r>
+              <a:rPr lang="en-US" sz="1200" kern="1200" dirty="0">
+                <a:solidFill>
+                  <a:schemeClr val="tx1"/>
+                </a:solidFill>
+                <a:effectLst/>
+                <a:latin typeface="+mn-lt"/>
+                <a:ea typeface="+mn-ea"/>
+                <a:cs typeface="+mn-cs"/>
+              </a:rPr>
+              <a:t>    except </a:t>
+            </a:r>
+            <a:r>
+              <a:rPr lang="en-US" sz="1200" kern="1200" dirty="0" err="1">
+                <a:solidFill>
+                  <a:schemeClr val="tx1"/>
+                </a:solidFill>
+                <a:effectLst/>
+                <a:latin typeface="+mn-lt"/>
+                <a:ea typeface="+mn-ea"/>
+                <a:cs typeface="+mn-cs"/>
+              </a:rPr>
+              <a:t>TypeError</a:t>
+            </a:r>
+            <a:r>
+              <a:rPr lang="en-US" sz="1200" kern="1200" dirty="0">
+                <a:solidFill>
+                  <a:schemeClr val="tx1"/>
+                </a:solidFill>
+                <a:effectLst/>
+                <a:latin typeface="+mn-lt"/>
+                <a:ea typeface="+mn-ea"/>
+                <a:cs typeface="+mn-cs"/>
+              </a:rPr>
+              <a:t> as e:</a:t>
+            </a:r>
+            <a:br>
+              <a:rPr lang="en-US" sz="1200" kern="1200" dirty="0">
+                <a:solidFill>
+                  <a:schemeClr val="tx1"/>
+                </a:solidFill>
+                <a:effectLst/>
+                <a:latin typeface="+mn-lt"/>
+                <a:ea typeface="+mn-ea"/>
+                <a:cs typeface="+mn-cs"/>
+              </a:rPr>
+            </a:br>
+            <a:r>
+              <a:rPr lang="en-US" sz="1200" kern="1200" dirty="0">
+                <a:solidFill>
+                  <a:schemeClr val="tx1"/>
+                </a:solidFill>
+                <a:effectLst/>
+                <a:latin typeface="+mn-lt"/>
+                <a:ea typeface="+mn-ea"/>
+                <a:cs typeface="+mn-cs"/>
+              </a:rPr>
+              <a:t>        print(</a:t>
+            </a:r>
+            <a:r>
+              <a:rPr lang="en-US" sz="1200" kern="1200" dirty="0" err="1">
+                <a:solidFill>
+                  <a:schemeClr val="tx1"/>
+                </a:solidFill>
+                <a:effectLst/>
+                <a:latin typeface="+mn-lt"/>
+                <a:ea typeface="+mn-ea"/>
+                <a:cs typeface="+mn-cs"/>
+              </a:rPr>
+              <a:t>f"TypeError</a:t>
+            </a:r>
+            <a:r>
+              <a:rPr lang="en-US" sz="1200" kern="1200" dirty="0">
+                <a:solidFill>
+                  <a:schemeClr val="tx1"/>
+                </a:solidFill>
+                <a:effectLst/>
+                <a:latin typeface="+mn-lt"/>
+                <a:ea typeface="+mn-ea"/>
+                <a:cs typeface="+mn-cs"/>
+              </a:rPr>
+              <a:t> caught: {e}")</a:t>
+            </a:r>
+            <a:br>
+              <a:rPr lang="en-US" sz="1200" kern="1200" dirty="0">
+                <a:solidFill>
+                  <a:schemeClr val="tx1"/>
+                </a:solidFill>
+                <a:effectLst/>
+                <a:latin typeface="+mn-lt"/>
+                <a:ea typeface="+mn-ea"/>
+                <a:cs typeface="+mn-cs"/>
+              </a:rPr>
+            </a:br>
+            <a:br>
+              <a:rPr lang="en-US" sz="1200" kern="1200" dirty="0">
+                <a:solidFill>
+                  <a:schemeClr val="tx1"/>
+                </a:solidFill>
+                <a:effectLst/>
+                <a:latin typeface="+mn-lt"/>
+                <a:ea typeface="+mn-ea"/>
+                <a:cs typeface="+mn-cs"/>
+              </a:rPr>
+            </a:br>
+            <a:r>
+              <a:rPr lang="en-US" sz="1200" kern="1200" dirty="0">
+                <a:solidFill>
+                  <a:schemeClr val="tx1"/>
+                </a:solidFill>
+                <a:effectLst/>
+                <a:latin typeface="+mn-lt"/>
+                <a:ea typeface="+mn-ea"/>
+                <a:cs typeface="+mn-cs"/>
+              </a:rPr>
+              <a:t>    # Demonstrate </a:t>
+            </a:r>
+            <a:r>
+              <a:rPr lang="en-US" sz="1200" kern="1200" dirty="0" err="1">
+                <a:solidFill>
+                  <a:schemeClr val="tx1"/>
+                </a:solidFill>
+                <a:effectLst/>
+                <a:latin typeface="+mn-lt"/>
+                <a:ea typeface="+mn-ea"/>
+                <a:cs typeface="+mn-cs"/>
+              </a:rPr>
+              <a:t>OverflowError</a:t>
+            </a:r>
+            <a:br>
+              <a:rPr lang="en-US" sz="1200" kern="1200" dirty="0">
+                <a:solidFill>
+                  <a:schemeClr val="tx1"/>
+                </a:solidFill>
+                <a:effectLst/>
+                <a:latin typeface="+mn-lt"/>
+                <a:ea typeface="+mn-ea"/>
+                <a:cs typeface="+mn-cs"/>
+              </a:rPr>
+            </a:br>
+            <a:r>
+              <a:rPr lang="en-US" sz="1200" kern="1200" dirty="0">
+                <a:solidFill>
+                  <a:schemeClr val="tx1"/>
+                </a:solidFill>
+                <a:effectLst/>
+                <a:latin typeface="+mn-lt"/>
+                <a:ea typeface="+mn-ea"/>
+                <a:cs typeface="+mn-cs"/>
+              </a:rPr>
+              <a:t>    print("\n=== Overflow Error Handling ===")</a:t>
+            </a:r>
+            <a:br>
+              <a:rPr lang="en-US" sz="1200" kern="1200" dirty="0">
+                <a:solidFill>
+                  <a:schemeClr val="tx1"/>
+                </a:solidFill>
+                <a:effectLst/>
+                <a:latin typeface="+mn-lt"/>
+                <a:ea typeface="+mn-ea"/>
+                <a:cs typeface="+mn-cs"/>
+              </a:rPr>
+            </a:br>
+            <a:r>
+              <a:rPr lang="en-US" sz="1200" kern="1200" dirty="0">
+                <a:solidFill>
+                  <a:schemeClr val="tx1"/>
+                </a:solidFill>
+                <a:effectLst/>
+                <a:latin typeface="+mn-lt"/>
+                <a:ea typeface="+mn-ea"/>
+                <a:cs typeface="+mn-cs"/>
+              </a:rPr>
+              <a:t>    try:</a:t>
+            </a:r>
+            <a:br>
+              <a:rPr lang="en-US" sz="1200" kern="1200" dirty="0">
+                <a:solidFill>
+                  <a:schemeClr val="tx1"/>
+                </a:solidFill>
+                <a:effectLst/>
+                <a:latin typeface="+mn-lt"/>
+                <a:ea typeface="+mn-ea"/>
+                <a:cs typeface="+mn-cs"/>
+              </a:rPr>
+            </a:br>
+            <a:r>
+              <a:rPr lang="en-US" sz="1200" kern="1200" dirty="0">
+                <a:solidFill>
+                  <a:schemeClr val="tx1"/>
+                </a:solidFill>
+                <a:effectLst/>
+                <a:latin typeface="+mn-lt"/>
+                <a:ea typeface="+mn-ea"/>
+                <a:cs typeface="+mn-cs"/>
+              </a:rPr>
+              <a:t>        print(add(</a:t>
+            </a:r>
+            <a:r>
+              <a:rPr lang="en-US" sz="1200" kern="1200" dirty="0" err="1">
+                <a:solidFill>
+                  <a:schemeClr val="tx1"/>
+                </a:solidFill>
+                <a:effectLst/>
+                <a:latin typeface="+mn-lt"/>
+                <a:ea typeface="+mn-ea"/>
+                <a:cs typeface="+mn-cs"/>
+              </a:rPr>
+              <a:t>sys.maxsize</a:t>
+            </a:r>
+            <a:r>
+              <a:rPr lang="en-US" sz="1200" kern="1200" dirty="0">
+                <a:solidFill>
+                  <a:schemeClr val="tx1"/>
+                </a:solidFill>
+                <a:effectLst/>
+                <a:latin typeface="+mn-lt"/>
+                <a:ea typeface="+mn-ea"/>
+                <a:cs typeface="+mn-cs"/>
+              </a:rPr>
+              <a:t>, 1))</a:t>
+            </a:r>
+            <a:br>
+              <a:rPr lang="en-US" sz="1200" kern="1200" dirty="0">
+                <a:solidFill>
+                  <a:schemeClr val="tx1"/>
+                </a:solidFill>
+                <a:effectLst/>
+                <a:latin typeface="+mn-lt"/>
+                <a:ea typeface="+mn-ea"/>
+                <a:cs typeface="+mn-cs"/>
+              </a:rPr>
+            </a:br>
+            <a:r>
+              <a:rPr lang="en-US" sz="1200" kern="1200" dirty="0">
+                <a:solidFill>
+                  <a:schemeClr val="tx1"/>
+                </a:solidFill>
+                <a:effectLst/>
+                <a:latin typeface="+mn-lt"/>
+                <a:ea typeface="+mn-ea"/>
+                <a:cs typeface="+mn-cs"/>
+              </a:rPr>
+              <a:t>    except </a:t>
+            </a:r>
+            <a:r>
+              <a:rPr lang="en-US" sz="1200" kern="1200" dirty="0" err="1">
+                <a:solidFill>
+                  <a:schemeClr val="tx1"/>
+                </a:solidFill>
+                <a:effectLst/>
+                <a:latin typeface="+mn-lt"/>
+                <a:ea typeface="+mn-ea"/>
+                <a:cs typeface="+mn-cs"/>
+              </a:rPr>
+              <a:t>OverflowError</a:t>
+            </a:r>
+            <a:r>
+              <a:rPr lang="en-US" sz="1200" kern="1200" dirty="0">
+                <a:solidFill>
+                  <a:schemeClr val="tx1"/>
+                </a:solidFill>
+                <a:effectLst/>
+                <a:latin typeface="+mn-lt"/>
+                <a:ea typeface="+mn-ea"/>
+                <a:cs typeface="+mn-cs"/>
+              </a:rPr>
+              <a:t> as e:</a:t>
+            </a:r>
+            <a:br>
+              <a:rPr lang="en-US" sz="1200" kern="1200" dirty="0">
+                <a:solidFill>
+                  <a:schemeClr val="tx1"/>
+                </a:solidFill>
+                <a:effectLst/>
+                <a:latin typeface="+mn-lt"/>
+                <a:ea typeface="+mn-ea"/>
+                <a:cs typeface="+mn-cs"/>
+              </a:rPr>
+            </a:br>
+            <a:r>
+              <a:rPr lang="en-US" sz="1200" kern="1200" dirty="0">
+                <a:solidFill>
+                  <a:schemeClr val="tx1"/>
+                </a:solidFill>
+                <a:effectLst/>
+                <a:latin typeface="+mn-lt"/>
+                <a:ea typeface="+mn-ea"/>
+                <a:cs typeface="+mn-cs"/>
+              </a:rPr>
+              <a:t>        print(</a:t>
+            </a:r>
+            <a:r>
+              <a:rPr lang="en-US" sz="1200" kern="1200" dirty="0" err="1">
+                <a:solidFill>
+                  <a:schemeClr val="tx1"/>
+                </a:solidFill>
+                <a:effectLst/>
+                <a:latin typeface="+mn-lt"/>
+                <a:ea typeface="+mn-ea"/>
+                <a:cs typeface="+mn-cs"/>
+              </a:rPr>
+              <a:t>f"OverflowError</a:t>
+            </a:r>
+            <a:r>
+              <a:rPr lang="en-US" sz="1200" kern="1200" dirty="0">
+                <a:solidFill>
+                  <a:schemeClr val="tx1"/>
+                </a:solidFill>
+                <a:effectLst/>
+                <a:latin typeface="+mn-lt"/>
+                <a:ea typeface="+mn-ea"/>
+                <a:cs typeface="+mn-cs"/>
+              </a:rPr>
+              <a:t> caught: {e}")</a:t>
+            </a:r>
+          </a:p>
+          <a:p>
+            <a:endParaRPr lang="en-US" dirty="0"/>
+          </a:p>
+        </p:txBody>
+      </p:sp>
+      <p:sp>
+        <p:nvSpPr>
+          <p:cNvPr id="4" name="Slide Number Placeholder 3">
+            <a:extLst>
+              <a:ext uri="{FF2B5EF4-FFF2-40B4-BE49-F238E27FC236}">
+                <a16:creationId xmlns:a16="http://schemas.microsoft.com/office/drawing/2014/main" id="{E33F44E4-9FD9-DCBC-9496-47D8159D61BD}"/>
+              </a:ext>
+            </a:extLst>
+          </p:cNvPr>
+          <p:cNvSpPr>
+            <a:spLocks noGrp="1"/>
+          </p:cNvSpPr>
+          <p:nvPr>
+            <p:ph type="sldNum" sz="quarter" idx="5"/>
+          </p:nvPr>
+        </p:nvSpPr>
+        <p:spPr/>
+        <p:txBody>
+          <a:bodyPr/>
+          <a:lstStyle/>
+          <a:p>
+            <a:fld id="{FA41C955-0A53-4CE8-B014-58EE68AEC52A}" type="slidenum">
+              <a:rPr lang="en-US" smtClean="0"/>
+              <a:t>13</a:t>
+            </a:fld>
+            <a:endParaRPr lang="en-US"/>
+          </a:p>
+        </p:txBody>
+      </p:sp>
+    </p:spTree>
+    <p:extLst>
+      <p:ext uri="{BB962C8B-B14F-4D97-AF65-F5344CB8AC3E}">
+        <p14:creationId xmlns:p14="http://schemas.microsoft.com/office/powerpoint/2010/main" val="2879994937"/>
+      </p:ext>
+    </p:extLst>
+  </p:cSld>
+  <p:clrMapOvr>
+    <a:masterClrMapping/>
+  </p:clrMapOvr>
+</p:notes>
+</file>
+
+<file path=ppt/notesSlides/notesSlide5.xml><?xml version="1.0" encoding="utf-8"?>
+<p:notes xmlns:a="http://schemas.openxmlformats.org/drawingml/2006/main" xmlns:r="http://schemas.openxmlformats.org/officeDocument/2006/relationships" xmlns:p="http://schemas.openxmlformats.org/presentationml/2006/main">
+  <p:cSld>
+    <p:spTree>
+      <p:nvGrpSpPr>
+        <p:cNvPr id="1" name="">
+          <a:extLst>
+            <a:ext uri="{FF2B5EF4-FFF2-40B4-BE49-F238E27FC236}">
+              <a16:creationId xmlns:a16="http://schemas.microsoft.com/office/drawing/2014/main" id="{C8FE2078-B80A-68E9-0301-A75C068C59E2}"/>
+            </a:ext>
+          </a:extLst>
+        </p:cNvPr>
+        <p:cNvGrpSpPr/>
+        <p:nvPr/>
+      </p:nvGrpSpPr>
+      <p:grpSpPr>
+        <a:xfrm>
+          <a:off x="0" y="0"/>
+          <a:ext cx="0" cy="0"/>
+          <a:chOff x="0" y="0"/>
+          <a:chExt cx="0" cy="0"/>
+        </a:xfrm>
+      </p:grpSpPr>
+      <p:sp>
+        <p:nvSpPr>
+          <p:cNvPr id="2" name="Slide Image Placeholder 1">
+            <a:extLst>
+              <a:ext uri="{FF2B5EF4-FFF2-40B4-BE49-F238E27FC236}">
+                <a16:creationId xmlns:a16="http://schemas.microsoft.com/office/drawing/2014/main" id="{6BAB8CC9-F413-9848-701F-8399B000D989}"/>
+              </a:ext>
+            </a:extLst>
+          </p:cNvPr>
+          <p:cNvSpPr>
+            <a:spLocks noGrp="1" noRot="1" noChangeAspect="1"/>
+          </p:cNvSpPr>
+          <p:nvPr>
+            <p:ph type="sldImg"/>
+          </p:nvPr>
+        </p:nvSpPr>
+        <p:spPr/>
+      </p:sp>
+      <p:sp>
+        <p:nvSpPr>
+          <p:cNvPr id="3" name="Notes Placeholder 2">
+            <a:extLst>
+              <a:ext uri="{FF2B5EF4-FFF2-40B4-BE49-F238E27FC236}">
+                <a16:creationId xmlns:a16="http://schemas.microsoft.com/office/drawing/2014/main" id="{EA524A33-DC28-35F4-EFAB-8233CB2941AE}"/>
+              </a:ext>
+            </a:extLst>
+          </p:cNvPr>
+          <p:cNvSpPr>
+            <a:spLocks noGrp="1"/>
+          </p:cNvSpPr>
+          <p:nvPr>
+            <p:ph type="body" idx="1"/>
+          </p:nvPr>
+        </p:nvSpPr>
+        <p:spPr/>
+        <p:txBody>
+          <a:bodyPr/>
+          <a:lstStyle/>
+          <a:p>
+            <a:pPr marL="0" marR="0" lvl="0" indent="0" algn="l" defTabSz="914400" rtl="0" eaLnBrk="1" fontAlgn="auto" latinLnBrk="0" hangingPunct="1">
+              <a:lnSpc>
+                <a:spcPct val="100000"/>
+              </a:lnSpc>
+              <a:spcBef>
+                <a:spcPts val="0"/>
+              </a:spcBef>
+              <a:spcAft>
+                <a:spcPts val="0"/>
+              </a:spcAft>
+              <a:buClrTx/>
+              <a:buSzTx/>
+              <a:buFontTx/>
+              <a:buNone/>
+              <a:tabLst/>
+              <a:defRPr/>
+            </a:pPr>
+            <a:r>
+              <a:rPr lang="en-US" sz="1200" kern="1200" dirty="0">
+                <a:solidFill>
+                  <a:schemeClr val="tx1"/>
+                </a:solidFill>
+                <a:effectLst/>
+                <a:latin typeface="+mn-lt"/>
+                <a:ea typeface="+mn-ea"/>
+                <a:cs typeface="+mn-cs"/>
+              </a:rPr>
+              <a:t>import sys</a:t>
+            </a:r>
+            <a:br>
+              <a:rPr lang="en-US" sz="1200" kern="1200" dirty="0">
+                <a:solidFill>
+                  <a:schemeClr val="tx1"/>
+                </a:solidFill>
+                <a:effectLst/>
+                <a:latin typeface="+mn-lt"/>
+                <a:ea typeface="+mn-ea"/>
+                <a:cs typeface="+mn-cs"/>
+              </a:rPr>
+            </a:br>
+            <a:br>
+              <a:rPr lang="en-US" sz="1200" kern="1200" dirty="0">
+                <a:solidFill>
+                  <a:schemeClr val="tx1"/>
+                </a:solidFill>
+                <a:effectLst/>
+                <a:latin typeface="+mn-lt"/>
+                <a:ea typeface="+mn-ea"/>
+                <a:cs typeface="+mn-cs"/>
+              </a:rPr>
+            </a:br>
+            <a:br>
+              <a:rPr lang="en-US" sz="1200" kern="1200" dirty="0">
+                <a:solidFill>
+                  <a:schemeClr val="tx1"/>
+                </a:solidFill>
+                <a:effectLst/>
+                <a:latin typeface="+mn-lt"/>
+                <a:ea typeface="+mn-ea"/>
+                <a:cs typeface="+mn-cs"/>
+              </a:rPr>
+            </a:br>
+            <a:r>
+              <a:rPr lang="en-US" sz="1200" kern="1200" dirty="0">
+                <a:solidFill>
+                  <a:schemeClr val="tx1"/>
+                </a:solidFill>
+                <a:effectLst/>
+                <a:latin typeface="+mn-lt"/>
+                <a:ea typeface="+mn-ea"/>
+                <a:cs typeface="+mn-cs"/>
+              </a:rPr>
+              <a:t>def add(x: int, y: int) -&gt; int:</a:t>
+            </a:r>
+            <a:br>
+              <a:rPr lang="en-US" sz="1200" kern="1200" dirty="0">
+                <a:solidFill>
+                  <a:schemeClr val="tx1"/>
+                </a:solidFill>
+                <a:effectLst/>
+                <a:latin typeface="+mn-lt"/>
+                <a:ea typeface="+mn-ea"/>
+                <a:cs typeface="+mn-cs"/>
+              </a:rPr>
+            </a:br>
+            <a:r>
+              <a:rPr lang="en-US" sz="1200" kern="1200" dirty="0">
+                <a:solidFill>
+                  <a:schemeClr val="tx1"/>
+                </a:solidFill>
+                <a:effectLst/>
+                <a:latin typeface="+mn-lt"/>
+                <a:ea typeface="+mn-ea"/>
+                <a:cs typeface="+mn-cs"/>
+              </a:rPr>
+              <a:t>    </a:t>
+            </a:r>
+            <a:r>
+              <a:rPr lang="en-US" sz="1200" i="1" kern="1200" dirty="0">
+                <a:solidFill>
+                  <a:schemeClr val="tx1"/>
+                </a:solidFill>
+                <a:effectLst/>
+                <a:latin typeface="+mn-lt"/>
+                <a:ea typeface="+mn-ea"/>
+                <a:cs typeface="+mn-cs"/>
+              </a:rPr>
+              <a:t>"""</a:t>
+            </a:r>
+            <a:br>
+              <a:rPr lang="en-US" sz="1200" i="1" kern="1200" dirty="0">
+                <a:solidFill>
+                  <a:schemeClr val="tx1"/>
+                </a:solidFill>
+                <a:effectLst/>
+                <a:latin typeface="+mn-lt"/>
+                <a:ea typeface="+mn-ea"/>
+                <a:cs typeface="+mn-cs"/>
+              </a:rPr>
+            </a:br>
+            <a:r>
+              <a:rPr lang="en-US" sz="1200" i="1" kern="1200" dirty="0">
+                <a:solidFill>
+                  <a:schemeClr val="tx1"/>
+                </a:solidFill>
+                <a:effectLst/>
+                <a:latin typeface="+mn-lt"/>
+                <a:ea typeface="+mn-ea"/>
+                <a:cs typeface="+mn-cs"/>
+              </a:rPr>
+              <a:t>    Add two integers with validation and overflow detection.</a:t>
+            </a:r>
+            <a:br>
+              <a:rPr lang="en-US" sz="1200" i="1" kern="1200" dirty="0">
+                <a:solidFill>
+                  <a:schemeClr val="tx1"/>
+                </a:solidFill>
+                <a:effectLst/>
+                <a:latin typeface="+mn-lt"/>
+                <a:ea typeface="+mn-ea"/>
+                <a:cs typeface="+mn-cs"/>
+              </a:rPr>
+            </a:br>
+            <a:r>
+              <a:rPr lang="en-US" sz="1200" i="1" kern="1200" dirty="0">
+                <a:solidFill>
+                  <a:schemeClr val="tx1"/>
+                </a:solidFill>
+                <a:effectLst/>
+                <a:latin typeface="+mn-lt"/>
+                <a:ea typeface="+mn-ea"/>
+                <a:cs typeface="+mn-cs"/>
+              </a:rPr>
+              <a:t>    - Complies with commutativity: add(</a:t>
+            </a:r>
+            <a:r>
+              <a:rPr lang="en-US" sz="1200" i="1" kern="1200" dirty="0" err="1">
+                <a:solidFill>
+                  <a:schemeClr val="tx1"/>
+                </a:solidFill>
+                <a:effectLst/>
+                <a:latin typeface="+mn-lt"/>
+                <a:ea typeface="+mn-ea"/>
+                <a:cs typeface="+mn-cs"/>
+              </a:rPr>
+              <a:t>x,y</a:t>
+            </a:r>
+            <a:r>
+              <a:rPr lang="en-US" sz="1200" i="1" kern="1200" dirty="0">
+                <a:solidFill>
+                  <a:schemeClr val="tx1"/>
+                </a:solidFill>
+                <a:effectLst/>
+                <a:latin typeface="+mn-lt"/>
+                <a:ea typeface="+mn-ea"/>
+                <a:cs typeface="+mn-cs"/>
+              </a:rPr>
+              <a:t>) = add(</a:t>
+            </a:r>
+            <a:r>
+              <a:rPr lang="en-US" sz="1200" i="1" kern="1200" dirty="0" err="1">
+                <a:solidFill>
+                  <a:schemeClr val="tx1"/>
+                </a:solidFill>
+                <a:effectLst/>
+                <a:latin typeface="+mn-lt"/>
+                <a:ea typeface="+mn-ea"/>
+                <a:cs typeface="+mn-cs"/>
+              </a:rPr>
+              <a:t>y,x</a:t>
+            </a:r>
+            <a:r>
+              <a:rPr lang="en-US" sz="1200" i="1" kern="1200" dirty="0">
+                <a:solidFill>
+                  <a:schemeClr val="tx1"/>
+                </a:solidFill>
+                <a:effectLst/>
+                <a:latin typeface="+mn-lt"/>
+                <a:ea typeface="+mn-ea"/>
+                <a:cs typeface="+mn-cs"/>
+              </a:rPr>
+              <a:t>)</a:t>
+            </a:r>
+            <a:br>
+              <a:rPr lang="en-US" sz="1200" i="1" kern="1200" dirty="0">
+                <a:solidFill>
+                  <a:schemeClr val="tx1"/>
+                </a:solidFill>
+                <a:effectLst/>
+                <a:latin typeface="+mn-lt"/>
+                <a:ea typeface="+mn-ea"/>
+                <a:cs typeface="+mn-cs"/>
+              </a:rPr>
+            </a:br>
+            <a:r>
+              <a:rPr lang="en-US" sz="1200" i="1" kern="1200" dirty="0">
+                <a:solidFill>
+                  <a:schemeClr val="tx1"/>
+                </a:solidFill>
+                <a:effectLst/>
+                <a:latin typeface="+mn-lt"/>
+                <a:ea typeface="+mn-ea"/>
+                <a:cs typeface="+mn-cs"/>
+              </a:rPr>
+              <a:t>    - Complies with identity: add(x,0) = add(0,x)</a:t>
+            </a:r>
+            <a:br>
+              <a:rPr lang="en-US" sz="1200" i="1" kern="1200" dirty="0">
+                <a:solidFill>
+                  <a:schemeClr val="tx1"/>
+                </a:solidFill>
+                <a:effectLst/>
+                <a:latin typeface="+mn-lt"/>
+                <a:ea typeface="+mn-ea"/>
+                <a:cs typeface="+mn-cs"/>
+              </a:rPr>
+            </a:br>
+            <a:br>
+              <a:rPr lang="en-US" sz="1200" i="1" kern="1200" dirty="0">
+                <a:solidFill>
+                  <a:schemeClr val="tx1"/>
+                </a:solidFill>
+                <a:effectLst/>
+                <a:latin typeface="+mn-lt"/>
+                <a:ea typeface="+mn-ea"/>
+                <a:cs typeface="+mn-cs"/>
+              </a:rPr>
+            </a:br>
+            <a:r>
+              <a:rPr lang="en-US" sz="1200" i="1" kern="1200" dirty="0">
+                <a:solidFill>
+                  <a:schemeClr val="tx1"/>
+                </a:solidFill>
+                <a:effectLst/>
+                <a:latin typeface="+mn-lt"/>
+                <a:ea typeface="+mn-ea"/>
+                <a:cs typeface="+mn-cs"/>
+              </a:rPr>
+              <a:t>    :param x: First integer to add</a:t>
+            </a:r>
+            <a:br>
+              <a:rPr lang="en-US" sz="1200" i="1" kern="1200" dirty="0">
+                <a:solidFill>
+                  <a:schemeClr val="tx1"/>
+                </a:solidFill>
+                <a:effectLst/>
+                <a:latin typeface="+mn-lt"/>
+                <a:ea typeface="+mn-ea"/>
+                <a:cs typeface="+mn-cs"/>
+              </a:rPr>
+            </a:br>
+            <a:r>
+              <a:rPr lang="en-US" sz="1200" i="1" kern="1200" dirty="0">
+                <a:solidFill>
+                  <a:schemeClr val="tx1"/>
+                </a:solidFill>
+                <a:effectLst/>
+                <a:latin typeface="+mn-lt"/>
+                <a:ea typeface="+mn-ea"/>
+                <a:cs typeface="+mn-cs"/>
+              </a:rPr>
+              <a:t>    :param y: Second integer to add</a:t>
+            </a:r>
+            <a:br>
+              <a:rPr lang="en-US" sz="1200" i="1" kern="1200" dirty="0">
+                <a:solidFill>
+                  <a:schemeClr val="tx1"/>
+                </a:solidFill>
+                <a:effectLst/>
+                <a:latin typeface="+mn-lt"/>
+                <a:ea typeface="+mn-ea"/>
+                <a:cs typeface="+mn-cs"/>
+              </a:rPr>
+            </a:br>
+            <a:r>
+              <a:rPr lang="en-US" sz="1200" i="1" kern="1200" dirty="0">
+                <a:solidFill>
+                  <a:schemeClr val="tx1"/>
+                </a:solidFill>
+                <a:effectLst/>
+                <a:latin typeface="+mn-lt"/>
+                <a:ea typeface="+mn-ea"/>
+                <a:cs typeface="+mn-cs"/>
+              </a:rPr>
+              <a:t>    :return: x + y</a:t>
+            </a:r>
+            <a:br>
+              <a:rPr lang="en-US" sz="1200" i="1" kern="1200" dirty="0">
+                <a:solidFill>
+                  <a:schemeClr val="tx1"/>
+                </a:solidFill>
+                <a:effectLst/>
+                <a:latin typeface="+mn-lt"/>
+                <a:ea typeface="+mn-ea"/>
+                <a:cs typeface="+mn-cs"/>
+              </a:rPr>
+            </a:br>
+            <a:r>
+              <a:rPr lang="en-US" sz="1200" i="1" kern="1200" dirty="0">
+                <a:solidFill>
+                  <a:schemeClr val="tx1"/>
+                </a:solidFill>
+                <a:effectLst/>
+                <a:latin typeface="+mn-lt"/>
+                <a:ea typeface="+mn-ea"/>
+                <a:cs typeface="+mn-cs"/>
+              </a:rPr>
+              <a:t>    :raises </a:t>
+            </a:r>
+            <a:r>
+              <a:rPr lang="en-US" sz="1200" i="1" kern="1200" dirty="0" err="1">
+                <a:solidFill>
+                  <a:schemeClr val="tx1"/>
+                </a:solidFill>
+                <a:effectLst/>
+                <a:latin typeface="+mn-lt"/>
+                <a:ea typeface="+mn-ea"/>
+                <a:cs typeface="+mn-cs"/>
+              </a:rPr>
+              <a:t>TypeError</a:t>
+            </a:r>
+            <a:r>
+              <a:rPr lang="en-US" sz="1200" i="1" kern="1200" dirty="0">
+                <a:solidFill>
+                  <a:schemeClr val="tx1"/>
+                </a:solidFill>
+                <a:effectLst/>
+                <a:latin typeface="+mn-lt"/>
+                <a:ea typeface="+mn-ea"/>
+                <a:cs typeface="+mn-cs"/>
+              </a:rPr>
+              <a:t>: If either x or y is not an integer</a:t>
+            </a:r>
+            <a:br>
+              <a:rPr lang="en-US" sz="1200" i="1" kern="1200" dirty="0">
+                <a:solidFill>
+                  <a:schemeClr val="tx1"/>
+                </a:solidFill>
+                <a:effectLst/>
+                <a:latin typeface="+mn-lt"/>
+                <a:ea typeface="+mn-ea"/>
+                <a:cs typeface="+mn-cs"/>
+              </a:rPr>
+            </a:br>
+            <a:r>
+              <a:rPr lang="en-US" sz="1200" i="1" kern="1200" dirty="0">
+                <a:solidFill>
+                  <a:schemeClr val="tx1"/>
+                </a:solidFill>
+                <a:effectLst/>
+                <a:latin typeface="+mn-lt"/>
+                <a:ea typeface="+mn-ea"/>
+                <a:cs typeface="+mn-cs"/>
+              </a:rPr>
+              <a:t>    :raises </a:t>
+            </a:r>
+            <a:r>
+              <a:rPr lang="en-US" sz="1200" i="1" kern="1200" dirty="0" err="1">
+                <a:solidFill>
+                  <a:schemeClr val="tx1"/>
+                </a:solidFill>
+                <a:effectLst/>
+                <a:latin typeface="+mn-lt"/>
+                <a:ea typeface="+mn-ea"/>
+                <a:cs typeface="+mn-cs"/>
+              </a:rPr>
+              <a:t>OverflowError</a:t>
+            </a:r>
+            <a:r>
+              <a:rPr lang="en-US" sz="1200" i="1" kern="1200" dirty="0">
+                <a:solidFill>
+                  <a:schemeClr val="tx1"/>
+                </a:solidFill>
+                <a:effectLst/>
+                <a:latin typeface="+mn-lt"/>
+                <a:ea typeface="+mn-ea"/>
+                <a:cs typeface="+mn-cs"/>
+              </a:rPr>
+              <a:t>: If the sum exceeds the maximum</a:t>
+            </a:r>
+            <a:br>
+              <a:rPr lang="en-US" sz="1200" i="1" kern="1200" dirty="0">
+                <a:solidFill>
+                  <a:schemeClr val="tx1"/>
+                </a:solidFill>
+                <a:effectLst/>
+                <a:latin typeface="+mn-lt"/>
+                <a:ea typeface="+mn-ea"/>
+                <a:cs typeface="+mn-cs"/>
+              </a:rPr>
+            </a:br>
+            <a:r>
+              <a:rPr lang="en-US" sz="1200" i="1" kern="1200" dirty="0">
+                <a:solidFill>
+                  <a:schemeClr val="tx1"/>
+                </a:solidFill>
+                <a:effectLst/>
+                <a:latin typeface="+mn-lt"/>
+                <a:ea typeface="+mn-ea"/>
+                <a:cs typeface="+mn-cs"/>
+              </a:rPr>
+              <a:t>    representable integer</a:t>
+            </a:r>
+            <a:br>
+              <a:rPr lang="en-US" sz="1200" i="1" kern="1200" dirty="0">
+                <a:solidFill>
+                  <a:schemeClr val="tx1"/>
+                </a:solidFill>
+                <a:effectLst/>
+                <a:latin typeface="+mn-lt"/>
+                <a:ea typeface="+mn-ea"/>
+                <a:cs typeface="+mn-cs"/>
+              </a:rPr>
+            </a:br>
+            <a:r>
+              <a:rPr lang="en-US" sz="1200" i="1" kern="1200" dirty="0">
+                <a:solidFill>
+                  <a:schemeClr val="tx1"/>
+                </a:solidFill>
+                <a:effectLst/>
+                <a:latin typeface="+mn-lt"/>
+                <a:ea typeface="+mn-ea"/>
+                <a:cs typeface="+mn-cs"/>
+              </a:rPr>
+              <a:t>    """</a:t>
+            </a:r>
+            <a:br>
+              <a:rPr lang="en-US" sz="1200" i="1" kern="1200" dirty="0">
+                <a:solidFill>
+                  <a:schemeClr val="tx1"/>
+                </a:solidFill>
+                <a:effectLst/>
+                <a:latin typeface="+mn-lt"/>
+                <a:ea typeface="+mn-ea"/>
+                <a:cs typeface="+mn-cs"/>
+              </a:rPr>
+            </a:br>
+            <a:r>
+              <a:rPr lang="en-US" sz="1200" i="1" kern="1200" dirty="0">
+                <a:solidFill>
+                  <a:schemeClr val="tx1"/>
+                </a:solidFill>
+                <a:effectLst/>
+                <a:latin typeface="+mn-lt"/>
+                <a:ea typeface="+mn-ea"/>
+                <a:cs typeface="+mn-cs"/>
+              </a:rPr>
+              <a:t>    </a:t>
+            </a:r>
+            <a:r>
+              <a:rPr lang="en-US" sz="1200" kern="1200" dirty="0">
+                <a:solidFill>
+                  <a:schemeClr val="tx1"/>
+                </a:solidFill>
+                <a:effectLst/>
+                <a:latin typeface="+mn-lt"/>
+                <a:ea typeface="+mn-ea"/>
+                <a:cs typeface="+mn-cs"/>
+              </a:rPr>
+              <a:t># Input validation</a:t>
+            </a:r>
+            <a:br>
+              <a:rPr lang="en-US" sz="1200" kern="1200" dirty="0">
+                <a:solidFill>
+                  <a:schemeClr val="tx1"/>
+                </a:solidFill>
+                <a:effectLst/>
+                <a:latin typeface="+mn-lt"/>
+                <a:ea typeface="+mn-ea"/>
+                <a:cs typeface="+mn-cs"/>
+              </a:rPr>
+            </a:br>
+            <a:r>
+              <a:rPr lang="en-US" sz="1200" kern="1200" dirty="0">
+                <a:solidFill>
+                  <a:schemeClr val="tx1"/>
+                </a:solidFill>
+                <a:effectLst/>
+                <a:latin typeface="+mn-lt"/>
+                <a:ea typeface="+mn-ea"/>
+                <a:cs typeface="+mn-cs"/>
+              </a:rPr>
+              <a:t>    if not </a:t>
+            </a:r>
+            <a:r>
+              <a:rPr lang="en-US" sz="1200" kern="1200" dirty="0" err="1">
+                <a:solidFill>
+                  <a:schemeClr val="tx1"/>
+                </a:solidFill>
+                <a:effectLst/>
+                <a:latin typeface="+mn-lt"/>
+                <a:ea typeface="+mn-ea"/>
+                <a:cs typeface="+mn-cs"/>
+              </a:rPr>
+              <a:t>isinstance</a:t>
+            </a:r>
+            <a:r>
+              <a:rPr lang="en-US" sz="1200" kern="1200" dirty="0">
+                <a:solidFill>
+                  <a:schemeClr val="tx1"/>
+                </a:solidFill>
+                <a:effectLst/>
+                <a:latin typeface="+mn-lt"/>
+                <a:ea typeface="+mn-ea"/>
+                <a:cs typeface="+mn-cs"/>
+              </a:rPr>
+              <a:t>(x, int) or </a:t>
+            </a:r>
+            <a:r>
+              <a:rPr lang="en-US" sz="1200" kern="1200" dirty="0" err="1">
+                <a:solidFill>
+                  <a:schemeClr val="tx1"/>
+                </a:solidFill>
+                <a:effectLst/>
+                <a:latin typeface="+mn-lt"/>
+                <a:ea typeface="+mn-ea"/>
+                <a:cs typeface="+mn-cs"/>
+              </a:rPr>
+              <a:t>isinstance</a:t>
+            </a:r>
+            <a:r>
+              <a:rPr lang="en-US" sz="1200" kern="1200" dirty="0">
+                <a:solidFill>
+                  <a:schemeClr val="tx1"/>
+                </a:solidFill>
+                <a:effectLst/>
+                <a:latin typeface="+mn-lt"/>
+                <a:ea typeface="+mn-ea"/>
+                <a:cs typeface="+mn-cs"/>
+              </a:rPr>
+              <a:t>(x, bool):</a:t>
+            </a:r>
+            <a:br>
+              <a:rPr lang="en-US" sz="1200" kern="1200" dirty="0">
+                <a:solidFill>
+                  <a:schemeClr val="tx1"/>
+                </a:solidFill>
+                <a:effectLst/>
+                <a:latin typeface="+mn-lt"/>
+                <a:ea typeface="+mn-ea"/>
+                <a:cs typeface="+mn-cs"/>
+              </a:rPr>
+            </a:br>
+            <a:r>
+              <a:rPr lang="en-US" sz="1200" kern="1200" dirty="0">
+                <a:solidFill>
+                  <a:schemeClr val="tx1"/>
+                </a:solidFill>
+                <a:effectLst/>
+                <a:latin typeface="+mn-lt"/>
+                <a:ea typeface="+mn-ea"/>
+                <a:cs typeface="+mn-cs"/>
+              </a:rPr>
+              <a:t>        raise </a:t>
+            </a:r>
+            <a:r>
+              <a:rPr lang="en-US" sz="1200" kern="1200" dirty="0" err="1">
+                <a:solidFill>
+                  <a:schemeClr val="tx1"/>
+                </a:solidFill>
+                <a:effectLst/>
+                <a:latin typeface="+mn-lt"/>
+                <a:ea typeface="+mn-ea"/>
+                <a:cs typeface="+mn-cs"/>
+              </a:rPr>
+              <a:t>TypeError</a:t>
+            </a:r>
+            <a:r>
+              <a:rPr lang="en-US" sz="1200" kern="1200" dirty="0">
+                <a:solidFill>
+                  <a:schemeClr val="tx1"/>
+                </a:solidFill>
+                <a:effectLst/>
+                <a:latin typeface="+mn-lt"/>
+                <a:ea typeface="+mn-ea"/>
+                <a:cs typeface="+mn-cs"/>
+              </a:rPr>
+              <a:t>("x is not an integer")</a:t>
+            </a:r>
+            <a:br>
+              <a:rPr lang="en-US" sz="1200" kern="1200" dirty="0">
+                <a:solidFill>
+                  <a:schemeClr val="tx1"/>
+                </a:solidFill>
+                <a:effectLst/>
+                <a:latin typeface="+mn-lt"/>
+                <a:ea typeface="+mn-ea"/>
+                <a:cs typeface="+mn-cs"/>
+              </a:rPr>
+            </a:br>
+            <a:r>
+              <a:rPr lang="en-US" sz="1200" kern="1200" dirty="0">
+                <a:solidFill>
+                  <a:schemeClr val="tx1"/>
+                </a:solidFill>
+                <a:effectLst/>
+                <a:latin typeface="+mn-lt"/>
+                <a:ea typeface="+mn-ea"/>
+                <a:cs typeface="+mn-cs"/>
+              </a:rPr>
+              <a:t>    if not </a:t>
+            </a:r>
+            <a:r>
+              <a:rPr lang="en-US" sz="1200" kern="1200" dirty="0" err="1">
+                <a:solidFill>
+                  <a:schemeClr val="tx1"/>
+                </a:solidFill>
+                <a:effectLst/>
+                <a:latin typeface="+mn-lt"/>
+                <a:ea typeface="+mn-ea"/>
+                <a:cs typeface="+mn-cs"/>
+              </a:rPr>
+              <a:t>isinstance</a:t>
+            </a:r>
+            <a:r>
+              <a:rPr lang="en-US" sz="1200" kern="1200" dirty="0">
+                <a:solidFill>
+                  <a:schemeClr val="tx1"/>
+                </a:solidFill>
+                <a:effectLst/>
+                <a:latin typeface="+mn-lt"/>
+                <a:ea typeface="+mn-ea"/>
+                <a:cs typeface="+mn-cs"/>
+              </a:rPr>
+              <a:t>(y, int) or </a:t>
+            </a:r>
+            <a:r>
+              <a:rPr lang="en-US" sz="1200" kern="1200" dirty="0" err="1">
+                <a:solidFill>
+                  <a:schemeClr val="tx1"/>
+                </a:solidFill>
+                <a:effectLst/>
+                <a:latin typeface="+mn-lt"/>
+                <a:ea typeface="+mn-ea"/>
+                <a:cs typeface="+mn-cs"/>
+              </a:rPr>
+              <a:t>isinstance</a:t>
+            </a:r>
+            <a:r>
+              <a:rPr lang="en-US" sz="1200" kern="1200" dirty="0">
+                <a:solidFill>
+                  <a:schemeClr val="tx1"/>
+                </a:solidFill>
+                <a:effectLst/>
+                <a:latin typeface="+mn-lt"/>
+                <a:ea typeface="+mn-ea"/>
+                <a:cs typeface="+mn-cs"/>
+              </a:rPr>
+              <a:t>(y, bool):</a:t>
+            </a:r>
+            <a:br>
+              <a:rPr lang="en-US" sz="1200" kern="1200" dirty="0">
+                <a:solidFill>
+                  <a:schemeClr val="tx1"/>
+                </a:solidFill>
+                <a:effectLst/>
+                <a:latin typeface="+mn-lt"/>
+                <a:ea typeface="+mn-ea"/>
+                <a:cs typeface="+mn-cs"/>
+              </a:rPr>
+            </a:br>
+            <a:r>
+              <a:rPr lang="en-US" sz="1200" kern="1200" dirty="0">
+                <a:solidFill>
+                  <a:schemeClr val="tx1"/>
+                </a:solidFill>
+                <a:effectLst/>
+                <a:latin typeface="+mn-lt"/>
+                <a:ea typeface="+mn-ea"/>
+                <a:cs typeface="+mn-cs"/>
+              </a:rPr>
+              <a:t>        raise </a:t>
+            </a:r>
+            <a:r>
+              <a:rPr lang="en-US" sz="1200" kern="1200" dirty="0" err="1">
+                <a:solidFill>
+                  <a:schemeClr val="tx1"/>
+                </a:solidFill>
+                <a:effectLst/>
+                <a:latin typeface="+mn-lt"/>
+                <a:ea typeface="+mn-ea"/>
+                <a:cs typeface="+mn-cs"/>
+              </a:rPr>
+              <a:t>TypeError</a:t>
+            </a:r>
+            <a:r>
+              <a:rPr lang="en-US" sz="1200" kern="1200" dirty="0">
+                <a:solidFill>
+                  <a:schemeClr val="tx1"/>
+                </a:solidFill>
+                <a:effectLst/>
+                <a:latin typeface="+mn-lt"/>
+                <a:ea typeface="+mn-ea"/>
+                <a:cs typeface="+mn-cs"/>
+              </a:rPr>
+              <a:t>("y is not an integer")</a:t>
+            </a:r>
+            <a:br>
+              <a:rPr lang="en-US" sz="1200" kern="1200" dirty="0">
+                <a:solidFill>
+                  <a:schemeClr val="tx1"/>
+                </a:solidFill>
+                <a:effectLst/>
+                <a:latin typeface="+mn-lt"/>
+                <a:ea typeface="+mn-ea"/>
+                <a:cs typeface="+mn-cs"/>
+              </a:rPr>
+            </a:br>
+            <a:br>
+              <a:rPr lang="en-US" sz="1200" kern="1200" dirty="0">
+                <a:solidFill>
+                  <a:schemeClr val="tx1"/>
+                </a:solidFill>
+                <a:effectLst/>
+                <a:latin typeface="+mn-lt"/>
+                <a:ea typeface="+mn-ea"/>
+                <a:cs typeface="+mn-cs"/>
+              </a:rPr>
+            </a:br>
+            <a:r>
+              <a:rPr lang="en-US" sz="1200" kern="1200" dirty="0">
+                <a:solidFill>
+                  <a:schemeClr val="tx1"/>
+                </a:solidFill>
+                <a:effectLst/>
+                <a:latin typeface="+mn-lt"/>
+                <a:ea typeface="+mn-ea"/>
+                <a:cs typeface="+mn-cs"/>
+              </a:rPr>
+              <a:t>    # Compute the sum</a:t>
+            </a:r>
+            <a:br>
+              <a:rPr lang="en-US" sz="1200" kern="1200" dirty="0">
+                <a:solidFill>
+                  <a:schemeClr val="tx1"/>
+                </a:solidFill>
+                <a:effectLst/>
+                <a:latin typeface="+mn-lt"/>
+                <a:ea typeface="+mn-ea"/>
+                <a:cs typeface="+mn-cs"/>
+              </a:rPr>
+            </a:br>
+            <a:r>
+              <a:rPr lang="en-US" sz="1200" kern="1200" dirty="0">
+                <a:solidFill>
+                  <a:schemeClr val="tx1"/>
+                </a:solidFill>
+                <a:effectLst/>
+                <a:latin typeface="+mn-lt"/>
+                <a:ea typeface="+mn-ea"/>
+                <a:cs typeface="+mn-cs"/>
+              </a:rPr>
+              <a:t>    result = x + y</a:t>
+            </a:r>
+            <a:br>
+              <a:rPr lang="en-US" sz="1200" kern="1200" dirty="0">
+                <a:solidFill>
+                  <a:schemeClr val="tx1"/>
+                </a:solidFill>
+                <a:effectLst/>
+                <a:latin typeface="+mn-lt"/>
+                <a:ea typeface="+mn-ea"/>
+                <a:cs typeface="+mn-cs"/>
+              </a:rPr>
+            </a:br>
+            <a:br>
+              <a:rPr lang="en-US" sz="1200" kern="1200" dirty="0">
+                <a:solidFill>
+                  <a:schemeClr val="tx1"/>
+                </a:solidFill>
+                <a:effectLst/>
+                <a:latin typeface="+mn-lt"/>
+                <a:ea typeface="+mn-ea"/>
+                <a:cs typeface="+mn-cs"/>
+              </a:rPr>
+            </a:br>
+            <a:r>
+              <a:rPr lang="en-US" sz="1200" kern="1200" dirty="0">
+                <a:solidFill>
+                  <a:schemeClr val="tx1"/>
+                </a:solidFill>
+                <a:effectLst/>
+                <a:latin typeface="+mn-lt"/>
+                <a:ea typeface="+mn-ea"/>
+                <a:cs typeface="+mn-cs"/>
+              </a:rPr>
+              <a:t>    # Check for overflow</a:t>
+            </a:r>
+            <a:br>
+              <a:rPr lang="en-US" sz="1200" kern="1200" dirty="0">
+                <a:solidFill>
+                  <a:schemeClr val="tx1"/>
+                </a:solidFill>
+                <a:effectLst/>
+                <a:latin typeface="+mn-lt"/>
+                <a:ea typeface="+mn-ea"/>
+                <a:cs typeface="+mn-cs"/>
+              </a:rPr>
+            </a:br>
+            <a:r>
+              <a:rPr lang="en-US" sz="1200" kern="1200" dirty="0">
+                <a:solidFill>
+                  <a:schemeClr val="tx1"/>
+                </a:solidFill>
+                <a:effectLst/>
+                <a:latin typeface="+mn-lt"/>
+                <a:ea typeface="+mn-ea"/>
+                <a:cs typeface="+mn-cs"/>
+              </a:rPr>
+              <a:t>    if result &gt; </a:t>
+            </a:r>
+            <a:r>
+              <a:rPr lang="en-US" sz="1200" kern="1200" dirty="0" err="1">
+                <a:solidFill>
+                  <a:schemeClr val="tx1"/>
+                </a:solidFill>
+                <a:effectLst/>
+                <a:latin typeface="+mn-lt"/>
+                <a:ea typeface="+mn-ea"/>
+                <a:cs typeface="+mn-cs"/>
+              </a:rPr>
+              <a:t>sys.maxsize</a:t>
+            </a:r>
+            <a:r>
+              <a:rPr lang="en-US" sz="1200" kern="1200" dirty="0">
+                <a:solidFill>
+                  <a:schemeClr val="tx1"/>
+                </a:solidFill>
+                <a:effectLst/>
+                <a:latin typeface="+mn-lt"/>
+                <a:ea typeface="+mn-ea"/>
+                <a:cs typeface="+mn-cs"/>
+              </a:rPr>
+              <a:t> or result &lt; -</a:t>
+            </a:r>
+            <a:r>
+              <a:rPr lang="en-US" sz="1200" kern="1200" dirty="0" err="1">
+                <a:solidFill>
+                  <a:schemeClr val="tx1"/>
+                </a:solidFill>
+                <a:effectLst/>
+                <a:latin typeface="+mn-lt"/>
+                <a:ea typeface="+mn-ea"/>
+                <a:cs typeface="+mn-cs"/>
+              </a:rPr>
+              <a:t>sys.maxsize</a:t>
+            </a:r>
+            <a:r>
+              <a:rPr lang="en-US" sz="1200" kern="1200" dirty="0">
+                <a:solidFill>
+                  <a:schemeClr val="tx1"/>
+                </a:solidFill>
+                <a:effectLst/>
+                <a:latin typeface="+mn-lt"/>
+                <a:ea typeface="+mn-ea"/>
+                <a:cs typeface="+mn-cs"/>
+              </a:rPr>
+              <a:t> - 1:</a:t>
+            </a:r>
+            <a:br>
+              <a:rPr lang="en-US" sz="1200" kern="1200" dirty="0">
+                <a:solidFill>
+                  <a:schemeClr val="tx1"/>
+                </a:solidFill>
+                <a:effectLst/>
+                <a:latin typeface="+mn-lt"/>
+                <a:ea typeface="+mn-ea"/>
+                <a:cs typeface="+mn-cs"/>
+              </a:rPr>
+            </a:br>
+            <a:r>
+              <a:rPr lang="en-US" sz="1200" kern="1200" dirty="0">
+                <a:solidFill>
+                  <a:schemeClr val="tx1"/>
+                </a:solidFill>
+                <a:effectLst/>
+                <a:latin typeface="+mn-lt"/>
+                <a:ea typeface="+mn-ea"/>
+                <a:cs typeface="+mn-cs"/>
+              </a:rPr>
+              <a:t>        raise </a:t>
+            </a:r>
+            <a:r>
+              <a:rPr lang="en-US" sz="1200" kern="1200" dirty="0" err="1">
+                <a:solidFill>
+                  <a:schemeClr val="tx1"/>
+                </a:solidFill>
+                <a:effectLst/>
+                <a:latin typeface="+mn-lt"/>
+                <a:ea typeface="+mn-ea"/>
+                <a:cs typeface="+mn-cs"/>
+              </a:rPr>
+              <a:t>OverflowError</a:t>
+            </a:r>
+            <a:r>
+              <a:rPr lang="en-US" sz="1200" kern="1200" dirty="0">
+                <a:solidFill>
+                  <a:schemeClr val="tx1"/>
+                </a:solidFill>
+                <a:effectLst/>
+                <a:latin typeface="+mn-lt"/>
+                <a:ea typeface="+mn-ea"/>
+                <a:cs typeface="+mn-cs"/>
+              </a:rPr>
+              <a:t>("Integer overflow")</a:t>
+            </a:r>
+            <a:br>
+              <a:rPr lang="en-US" sz="1200" kern="1200" dirty="0">
+                <a:solidFill>
+                  <a:schemeClr val="tx1"/>
+                </a:solidFill>
+                <a:effectLst/>
+                <a:latin typeface="+mn-lt"/>
+                <a:ea typeface="+mn-ea"/>
+                <a:cs typeface="+mn-cs"/>
+              </a:rPr>
+            </a:br>
+            <a:br>
+              <a:rPr lang="en-US" sz="1200" kern="1200" dirty="0">
+                <a:solidFill>
+                  <a:schemeClr val="tx1"/>
+                </a:solidFill>
+                <a:effectLst/>
+                <a:latin typeface="+mn-lt"/>
+                <a:ea typeface="+mn-ea"/>
+                <a:cs typeface="+mn-cs"/>
+              </a:rPr>
+            </a:br>
+            <a:r>
+              <a:rPr lang="en-US" sz="1200" kern="1200" dirty="0">
+                <a:solidFill>
+                  <a:schemeClr val="tx1"/>
+                </a:solidFill>
+                <a:effectLst/>
+                <a:latin typeface="+mn-lt"/>
+                <a:ea typeface="+mn-ea"/>
+                <a:cs typeface="+mn-cs"/>
+              </a:rPr>
+              <a:t>    return result</a:t>
+            </a:r>
+            <a:br>
+              <a:rPr lang="en-US" sz="1200" kern="1200" dirty="0">
+                <a:solidFill>
+                  <a:schemeClr val="tx1"/>
+                </a:solidFill>
+                <a:effectLst/>
+                <a:latin typeface="+mn-lt"/>
+                <a:ea typeface="+mn-ea"/>
+                <a:cs typeface="+mn-cs"/>
+              </a:rPr>
+            </a:br>
+            <a:br>
+              <a:rPr lang="en-US" sz="1200" kern="1200" dirty="0">
+                <a:solidFill>
+                  <a:schemeClr val="tx1"/>
+                </a:solidFill>
+                <a:effectLst/>
+                <a:latin typeface="+mn-lt"/>
+                <a:ea typeface="+mn-ea"/>
+                <a:cs typeface="+mn-cs"/>
+              </a:rPr>
+            </a:br>
+            <a:br>
+              <a:rPr lang="en-US" sz="1200" kern="1200" dirty="0">
+                <a:solidFill>
+                  <a:schemeClr val="tx1"/>
+                </a:solidFill>
+                <a:effectLst/>
+                <a:latin typeface="+mn-lt"/>
+                <a:ea typeface="+mn-ea"/>
+                <a:cs typeface="+mn-cs"/>
+              </a:rPr>
+            </a:br>
+            <a:br>
+              <a:rPr lang="en-US" sz="1200" kern="1200" dirty="0">
+                <a:solidFill>
+                  <a:schemeClr val="tx1"/>
+                </a:solidFill>
+                <a:effectLst/>
+                <a:latin typeface="+mn-lt"/>
+                <a:ea typeface="+mn-ea"/>
+                <a:cs typeface="+mn-cs"/>
+              </a:rPr>
+            </a:br>
+            <a:br>
+              <a:rPr lang="en-US" sz="1200" kern="1200" dirty="0">
+                <a:solidFill>
+                  <a:schemeClr val="tx1"/>
+                </a:solidFill>
+                <a:effectLst/>
+                <a:latin typeface="+mn-lt"/>
+                <a:ea typeface="+mn-ea"/>
+                <a:cs typeface="+mn-cs"/>
+              </a:rPr>
+            </a:br>
+            <a:br>
+              <a:rPr lang="en-US" sz="1200" kern="1200" dirty="0">
+                <a:solidFill>
+                  <a:schemeClr val="tx1"/>
+                </a:solidFill>
+                <a:effectLst/>
+                <a:latin typeface="+mn-lt"/>
+                <a:ea typeface="+mn-ea"/>
+                <a:cs typeface="+mn-cs"/>
+              </a:rPr>
+            </a:br>
+            <a:r>
+              <a:rPr lang="en-US" sz="1200" kern="1200" dirty="0">
+                <a:solidFill>
+                  <a:schemeClr val="tx1"/>
+                </a:solidFill>
+                <a:effectLst/>
+                <a:latin typeface="+mn-lt"/>
+                <a:ea typeface="+mn-ea"/>
+                <a:cs typeface="+mn-cs"/>
+              </a:rPr>
+              <a:t>if __name__ == "__main__":</a:t>
+            </a:r>
+            <a:br>
+              <a:rPr lang="en-US" sz="1200" kern="1200" dirty="0">
+                <a:solidFill>
+                  <a:schemeClr val="tx1"/>
+                </a:solidFill>
+                <a:effectLst/>
+                <a:latin typeface="+mn-lt"/>
+                <a:ea typeface="+mn-ea"/>
+                <a:cs typeface="+mn-cs"/>
+              </a:rPr>
+            </a:br>
+            <a:r>
+              <a:rPr lang="en-US" sz="1200" kern="1200" dirty="0">
+                <a:solidFill>
+                  <a:schemeClr val="tx1"/>
+                </a:solidFill>
+                <a:effectLst/>
+                <a:latin typeface="+mn-lt"/>
+                <a:ea typeface="+mn-ea"/>
+                <a:cs typeface="+mn-cs"/>
+              </a:rPr>
+              <a:t>    # Demonstrate normal usage</a:t>
+            </a:r>
+            <a:br>
+              <a:rPr lang="en-US" sz="1200" kern="1200" dirty="0">
+                <a:solidFill>
+                  <a:schemeClr val="tx1"/>
+                </a:solidFill>
+                <a:effectLst/>
+                <a:latin typeface="+mn-lt"/>
+                <a:ea typeface="+mn-ea"/>
+                <a:cs typeface="+mn-cs"/>
+              </a:rPr>
+            </a:br>
+            <a:r>
+              <a:rPr lang="en-US" sz="1200" kern="1200" dirty="0">
+                <a:solidFill>
+                  <a:schemeClr val="tx1"/>
+                </a:solidFill>
+                <a:effectLst/>
+                <a:latin typeface="+mn-lt"/>
+                <a:ea typeface="+mn-ea"/>
+                <a:cs typeface="+mn-cs"/>
+              </a:rPr>
+              <a:t>    print("=== Normal Usage ===")</a:t>
+            </a:r>
+            <a:br>
+              <a:rPr lang="en-US" sz="1200" kern="1200" dirty="0">
+                <a:solidFill>
+                  <a:schemeClr val="tx1"/>
+                </a:solidFill>
+                <a:effectLst/>
+                <a:latin typeface="+mn-lt"/>
+                <a:ea typeface="+mn-ea"/>
+                <a:cs typeface="+mn-cs"/>
+              </a:rPr>
+            </a:br>
+            <a:r>
+              <a:rPr lang="en-US" sz="1200" kern="1200" dirty="0">
+                <a:solidFill>
+                  <a:schemeClr val="tx1"/>
+                </a:solidFill>
+                <a:effectLst/>
+                <a:latin typeface="+mn-lt"/>
+                <a:ea typeface="+mn-ea"/>
+                <a:cs typeface="+mn-cs"/>
+              </a:rPr>
+              <a:t>    print(</a:t>
+            </a:r>
+            <a:r>
+              <a:rPr lang="en-US" sz="1200" kern="1200" dirty="0" err="1">
+                <a:solidFill>
+                  <a:schemeClr val="tx1"/>
+                </a:solidFill>
+                <a:effectLst/>
+                <a:latin typeface="+mn-lt"/>
+                <a:ea typeface="+mn-ea"/>
+                <a:cs typeface="+mn-cs"/>
+              </a:rPr>
+              <a:t>f"add</a:t>
+            </a:r>
+            <a:r>
+              <a:rPr lang="en-US" sz="1200" kern="1200" dirty="0">
+                <a:solidFill>
+                  <a:schemeClr val="tx1"/>
+                </a:solidFill>
+                <a:effectLst/>
+                <a:latin typeface="+mn-lt"/>
+                <a:ea typeface="+mn-ea"/>
+                <a:cs typeface="+mn-cs"/>
+              </a:rPr>
+              <a:t>(5, 3) = {add(5, 3)}")</a:t>
+            </a:r>
+            <a:br>
+              <a:rPr lang="en-US" sz="1200" kern="1200" dirty="0">
+                <a:solidFill>
+                  <a:schemeClr val="tx1"/>
+                </a:solidFill>
+                <a:effectLst/>
+                <a:latin typeface="+mn-lt"/>
+                <a:ea typeface="+mn-ea"/>
+                <a:cs typeface="+mn-cs"/>
+              </a:rPr>
+            </a:br>
+            <a:r>
+              <a:rPr lang="en-US" sz="1200" kern="1200" dirty="0">
+                <a:solidFill>
+                  <a:schemeClr val="tx1"/>
+                </a:solidFill>
+                <a:effectLst/>
+                <a:latin typeface="+mn-lt"/>
+                <a:ea typeface="+mn-ea"/>
+                <a:cs typeface="+mn-cs"/>
+              </a:rPr>
+              <a:t>    print(</a:t>
+            </a:r>
+            <a:r>
+              <a:rPr lang="en-US" sz="1200" kern="1200" dirty="0" err="1">
+                <a:solidFill>
+                  <a:schemeClr val="tx1"/>
+                </a:solidFill>
+                <a:effectLst/>
+                <a:latin typeface="+mn-lt"/>
+                <a:ea typeface="+mn-ea"/>
+                <a:cs typeface="+mn-cs"/>
+              </a:rPr>
+              <a:t>f"add</a:t>
+            </a:r>
+            <a:r>
+              <a:rPr lang="en-US" sz="1200" kern="1200" dirty="0">
+                <a:solidFill>
+                  <a:schemeClr val="tx1"/>
+                </a:solidFill>
+                <a:effectLst/>
+                <a:latin typeface="+mn-lt"/>
+                <a:ea typeface="+mn-ea"/>
+                <a:cs typeface="+mn-cs"/>
+              </a:rPr>
+              <a:t>(-10, 4) = {add(-10, 4)}")</a:t>
+            </a:r>
+            <a:br>
+              <a:rPr lang="en-US" sz="1200" kern="1200" dirty="0">
+                <a:solidFill>
+                  <a:schemeClr val="tx1"/>
+                </a:solidFill>
+                <a:effectLst/>
+                <a:latin typeface="+mn-lt"/>
+                <a:ea typeface="+mn-ea"/>
+                <a:cs typeface="+mn-cs"/>
+              </a:rPr>
+            </a:br>
+            <a:r>
+              <a:rPr lang="en-US" sz="1200" kern="1200" dirty="0">
+                <a:solidFill>
+                  <a:schemeClr val="tx1"/>
+                </a:solidFill>
+                <a:effectLst/>
+                <a:latin typeface="+mn-lt"/>
+                <a:ea typeface="+mn-ea"/>
+                <a:cs typeface="+mn-cs"/>
+              </a:rPr>
+              <a:t>    print(</a:t>
+            </a:r>
+            <a:r>
+              <a:rPr lang="en-US" sz="1200" kern="1200" dirty="0" err="1">
+                <a:solidFill>
+                  <a:schemeClr val="tx1"/>
+                </a:solidFill>
+                <a:effectLst/>
+                <a:latin typeface="+mn-lt"/>
+                <a:ea typeface="+mn-ea"/>
+                <a:cs typeface="+mn-cs"/>
+              </a:rPr>
+              <a:t>f"add</a:t>
+            </a:r>
+            <a:r>
+              <a:rPr lang="en-US" sz="1200" kern="1200" dirty="0">
+                <a:solidFill>
+                  <a:schemeClr val="tx1"/>
+                </a:solidFill>
+                <a:effectLst/>
+                <a:latin typeface="+mn-lt"/>
+                <a:ea typeface="+mn-ea"/>
+                <a:cs typeface="+mn-cs"/>
+              </a:rPr>
+              <a:t>(0, 42) = {add(0, 42)}")</a:t>
+            </a:r>
+            <a:br>
+              <a:rPr lang="en-US" sz="1200" kern="1200" dirty="0">
+                <a:solidFill>
+                  <a:schemeClr val="tx1"/>
+                </a:solidFill>
+                <a:effectLst/>
+                <a:latin typeface="+mn-lt"/>
+                <a:ea typeface="+mn-ea"/>
+                <a:cs typeface="+mn-cs"/>
+              </a:rPr>
+            </a:br>
+            <a:br>
+              <a:rPr lang="en-US" sz="1200" kern="1200" dirty="0">
+                <a:solidFill>
+                  <a:schemeClr val="tx1"/>
+                </a:solidFill>
+                <a:effectLst/>
+                <a:latin typeface="+mn-lt"/>
+                <a:ea typeface="+mn-ea"/>
+                <a:cs typeface="+mn-cs"/>
+              </a:rPr>
+            </a:br>
+            <a:r>
+              <a:rPr lang="en-US" sz="1200" kern="1200" dirty="0">
+                <a:solidFill>
+                  <a:schemeClr val="tx1"/>
+                </a:solidFill>
+                <a:effectLst/>
+                <a:latin typeface="+mn-lt"/>
+                <a:ea typeface="+mn-ea"/>
+                <a:cs typeface="+mn-cs"/>
+              </a:rPr>
+              <a:t>    # Demonstrate </a:t>
+            </a:r>
+            <a:r>
+              <a:rPr lang="en-US" sz="1200" kern="1200" dirty="0" err="1">
+                <a:solidFill>
+                  <a:schemeClr val="tx1"/>
+                </a:solidFill>
+                <a:effectLst/>
+                <a:latin typeface="+mn-lt"/>
+                <a:ea typeface="+mn-ea"/>
+                <a:cs typeface="+mn-cs"/>
+              </a:rPr>
+              <a:t>TypeError</a:t>
+            </a:r>
+            <a:br>
+              <a:rPr lang="en-US" sz="1200" kern="1200" dirty="0">
+                <a:solidFill>
+                  <a:schemeClr val="tx1"/>
+                </a:solidFill>
+                <a:effectLst/>
+                <a:latin typeface="+mn-lt"/>
+                <a:ea typeface="+mn-ea"/>
+                <a:cs typeface="+mn-cs"/>
+              </a:rPr>
+            </a:br>
+            <a:r>
+              <a:rPr lang="en-US" sz="1200" kern="1200" dirty="0">
+                <a:solidFill>
+                  <a:schemeClr val="tx1"/>
+                </a:solidFill>
+                <a:effectLst/>
+                <a:latin typeface="+mn-lt"/>
+                <a:ea typeface="+mn-ea"/>
+                <a:cs typeface="+mn-cs"/>
+              </a:rPr>
+              <a:t>    print("\n=== Type Error Handling ===")</a:t>
+            </a:r>
+            <a:br>
+              <a:rPr lang="en-US" sz="1200" kern="1200" dirty="0">
+                <a:solidFill>
+                  <a:schemeClr val="tx1"/>
+                </a:solidFill>
+                <a:effectLst/>
+                <a:latin typeface="+mn-lt"/>
+                <a:ea typeface="+mn-ea"/>
+                <a:cs typeface="+mn-cs"/>
+              </a:rPr>
+            </a:br>
+            <a:r>
+              <a:rPr lang="en-US" sz="1200" kern="1200" dirty="0">
+                <a:solidFill>
+                  <a:schemeClr val="tx1"/>
+                </a:solidFill>
+                <a:effectLst/>
+                <a:latin typeface="+mn-lt"/>
+                <a:ea typeface="+mn-ea"/>
+                <a:cs typeface="+mn-cs"/>
+              </a:rPr>
+              <a:t>    try:</a:t>
+            </a:r>
+            <a:br>
+              <a:rPr lang="en-US" sz="1200" kern="1200" dirty="0">
+                <a:solidFill>
+                  <a:schemeClr val="tx1"/>
+                </a:solidFill>
+                <a:effectLst/>
+                <a:latin typeface="+mn-lt"/>
+                <a:ea typeface="+mn-ea"/>
+                <a:cs typeface="+mn-cs"/>
+              </a:rPr>
+            </a:br>
+            <a:r>
+              <a:rPr lang="en-US" sz="1200" kern="1200" dirty="0">
+                <a:solidFill>
+                  <a:schemeClr val="tx1"/>
+                </a:solidFill>
+                <a:effectLst/>
+                <a:latin typeface="+mn-lt"/>
+                <a:ea typeface="+mn-ea"/>
+                <a:cs typeface="+mn-cs"/>
+              </a:rPr>
+              <a:t>        add("5", 3)</a:t>
+            </a:r>
+            <a:br>
+              <a:rPr lang="en-US" sz="1200" kern="1200" dirty="0">
+                <a:solidFill>
+                  <a:schemeClr val="tx1"/>
+                </a:solidFill>
+                <a:effectLst/>
+                <a:latin typeface="+mn-lt"/>
+                <a:ea typeface="+mn-ea"/>
+                <a:cs typeface="+mn-cs"/>
+              </a:rPr>
+            </a:br>
+            <a:r>
+              <a:rPr lang="en-US" sz="1200" kern="1200" dirty="0">
+                <a:solidFill>
+                  <a:schemeClr val="tx1"/>
+                </a:solidFill>
+                <a:effectLst/>
+                <a:latin typeface="+mn-lt"/>
+                <a:ea typeface="+mn-ea"/>
+                <a:cs typeface="+mn-cs"/>
+              </a:rPr>
+              <a:t>    except </a:t>
+            </a:r>
+            <a:r>
+              <a:rPr lang="en-US" sz="1200" kern="1200" dirty="0" err="1">
+                <a:solidFill>
+                  <a:schemeClr val="tx1"/>
+                </a:solidFill>
+                <a:effectLst/>
+                <a:latin typeface="+mn-lt"/>
+                <a:ea typeface="+mn-ea"/>
+                <a:cs typeface="+mn-cs"/>
+              </a:rPr>
+              <a:t>TypeError</a:t>
+            </a:r>
+            <a:r>
+              <a:rPr lang="en-US" sz="1200" kern="1200" dirty="0">
+                <a:solidFill>
+                  <a:schemeClr val="tx1"/>
+                </a:solidFill>
+                <a:effectLst/>
+                <a:latin typeface="+mn-lt"/>
+                <a:ea typeface="+mn-ea"/>
+                <a:cs typeface="+mn-cs"/>
+              </a:rPr>
+              <a:t> as e:</a:t>
+            </a:r>
+            <a:br>
+              <a:rPr lang="en-US" sz="1200" kern="1200" dirty="0">
+                <a:solidFill>
+                  <a:schemeClr val="tx1"/>
+                </a:solidFill>
+                <a:effectLst/>
+                <a:latin typeface="+mn-lt"/>
+                <a:ea typeface="+mn-ea"/>
+                <a:cs typeface="+mn-cs"/>
+              </a:rPr>
+            </a:br>
+            <a:r>
+              <a:rPr lang="en-US" sz="1200" kern="1200" dirty="0">
+                <a:solidFill>
+                  <a:schemeClr val="tx1"/>
+                </a:solidFill>
+                <a:effectLst/>
+                <a:latin typeface="+mn-lt"/>
+                <a:ea typeface="+mn-ea"/>
+                <a:cs typeface="+mn-cs"/>
+              </a:rPr>
+              <a:t>        print(</a:t>
+            </a:r>
+            <a:r>
+              <a:rPr lang="en-US" sz="1200" kern="1200" dirty="0" err="1">
+                <a:solidFill>
+                  <a:schemeClr val="tx1"/>
+                </a:solidFill>
+                <a:effectLst/>
+                <a:latin typeface="+mn-lt"/>
+                <a:ea typeface="+mn-ea"/>
+                <a:cs typeface="+mn-cs"/>
+              </a:rPr>
+              <a:t>f"TypeError</a:t>
+            </a:r>
+            <a:r>
+              <a:rPr lang="en-US" sz="1200" kern="1200" dirty="0">
+                <a:solidFill>
+                  <a:schemeClr val="tx1"/>
+                </a:solidFill>
+                <a:effectLst/>
+                <a:latin typeface="+mn-lt"/>
+                <a:ea typeface="+mn-ea"/>
+                <a:cs typeface="+mn-cs"/>
+              </a:rPr>
+              <a:t> caught: {e}")</a:t>
+            </a:r>
+            <a:br>
+              <a:rPr lang="en-US" sz="1200" kern="1200" dirty="0">
+                <a:solidFill>
+                  <a:schemeClr val="tx1"/>
+                </a:solidFill>
+                <a:effectLst/>
+                <a:latin typeface="+mn-lt"/>
+                <a:ea typeface="+mn-ea"/>
+                <a:cs typeface="+mn-cs"/>
+              </a:rPr>
+            </a:br>
+            <a:br>
+              <a:rPr lang="en-US" sz="1200" kern="1200" dirty="0">
+                <a:solidFill>
+                  <a:schemeClr val="tx1"/>
+                </a:solidFill>
+                <a:effectLst/>
+                <a:latin typeface="+mn-lt"/>
+                <a:ea typeface="+mn-ea"/>
+                <a:cs typeface="+mn-cs"/>
+              </a:rPr>
+            </a:br>
+            <a:r>
+              <a:rPr lang="en-US" sz="1200" kern="1200" dirty="0">
+                <a:solidFill>
+                  <a:schemeClr val="tx1"/>
+                </a:solidFill>
+                <a:effectLst/>
+                <a:latin typeface="+mn-lt"/>
+                <a:ea typeface="+mn-ea"/>
+                <a:cs typeface="+mn-cs"/>
+              </a:rPr>
+              <a:t>    # Demonstrate </a:t>
+            </a:r>
+            <a:r>
+              <a:rPr lang="en-US" sz="1200" kern="1200" dirty="0" err="1">
+                <a:solidFill>
+                  <a:schemeClr val="tx1"/>
+                </a:solidFill>
+                <a:effectLst/>
+                <a:latin typeface="+mn-lt"/>
+                <a:ea typeface="+mn-ea"/>
+                <a:cs typeface="+mn-cs"/>
+              </a:rPr>
+              <a:t>OverflowError</a:t>
+            </a:r>
+            <a:br>
+              <a:rPr lang="en-US" sz="1200" kern="1200" dirty="0">
+                <a:solidFill>
+                  <a:schemeClr val="tx1"/>
+                </a:solidFill>
+                <a:effectLst/>
+                <a:latin typeface="+mn-lt"/>
+                <a:ea typeface="+mn-ea"/>
+                <a:cs typeface="+mn-cs"/>
+              </a:rPr>
+            </a:br>
+            <a:r>
+              <a:rPr lang="en-US" sz="1200" kern="1200" dirty="0">
+                <a:solidFill>
+                  <a:schemeClr val="tx1"/>
+                </a:solidFill>
+                <a:effectLst/>
+                <a:latin typeface="+mn-lt"/>
+                <a:ea typeface="+mn-ea"/>
+                <a:cs typeface="+mn-cs"/>
+              </a:rPr>
+              <a:t>    print("\n=== Overflow Error Handling ===")</a:t>
+            </a:r>
+            <a:br>
+              <a:rPr lang="en-US" sz="1200" kern="1200" dirty="0">
+                <a:solidFill>
+                  <a:schemeClr val="tx1"/>
+                </a:solidFill>
+                <a:effectLst/>
+                <a:latin typeface="+mn-lt"/>
+                <a:ea typeface="+mn-ea"/>
+                <a:cs typeface="+mn-cs"/>
+              </a:rPr>
+            </a:br>
+            <a:r>
+              <a:rPr lang="en-US" sz="1200" kern="1200" dirty="0">
+                <a:solidFill>
+                  <a:schemeClr val="tx1"/>
+                </a:solidFill>
+                <a:effectLst/>
+                <a:latin typeface="+mn-lt"/>
+                <a:ea typeface="+mn-ea"/>
+                <a:cs typeface="+mn-cs"/>
+              </a:rPr>
+              <a:t>    try:</a:t>
+            </a:r>
+            <a:br>
+              <a:rPr lang="en-US" sz="1200" kern="1200" dirty="0">
+                <a:solidFill>
+                  <a:schemeClr val="tx1"/>
+                </a:solidFill>
+                <a:effectLst/>
+                <a:latin typeface="+mn-lt"/>
+                <a:ea typeface="+mn-ea"/>
+                <a:cs typeface="+mn-cs"/>
+              </a:rPr>
+            </a:br>
+            <a:r>
+              <a:rPr lang="en-US" sz="1200" kern="1200" dirty="0">
+                <a:solidFill>
+                  <a:schemeClr val="tx1"/>
+                </a:solidFill>
+                <a:effectLst/>
+                <a:latin typeface="+mn-lt"/>
+                <a:ea typeface="+mn-ea"/>
+                <a:cs typeface="+mn-cs"/>
+              </a:rPr>
+              <a:t>        print(add(</a:t>
+            </a:r>
+            <a:r>
+              <a:rPr lang="en-US" sz="1200" kern="1200" dirty="0" err="1">
+                <a:solidFill>
+                  <a:schemeClr val="tx1"/>
+                </a:solidFill>
+                <a:effectLst/>
+                <a:latin typeface="+mn-lt"/>
+                <a:ea typeface="+mn-ea"/>
+                <a:cs typeface="+mn-cs"/>
+              </a:rPr>
+              <a:t>sys.maxsize</a:t>
+            </a:r>
+            <a:r>
+              <a:rPr lang="en-US" sz="1200" kern="1200" dirty="0">
+                <a:solidFill>
+                  <a:schemeClr val="tx1"/>
+                </a:solidFill>
+                <a:effectLst/>
+                <a:latin typeface="+mn-lt"/>
+                <a:ea typeface="+mn-ea"/>
+                <a:cs typeface="+mn-cs"/>
+              </a:rPr>
+              <a:t>, 1))</a:t>
+            </a:r>
+            <a:br>
+              <a:rPr lang="en-US" sz="1200" kern="1200" dirty="0">
+                <a:solidFill>
+                  <a:schemeClr val="tx1"/>
+                </a:solidFill>
+                <a:effectLst/>
+                <a:latin typeface="+mn-lt"/>
+                <a:ea typeface="+mn-ea"/>
+                <a:cs typeface="+mn-cs"/>
+              </a:rPr>
+            </a:br>
+            <a:r>
+              <a:rPr lang="en-US" sz="1200" kern="1200" dirty="0">
+                <a:solidFill>
+                  <a:schemeClr val="tx1"/>
+                </a:solidFill>
+                <a:effectLst/>
+                <a:latin typeface="+mn-lt"/>
+                <a:ea typeface="+mn-ea"/>
+                <a:cs typeface="+mn-cs"/>
+              </a:rPr>
+              <a:t>    except </a:t>
+            </a:r>
+            <a:r>
+              <a:rPr lang="en-US" sz="1200" kern="1200" dirty="0" err="1">
+                <a:solidFill>
+                  <a:schemeClr val="tx1"/>
+                </a:solidFill>
+                <a:effectLst/>
+                <a:latin typeface="+mn-lt"/>
+                <a:ea typeface="+mn-ea"/>
+                <a:cs typeface="+mn-cs"/>
+              </a:rPr>
+              <a:t>OverflowError</a:t>
+            </a:r>
+            <a:r>
+              <a:rPr lang="en-US" sz="1200" kern="1200" dirty="0">
+                <a:solidFill>
+                  <a:schemeClr val="tx1"/>
+                </a:solidFill>
+                <a:effectLst/>
+                <a:latin typeface="+mn-lt"/>
+                <a:ea typeface="+mn-ea"/>
+                <a:cs typeface="+mn-cs"/>
+              </a:rPr>
+              <a:t> as e:</a:t>
+            </a:r>
+            <a:br>
+              <a:rPr lang="en-US" sz="1200" kern="1200" dirty="0">
+                <a:solidFill>
+                  <a:schemeClr val="tx1"/>
+                </a:solidFill>
+                <a:effectLst/>
+                <a:latin typeface="+mn-lt"/>
+                <a:ea typeface="+mn-ea"/>
+                <a:cs typeface="+mn-cs"/>
+              </a:rPr>
+            </a:br>
+            <a:r>
+              <a:rPr lang="en-US" sz="1200" kern="1200" dirty="0">
+                <a:solidFill>
+                  <a:schemeClr val="tx1"/>
+                </a:solidFill>
+                <a:effectLst/>
+                <a:latin typeface="+mn-lt"/>
+                <a:ea typeface="+mn-ea"/>
+                <a:cs typeface="+mn-cs"/>
+              </a:rPr>
+              <a:t>        print(</a:t>
+            </a:r>
+            <a:r>
+              <a:rPr lang="en-US" sz="1200" kern="1200" dirty="0" err="1">
+                <a:solidFill>
+                  <a:schemeClr val="tx1"/>
+                </a:solidFill>
+                <a:effectLst/>
+                <a:latin typeface="+mn-lt"/>
+                <a:ea typeface="+mn-ea"/>
+                <a:cs typeface="+mn-cs"/>
+              </a:rPr>
+              <a:t>f"OverflowError</a:t>
+            </a:r>
+            <a:r>
+              <a:rPr lang="en-US" sz="1200" kern="1200" dirty="0">
+                <a:solidFill>
+                  <a:schemeClr val="tx1"/>
+                </a:solidFill>
+                <a:effectLst/>
+                <a:latin typeface="+mn-lt"/>
+                <a:ea typeface="+mn-ea"/>
+                <a:cs typeface="+mn-cs"/>
+              </a:rPr>
+              <a:t> caught: {e}")</a:t>
+            </a:r>
+          </a:p>
+          <a:p>
+            <a:endParaRPr lang="en-US" dirty="0"/>
+          </a:p>
+        </p:txBody>
+      </p:sp>
+      <p:sp>
+        <p:nvSpPr>
+          <p:cNvPr id="4" name="Slide Number Placeholder 3">
+            <a:extLst>
+              <a:ext uri="{FF2B5EF4-FFF2-40B4-BE49-F238E27FC236}">
+                <a16:creationId xmlns:a16="http://schemas.microsoft.com/office/drawing/2014/main" id="{8418B396-1680-0960-A2AA-97B2D4C28F27}"/>
+              </a:ext>
+            </a:extLst>
+          </p:cNvPr>
+          <p:cNvSpPr>
+            <a:spLocks noGrp="1"/>
+          </p:cNvSpPr>
+          <p:nvPr>
+            <p:ph type="sldNum" sz="quarter" idx="5"/>
+          </p:nvPr>
+        </p:nvSpPr>
+        <p:spPr/>
+        <p:txBody>
+          <a:bodyPr/>
+          <a:lstStyle/>
+          <a:p>
+            <a:fld id="{FA41C955-0A53-4CE8-B014-58EE68AEC52A}" type="slidenum">
+              <a:rPr lang="en-US" smtClean="0"/>
+              <a:t>14</a:t>
+            </a:fld>
+            <a:endParaRPr lang="en-US"/>
+          </a:p>
+        </p:txBody>
+      </p:sp>
+    </p:spTree>
+    <p:extLst>
+      <p:ext uri="{BB962C8B-B14F-4D97-AF65-F5344CB8AC3E}">
+        <p14:creationId xmlns:p14="http://schemas.microsoft.com/office/powerpoint/2010/main" val="232118320"/>
       </p:ext>
     </p:extLst>
   </p:cSld>
@@ -7772,6 +11328,130 @@
   <p:clrMapOvr>
     <a:masterClrMapping/>
   </p:clrMapOvr>
+  <p:timing>
+    <p:tnLst>
+      <p:par>
+        <p:cTn id="1" dur="indefinite" restart="never" nodeType="tmRoot">
+          <p:childTnLst>
+            <p:seq concurrent="1" nextAc="seek">
+              <p:cTn id="2" dur="indefinite" nodeType="mainSeq">
+                <p:childTnLst>
+                  <p:par>
+                    <p:cTn id="3" fill="hold">
+                      <p:stCondLst>
+                        <p:cond delay="indefinite"/>
+                      </p:stCondLst>
+                      <p:childTnLst>
+                        <p:par>
+                          <p:cTn id="4" fill="hold">
+                            <p:stCondLst>
+                              <p:cond delay="0"/>
+                            </p:stCondLst>
+                            <p:childTnLst>
+                              <p:par>
+                                <p:cTn id="5" presetID="1" presetClass="entr" presetSubtype="0" fill="hold" grpId="0" nodeType="clickEffect">
+                                  <p:stCondLst>
+                                    <p:cond delay="0"/>
+                                  </p:stCondLst>
+                                  <p:childTnLst>
+                                    <p:set>
+                                      <p:cBhvr>
+                                        <p:cTn id="6" dur="1" fill="hold">
+                                          <p:stCondLst>
+                                            <p:cond delay="0"/>
+                                          </p:stCondLst>
+                                        </p:cTn>
+                                        <p:tgtEl>
+                                          <p:spTgt spid="10"/>
+                                        </p:tgtEl>
+                                        <p:attrNameLst>
+                                          <p:attrName>style.visibility</p:attrName>
+                                        </p:attrNameLst>
+                                      </p:cBhvr>
+                                      <p:to>
+                                        <p:strVal val="visible"/>
+                                      </p:to>
+                                    </p:set>
+                                  </p:childTnLst>
+                                </p:cTn>
+                              </p:par>
+                            </p:childTnLst>
+                          </p:cTn>
+                        </p:par>
+                      </p:childTnLst>
+                    </p:cTn>
+                  </p:par>
+                  <p:par>
+                    <p:cTn id="7" fill="hold">
+                      <p:stCondLst>
+                        <p:cond delay="indefinite"/>
+                      </p:stCondLst>
+                      <p:childTnLst>
+                        <p:par>
+                          <p:cTn id="8" fill="hold">
+                            <p:stCondLst>
+                              <p:cond delay="0"/>
+                            </p:stCondLst>
+                            <p:childTnLst>
+                              <p:par>
+                                <p:cTn id="9" presetID="1" presetClass="entr" presetSubtype="0" fill="hold" grpId="0" nodeType="clickEffect">
+                                  <p:stCondLst>
+                                    <p:cond delay="0"/>
+                                  </p:stCondLst>
+                                  <p:childTnLst>
+                                    <p:set>
+                                      <p:cBhvr>
+                                        <p:cTn id="10" dur="1" fill="hold">
+                                          <p:stCondLst>
+                                            <p:cond delay="0"/>
+                                          </p:stCondLst>
+                                        </p:cTn>
+                                        <p:tgtEl>
+                                          <p:spTgt spid="11"/>
+                                        </p:tgtEl>
+                                        <p:attrNameLst>
+                                          <p:attrName>style.visibility</p:attrName>
+                                        </p:attrNameLst>
+                                      </p:cBhvr>
+                                      <p:to>
+                                        <p:strVal val="visible"/>
+                                      </p:to>
+                                    </p:set>
+                                  </p:childTnLst>
+                                </p:cTn>
+                              </p:par>
+                            </p:childTnLst>
+                          </p:cTn>
+                        </p:par>
+                      </p:childTnLst>
+                    </p:cTn>
+                  </p:par>
+                </p:childTnLst>
+              </p:cTn>
+              <p:prevCondLst>
+                <p:cond evt="onPrev" delay="0">
+                  <p:tgtEl>
+                    <p:sldTgt/>
+                  </p:tgtEl>
+                </p:cond>
+              </p:prevCondLst>
+              <p:nextCondLst>
+                <p:cond evt="onNext" delay="0">
+                  <p:tgtEl>
+                    <p:sldTgt/>
+                  </p:tgtEl>
+                </p:cond>
+              </p:nextCondLst>
+            </p:seq>
+          </p:childTnLst>
+        </p:cTn>
+      </p:par>
+    </p:tnLst>
+    <p:bldLst>
+      <p:bldP spid="10" grpId="0"/>
+      <p:bldP spid="11" grpId="0"/>
+    </p:bldLst>
+  </p:timing>
 </p:sld>
 </file>
 
@@ -8239,8 +11919,32 @@
                 </a:solidFill>
                 <a:latin typeface="AmericanSans"/>
               </a:rPr>
-              <a:t> has 1 or more behaviors:</a:t>
-            </a:r>
+              <a:t> has 1 or more </a:t>
+            </a:r>
+            <a:r>
+              <a:rPr lang="en-US" sz="2000" noProof="0" dirty="0">
+                <a:solidFill>
+                  <a:schemeClr val="tx1"/>
+                </a:solidFill>
+                <a:latin typeface="AmericanSans"/>
+              </a:rPr>
+              <a:t>behaviors</a:t>
+            </a:r>
+            <a:r>
+              <a:rPr lang="en-US" sz="2000" b="0" dirty="0">
+                <a:solidFill>
+                  <a:schemeClr val="tx1"/>
+                </a:solidFill>
+                <a:latin typeface="AmericanSans"/>
+              </a:rPr>
+              <a:t>, on this case:</a:t>
+            </a:r>
+            <a:endParaRPr lang="en-US" sz="2000" b="0" noProof="0" dirty="0">
+              <a:solidFill>
+                <a:schemeClr val="tx1"/>
+              </a:solidFill>
+              <a:latin typeface="AmericanSans"/>
+            </a:endParaRPr>
           </a:p>
           <a:p>
             <a:pPr>
@@ -8685,8 +12389,8 @@
         </p:nvSpPr>
         <p:spPr>
           <a:xfrm>
-            <a:off x="91440" y="132080"/>
-            <a:ext cx="11694160" cy="573722"/>
+            <a:off x="91440" y="132079"/>
+            <a:ext cx="11755120" cy="634703"/>
           </a:xfrm>
           <a:prstGeom prst="rect">
             <a:avLst/>
@@ -8694,7 +12398,7 @@
         </p:spPr>
         <p:txBody>
           <a:bodyPr>
-            <a:normAutofit fontScale="97500" lnSpcReduction="10000"/>
+            <a:normAutofit fontScale="97500"/>
           </a:bodyPr>
           <a:lstStyle>
             <a:lvl1pPr algn="l" defTabSz="914400" rtl="0" eaLnBrk="1" latinLnBrk="0" hangingPunct="1">
@@ -8717,14 +12421,14 @@
           </a:lstStyle>
           <a:p>
             <a:r>
-              <a:rPr lang="en-US" sz="3600" b="1" dirty="0"/>
+              <a:rPr lang="en-US" sz="3200" b="1" dirty="0"/>
               <a:t>Where </a:t>
             </a:r>
             <a:r>
-              <a:rPr lang="en-US" sz="3600" dirty="0"/>
+              <a:rPr lang="en-US" sz="3200" dirty="0"/>
               <a:t>to place the tests? In the mirror ‘test’ folder</a:t>
             </a:r>
-            <a:endParaRPr lang="en-US" sz="3600" dirty="0">
+            <a:endParaRPr lang="en-US" sz="3200" dirty="0">
               <a:solidFill>
                 <a:srgbClr val="FF0000"/>
               </a:solidFill>
@@ -9020,45 +12724,6 @@
           </a:p>
         </p:txBody>
       </p:sp>
-      <p:cxnSp>
-        <p:nvCxnSpPr>
-          <p:cNvPr id="28" name="Straight Connector 27">
-            <a:extLst>
-              <a:ext uri="{FF2B5EF4-FFF2-40B4-BE49-F238E27FC236}">
-                <a16:creationId xmlns:a16="http://schemas.microsoft.com/office/drawing/2014/main" id="{13C201E6-22E3-5DDF-D7E3-89AB1DADEB33}"/>
-              </a:ext>
-            </a:extLst>
-          </p:cNvPr>
-          <p:cNvCxnSpPr>
-            <a:cxnSpLocks/>
-            <a:endCxn id="27" idx="1"/>
-          </p:cNvCxnSpPr>
-          <p:nvPr/>
-        </p:nvCxnSpPr>
-        <p:spPr>
-          <a:xfrm>
-            <a:off x="2692155" y="5492052"/>
-            <a:ext cx="1339435" cy="10160"/>
-          </a:xfrm>
-          <a:prstGeom prst="line">
-            <a:avLst/>
-          </a:prstGeom>
-        </p:spPr>
-        <p:style>
-          <a:lnRef idx="2">
-            <a:schemeClr val="dk1"/>
-          </a:lnRef>
-          <a:fillRef idx="0">
-            <a:schemeClr val="dk1"/>
-          </a:fillRef>
-          <a:effectRef idx="1">
-            <a:schemeClr val="dk1"/>
-          </a:effectRef>
-          <a:fontRef idx="minor">
-            <a:schemeClr val="tx1"/>
-          </a:fontRef>
-        </p:style>
-      </p:cxnSp>
       <p:pic>
         <p:nvPicPr>
           <p:cNvPr id="32" name="Graphic 31" descr="Folder with solid fill">
@@ -9437,6 +13102,44 @@
           </a:p>
         </p:txBody>
       </p:sp>
+      <p:cxnSp>
+        <p:nvCxnSpPr>
+          <p:cNvPr id="44" name="Straight Connector 43">
+            <a:extLst>
+              <a:ext uri="{FF2B5EF4-FFF2-40B4-BE49-F238E27FC236}">
+                <a16:creationId xmlns:a16="http://schemas.microsoft.com/office/drawing/2014/main" id="{9632A169-3ED1-4E60-D865-FBAD52753409}"/>
+              </a:ext>
+            </a:extLst>
+          </p:cNvPr>
+          <p:cNvCxnSpPr>
+            <a:cxnSpLocks/>
+          </p:cNvCxnSpPr>
+          <p:nvPr/>
+        </p:nvCxnSpPr>
+        <p:spPr>
+          <a:xfrm>
+            <a:off x="2692155" y="5502212"/>
+            <a:ext cx="1295575" cy="0"/>
+          </a:xfrm>
+          <a:prstGeom prst="line">
+            <a:avLst/>
+          </a:prstGeom>
+        </p:spPr>
+        <p:style>
+          <a:lnRef idx="2">
+            <a:schemeClr val="dk1"/>
+          </a:lnRef>
+          <a:fillRef idx="0">
+            <a:schemeClr val="dk1"/>
+          </a:fillRef>
+          <a:effectRef idx="1">
+            <a:schemeClr val="dk1"/>
+          </a:effectRef>
+          <a:fontRef idx="minor">
+            <a:schemeClr val="tx1"/>
+          </a:fontRef>
+        </p:style>
+      </p:cxnSp>
     </p:spTree>
     <p:extLst>
       <p:ext uri="{BB962C8B-B14F-4D97-AF65-F5344CB8AC3E}">
@@ -9458,7 +13161,7 @@
         <p:cNvPr id="1" name="">
           <a:extLst>
             <a:ext uri="{FF2B5EF4-FFF2-40B4-BE49-F238E27FC236}">
-              <a16:creationId xmlns:a16="http://schemas.microsoft.com/office/drawing/2014/main" id="{8B65D6DB-04A7-D281-DD36-5F740C944969}"/>
+              <a16:creationId xmlns:a16="http://schemas.microsoft.com/office/drawing/2014/main" id="{B09455A9-9C0C-4C42-FA1E-8874E6E0DC7F}"/>
             </a:ext>
           </a:extLst>
         </p:cNvPr>
@@ -9475,702 +13178,75 @@
       </p:grpSpPr>
       <p:sp>
         <p:nvSpPr>
-          <p:cNvPr id="8" name="Title 1">
-            <a:extLst>
-              <a:ext uri="{FF2B5EF4-FFF2-40B4-BE49-F238E27FC236}">
-                <a16:creationId xmlns:a16="http://schemas.microsoft.com/office/drawing/2014/main" id="{D700A2FA-D42F-6DCA-5F17-F06DBD1654B5}"/>
-              </a:ext>
-            </a:extLst>
-          </p:cNvPr>
-          <p:cNvSpPr txBox="1">
-            <a:spLocks/>
+          <p:cNvPr id="2" name="Title 1">
+            <a:extLst>
+              <a:ext uri="{FF2B5EF4-FFF2-40B4-BE49-F238E27FC236}">
+                <a16:creationId xmlns:a16="http://schemas.microsoft.com/office/drawing/2014/main" id="{4782203F-A263-DD72-A819-E7EF7BDA525F}"/>
+              </a:ext>
+            </a:extLst>
+          </p:cNvPr>
+          <p:cNvSpPr>
+            <a:spLocks noGrp="1"/>
           </p:cNvSpPr>
-          <p:nvPr/>
+          <p:nvPr>
+            <p:ph type="ctrTitle"/>
+          </p:nvPr>
         </p:nvSpPr>
         <p:spPr>
           <a:xfrm>
             <a:off x="91440" y="132080"/>
-            <a:ext cx="12273280" cy="573722"/>
+            <a:ext cx="12009120" cy="573722"/>
           </a:xfrm>
-          <a:prstGeom prst="rect">
-            <a:avLst/>
-          </a:prstGeom>
         </p:spPr>
         <p:txBody>
           <a:bodyPr>
-            <a:normAutofit fontScale="97500" lnSpcReduction="10000"/>
+            <a:normAutofit fontScale="90000"/>
           </a:bodyPr>
-          <a:lstStyle>
-            <a:lvl1pPr algn="l" defTabSz="914400" rtl="0" eaLnBrk="1" latinLnBrk="0" hangingPunct="1">
-              <a:lnSpc>
-                <a:spcPct val="90000"/>
-              </a:lnSpc>
-              <a:spcBef>
-                <a:spcPct val="0"/>
-              </a:spcBef>
-              <a:buNone/>
-              <a:defRPr sz="4400" kern="1200">
-                <a:solidFill>
-                  <a:schemeClr val="tx1"/>
-                </a:solidFill>
-                <a:latin typeface="+mj-lt"/>
-                <a:ea typeface="+mj-ea"/>
-                <a:cs typeface="+mj-cs"/>
-              </a:defRPr>
-            </a:lvl1pPr>
-          </a:lstStyle>
-          <a:p>
-            <a:r>
-              <a:rPr lang="es-CL" sz="3600" b="1" dirty="0"/>
-              <a:t>COMO</a:t>
-            </a:r>
-            <a:r>
-              <a:rPr lang="es-CL" sz="3600" dirty="0"/>
-              <a:t> testear? Estructura estándar de un test unitario con              :</a:t>
-            </a:r>
-            <a:endParaRPr lang="es-CL" sz="3600" b="1" dirty="0">
-              <a:solidFill>
-                <a:srgbClr val="FF0000"/>
-              </a:solidFill>
-            </a:endParaRPr>
-          </a:p>
-        </p:txBody>
-      </p:sp>
-      <p:sp>
-        <p:nvSpPr>
-          <p:cNvPr id="2" name="Text Placeholder 1">
-            <a:extLst>
-              <a:ext uri="{FF2B5EF4-FFF2-40B4-BE49-F238E27FC236}">
-                <a16:creationId xmlns:a16="http://schemas.microsoft.com/office/drawing/2014/main" id="{A4D7198A-8E89-CA4C-282E-AA711AA0869F}"/>
-              </a:ext>
-            </a:extLst>
-          </p:cNvPr>
-          <p:cNvSpPr txBox="1">
-            <a:spLocks/>
+          <a:lstStyle/>
+          <a:p>
+            <a:pPr algn="l"/>
+            <a:r>
+              <a:rPr lang="en-US" sz="3600" dirty="0"/>
+              <a:t>Typical structure of a unit test</a:t>
+            </a:r>
+          </a:p>
+        </p:txBody>
+      </p:sp>
+      <p:sp>
+        <p:nvSpPr>
+          <p:cNvPr id="3" name="Slide Number Placeholder 2">
+            <a:extLst>
+              <a:ext uri="{FF2B5EF4-FFF2-40B4-BE49-F238E27FC236}">
+                <a16:creationId xmlns:a16="http://schemas.microsoft.com/office/drawing/2014/main" id="{4095AC95-00C8-512A-4167-D2D6963CC31B}"/>
+              </a:ext>
+            </a:extLst>
+          </p:cNvPr>
+          <p:cNvSpPr>
+            <a:spLocks noGrp="1"/>
           </p:cNvSpPr>
-          <p:nvPr/>
-        </p:nvSpPr>
-        <p:spPr>
-          <a:xfrm>
-            <a:off x="424481" y="1186192"/>
-            <a:ext cx="11300159" cy="5265407"/>
-          </a:xfrm>
-          <a:prstGeom prst="rect">
-            <a:avLst/>
-          </a:prstGeom>
-        </p:spPr>
-        <p:txBody>
-          <a:bodyPr vert="horz" lIns="91440" tIns="45720" rIns="91440" bIns="45720" rtlCol="0" anchor="t">
-            <a:noAutofit/>
-          </a:bodyPr>
-          <a:lstStyle>
-            <a:lvl1pPr marL="0" indent="0" algn="l" defTabSz="914400" rtl="0" eaLnBrk="1" latinLnBrk="0" hangingPunct="1">
-              <a:lnSpc>
-                <a:spcPct val="90000"/>
-              </a:lnSpc>
-              <a:spcBef>
-                <a:spcPts val="1000"/>
-              </a:spcBef>
-              <a:buFont typeface="Arial" panose="020B0604020202020204" pitchFamily="34" charset="0"/>
-              <a:buNone/>
-              <a:defRPr sz="4400" b="1" kern="1200">
-                <a:solidFill>
-                  <a:srgbClr val="36495A"/>
-                </a:solidFill>
-                <a:latin typeface="+mn-lt"/>
-                <a:ea typeface="+mn-ea"/>
-                <a:cs typeface="+mn-cs"/>
-              </a:defRPr>
-            </a:lvl1pPr>
-            <a:lvl2pPr marL="685800" indent="-228600" algn="l" defTabSz="914400" rtl="0" eaLnBrk="1" latinLnBrk="0" hangingPunct="1">
-              <a:lnSpc>
-                <a:spcPct val="90000"/>
-              </a:lnSpc>
-              <a:spcBef>
-                <a:spcPts val="500"/>
-              </a:spcBef>
-              <a:buFont typeface="Arial" panose="020B0604020202020204" pitchFamily="34" charset="0"/>
-              <a:buChar char="•"/>
-              <a:defRPr sz="2400" kern="1200">
-                <a:solidFill>
-                  <a:schemeClr val="tx1"/>
-                </a:solidFill>
-                <a:latin typeface="+mn-lt"/>
-                <a:ea typeface="+mn-ea"/>
-                <a:cs typeface="+mn-cs"/>
-              </a:defRPr>
-            </a:lvl2pPr>
-            <a:lvl3pPr marL="1143000" indent="-228600" algn="l" defTabSz="914400" rtl="0" eaLnBrk="1" latinLnBrk="0" hangingPunct="1">
-              <a:lnSpc>
-                <a:spcPct val="90000"/>
-              </a:lnSpc>
-              <a:spcBef>
-                <a:spcPts val="500"/>
-              </a:spcBef>
-              <a:buFont typeface="Arial" panose="020B0604020202020204" pitchFamily="34" charset="0"/>
-              <a:buChar char="•"/>
-              <a:defRPr sz="2000" kern="1200">
-                <a:solidFill>
-                  <a:schemeClr val="tx1"/>
-                </a:solidFill>
-                <a:latin typeface="+mn-lt"/>
-                <a:ea typeface="+mn-ea"/>
-                <a:cs typeface="+mn-cs"/>
-              </a:defRPr>
-            </a:lvl3pPr>
-            <a:lvl4pPr marL="1600200" indent="-228600" algn="l" defTabSz="914400" rtl="0" eaLnBrk="1" latinLnBrk="0" hangingPunct="1">
-              <a:lnSpc>
-                <a:spcPct val="90000"/>
-              </a:lnSpc>
-              <a:spcBef>
-                <a:spcPts val="500"/>
-              </a:spcBef>
-              <a:buFont typeface="Arial" panose="020B0604020202020204" pitchFamily="34" charset="0"/>
-              <a:buChar char="•"/>
-              <a:defRPr sz="1800" kern="1200">
-                <a:solidFill>
-                  <a:schemeClr val="tx1"/>
-                </a:solidFill>
-                <a:latin typeface="+mn-lt"/>
-                <a:ea typeface="+mn-ea"/>
-                <a:cs typeface="+mn-cs"/>
-              </a:defRPr>
-            </a:lvl4pPr>
-            <a:lvl5pPr marL="2057400" indent="-228600" algn="l" defTabSz="914400" rtl="0" eaLnBrk="1" latinLnBrk="0" hangingPunct="1">
-              <a:lnSpc>
-                <a:spcPct val="90000"/>
-              </a:lnSpc>
-              <a:spcBef>
-                <a:spcPts val="500"/>
-              </a:spcBef>
-              <a:buFont typeface="Arial" panose="020B0604020202020204" pitchFamily="34" charset="0"/>
-              <a:buChar char="•"/>
-              <a:defRPr sz="1800" kern="1200">
-                <a:solidFill>
-                  <a:schemeClr val="tx1"/>
-                </a:solidFill>
-                <a:latin typeface="+mn-lt"/>
-                <a:ea typeface="+mn-ea"/>
-                <a:cs typeface="+mn-cs"/>
-              </a:defRPr>
-            </a:lvl5pPr>
-            <a:lvl6pPr marL="2514600" indent="-228600" algn="l" defTabSz="914400" rtl="0" eaLnBrk="1" latinLnBrk="0" hangingPunct="1">
-              <a:lnSpc>
-                <a:spcPct val="90000"/>
-              </a:lnSpc>
-              <a:spcBef>
-                <a:spcPts val="500"/>
-              </a:spcBef>
-              <a:buFont typeface="Arial" panose="020B0604020202020204" pitchFamily="34" charset="0"/>
-              <a:buChar char="•"/>
-              <a:defRPr sz="1800" kern="1200">
-                <a:solidFill>
-                  <a:schemeClr val="tx1"/>
-                </a:solidFill>
-                <a:latin typeface="+mn-lt"/>
-                <a:ea typeface="+mn-ea"/>
-                <a:cs typeface="+mn-cs"/>
-              </a:defRPr>
-            </a:lvl6pPr>
-            <a:lvl7pPr marL="2971800" indent="-228600" algn="l" defTabSz="914400" rtl="0" eaLnBrk="1" latinLnBrk="0" hangingPunct="1">
-              <a:lnSpc>
-                <a:spcPct val="90000"/>
-              </a:lnSpc>
-              <a:spcBef>
-                <a:spcPts val="500"/>
-              </a:spcBef>
-              <a:buFont typeface="Arial" panose="020B0604020202020204" pitchFamily="34" charset="0"/>
-              <a:buChar char="•"/>
-              <a:defRPr sz="1800" kern="1200">
-                <a:solidFill>
-                  <a:schemeClr val="tx1"/>
-                </a:solidFill>
-                <a:latin typeface="+mn-lt"/>
-                <a:ea typeface="+mn-ea"/>
-                <a:cs typeface="+mn-cs"/>
-              </a:defRPr>
-            </a:lvl7pPr>
-            <a:lvl8pPr marL="3429000" indent="-228600" algn="l" defTabSz="914400" rtl="0" eaLnBrk="1" latinLnBrk="0" hangingPunct="1">
-              <a:lnSpc>
-                <a:spcPct val="90000"/>
-              </a:lnSpc>
-              <a:spcBef>
-                <a:spcPts val="500"/>
-              </a:spcBef>
-              <a:buFont typeface="Arial" panose="020B0604020202020204" pitchFamily="34" charset="0"/>
-              <a:buChar char="•"/>
-              <a:defRPr sz="1800" kern="1200">
-                <a:solidFill>
-                  <a:schemeClr val="tx1"/>
-                </a:solidFill>
-                <a:latin typeface="+mn-lt"/>
-                <a:ea typeface="+mn-ea"/>
-                <a:cs typeface="+mn-cs"/>
-              </a:defRPr>
-            </a:lvl8pPr>
-            <a:lvl9pPr marL="3886200" indent="-228600" algn="l" defTabSz="914400" rtl="0" eaLnBrk="1" latinLnBrk="0" hangingPunct="1">
-              <a:lnSpc>
-                <a:spcPct val="90000"/>
-              </a:lnSpc>
-              <a:spcBef>
-                <a:spcPts val="500"/>
-              </a:spcBef>
-              <a:buFont typeface="Arial" panose="020B0604020202020204" pitchFamily="34" charset="0"/>
-              <a:buChar char="•"/>
-              <a:defRPr sz="1800" kern="1200">
-                <a:solidFill>
-                  <a:schemeClr val="tx1"/>
-                </a:solidFill>
-                <a:latin typeface="+mn-lt"/>
-                <a:ea typeface="+mn-ea"/>
-                <a:cs typeface="+mn-cs"/>
-              </a:defRPr>
-            </a:lvl9pPr>
-          </a:lstStyle>
-          <a:p>
-            <a:pPr marL="342900" indent="-342900">
-              <a:buFont typeface="Arial" panose="020B0604020202020204" pitchFamily="34" charset="0"/>
-              <a:buChar char="•"/>
-            </a:pPr>
-            <a:r>
-              <a:rPr lang="es-CL" sz="2000" b="0" dirty="0">
-                <a:solidFill>
-                  <a:schemeClr val="tx1"/>
-                </a:solidFill>
-                <a:latin typeface="AmericanSans"/>
-              </a:rPr>
-              <a:t>La </a:t>
-            </a:r>
-            <a:r>
-              <a:rPr lang="es-CL" sz="2000" b="0" dirty="0" err="1">
-                <a:solidFill>
-                  <a:schemeClr val="tx1"/>
-                </a:solidFill>
-                <a:latin typeface="AmericanSans"/>
-              </a:rPr>
-              <a:t>libreria</a:t>
-            </a:r>
-            <a:r>
-              <a:rPr lang="es-CL" sz="2000" b="0" dirty="0">
-                <a:solidFill>
-                  <a:schemeClr val="tx1"/>
-                </a:solidFill>
-                <a:latin typeface="AmericanSans"/>
-              </a:rPr>
-              <a:t> </a:t>
-            </a:r>
-            <a:r>
-              <a:rPr lang="es-CL" sz="2000" dirty="0" err="1">
-                <a:solidFill>
-                  <a:schemeClr val="tx1"/>
-                </a:solidFill>
-                <a:latin typeface="AmericanSans"/>
-              </a:rPr>
-              <a:t>JUnit</a:t>
-            </a:r>
-            <a:r>
-              <a:rPr lang="es-CL" sz="2000" b="0" dirty="0">
-                <a:solidFill>
-                  <a:schemeClr val="tx1"/>
-                </a:solidFill>
-                <a:latin typeface="AmericanSans"/>
-              </a:rPr>
-              <a:t> provee un </a:t>
-            </a:r>
-            <a:r>
-              <a:rPr lang="es-CL" sz="2000" b="0" dirty="0" err="1">
-                <a:solidFill>
-                  <a:schemeClr val="tx1"/>
-                </a:solidFill>
-                <a:latin typeface="AmericanSans"/>
-              </a:rPr>
-              <a:t>framework</a:t>
-            </a:r>
-            <a:r>
-              <a:rPr lang="es-CL" sz="2000" b="0" dirty="0">
-                <a:solidFill>
-                  <a:schemeClr val="tx1"/>
-                </a:solidFill>
-                <a:latin typeface="AmericanSans"/>
-              </a:rPr>
-              <a:t> con muchas herramientas para facilitar </a:t>
-            </a:r>
-            <a:r>
-              <a:rPr lang="es-CL" sz="2000" b="0" dirty="0" err="1">
-                <a:solidFill>
-                  <a:schemeClr val="tx1"/>
-                </a:solidFill>
-                <a:latin typeface="AmericanSans"/>
-              </a:rPr>
-              <a:t>testing</a:t>
-            </a:r>
-            <a:r>
-              <a:rPr lang="es-CL" sz="2000" b="0" dirty="0">
-                <a:solidFill>
-                  <a:schemeClr val="tx1"/>
-                </a:solidFill>
-                <a:latin typeface="AmericanSans"/>
-              </a:rPr>
-              <a:t> en Java.</a:t>
-            </a:r>
-          </a:p>
-          <a:p>
-            <a:pPr marL="342900" indent="-342900">
-              <a:buFont typeface="Arial" panose="020B0604020202020204" pitchFamily="34" charset="0"/>
-              <a:buChar char="•"/>
-            </a:pPr>
-            <a:r>
-              <a:rPr lang="es-CL" sz="2000" b="0" dirty="0">
-                <a:solidFill>
-                  <a:schemeClr val="tx1"/>
-                </a:solidFill>
-                <a:latin typeface="AmericanSans"/>
-              </a:rPr>
-              <a:t>Creamos </a:t>
-            </a:r>
-            <a:r>
-              <a:rPr lang="es-CL" sz="2000" dirty="0">
-                <a:solidFill>
-                  <a:schemeClr val="tx1"/>
-                </a:solidFill>
-                <a:latin typeface="AmericanSans"/>
-              </a:rPr>
-              <a:t>1 test unitario por cada comportamiento </a:t>
-            </a:r>
-            <a:r>
-              <a:rPr lang="es-CL" sz="2000" b="0" dirty="0">
-                <a:solidFill>
-                  <a:schemeClr val="tx1"/>
-                </a:solidFill>
-                <a:latin typeface="AmericanSans"/>
-              </a:rPr>
-              <a:t>de la interfaz.</a:t>
-            </a:r>
-          </a:p>
-          <a:p>
-            <a:pPr marL="342900" indent="-342900">
-              <a:buFont typeface="Arial" panose="020B0604020202020204" pitchFamily="34" charset="0"/>
-              <a:buChar char="•"/>
-            </a:pPr>
-            <a:r>
-              <a:rPr lang="es-CL" sz="2000" b="0" dirty="0">
-                <a:solidFill>
-                  <a:schemeClr val="tx1"/>
-                </a:solidFill>
-                <a:latin typeface="AmericanSans"/>
-              </a:rPr>
-              <a:t>Cada test unitario es un </a:t>
-            </a:r>
-            <a:r>
-              <a:rPr lang="es-CL" sz="2000" b="0" dirty="0" err="1">
-                <a:solidFill>
-                  <a:schemeClr val="tx1"/>
-                </a:solidFill>
-                <a:latin typeface="AmericanSans"/>
-              </a:rPr>
-              <a:t>metodo</a:t>
-            </a:r>
-            <a:r>
-              <a:rPr lang="es-CL" sz="2000" b="0" dirty="0">
-                <a:solidFill>
-                  <a:schemeClr val="tx1"/>
-                </a:solidFill>
-                <a:latin typeface="AmericanSans"/>
-              </a:rPr>
-              <a:t> de tipo </a:t>
-            </a:r>
-            <a:r>
-              <a:rPr lang="es-CL" sz="2000" b="0" dirty="0" err="1">
-                <a:solidFill>
-                  <a:schemeClr val="tx1"/>
-                </a:solidFill>
-                <a:latin typeface="AmericanSans"/>
-              </a:rPr>
-              <a:t>void</a:t>
-            </a:r>
-            <a:r>
-              <a:rPr lang="es-CL" sz="2000" b="0" dirty="0">
-                <a:solidFill>
-                  <a:schemeClr val="tx1"/>
-                </a:solidFill>
-                <a:latin typeface="AmericanSans"/>
-              </a:rPr>
-              <a:t> en la clase </a:t>
-            </a:r>
-            <a:r>
-              <a:rPr lang="es-CL" sz="2000" dirty="0" err="1">
-                <a:solidFill>
-                  <a:schemeClr val="tx1"/>
-                </a:solidFill>
-                <a:latin typeface="AmericanSans"/>
-              </a:rPr>
-              <a:t>CalculatorTest</a:t>
-            </a:r>
-            <a:r>
-              <a:rPr lang="es-CL" sz="2000" b="0" dirty="0">
-                <a:solidFill>
-                  <a:schemeClr val="tx1"/>
-                </a:solidFill>
-                <a:latin typeface="AmericanSans"/>
-              </a:rPr>
-              <a:t>.</a:t>
-            </a:r>
-          </a:p>
-          <a:p>
-            <a:pPr marL="342900" indent="-342900">
-              <a:buFont typeface="Arial" panose="020B0604020202020204" pitchFamily="34" charset="0"/>
-              <a:buChar char="•"/>
-            </a:pPr>
-            <a:r>
-              <a:rPr lang="es-CL" sz="2000" b="0" dirty="0">
-                <a:solidFill>
-                  <a:schemeClr val="tx1"/>
-                </a:solidFill>
-                <a:latin typeface="AmericanSans"/>
-              </a:rPr>
-              <a:t>Nombre del test sigue esta </a:t>
-            </a:r>
-            <a:r>
-              <a:rPr lang="es-CL" sz="2000" b="0" dirty="0" err="1">
-                <a:solidFill>
-                  <a:schemeClr val="tx1"/>
-                </a:solidFill>
-                <a:latin typeface="AmericanSans"/>
-              </a:rPr>
-              <a:t>convencion</a:t>
-            </a:r>
-            <a:r>
-              <a:rPr lang="es-CL" sz="2000" b="0" dirty="0">
-                <a:solidFill>
-                  <a:schemeClr val="tx1"/>
-                </a:solidFill>
-                <a:latin typeface="AmericanSans"/>
-              </a:rPr>
-              <a:t>:</a:t>
-            </a:r>
-          </a:p>
-          <a:p>
-            <a:pPr algn="ctr"/>
-            <a:r>
-              <a:rPr lang="es-CL" sz="2000" b="0" dirty="0">
-                <a:solidFill>
-                  <a:schemeClr val="tx1"/>
-                </a:solidFill>
-                <a:latin typeface="AmericanSans"/>
-              </a:rPr>
-              <a:t>&lt;</a:t>
-            </a:r>
-            <a:r>
-              <a:rPr lang="es-CL" sz="2000" b="0" dirty="0" err="1">
-                <a:solidFill>
-                  <a:schemeClr val="tx1"/>
-                </a:solidFill>
-                <a:latin typeface="AmericanSans"/>
-              </a:rPr>
-              <a:t>nombreMetodo</a:t>
-            </a:r>
-            <a:r>
-              <a:rPr lang="es-CL" sz="2000" b="0" dirty="0">
-                <a:solidFill>
-                  <a:schemeClr val="tx1"/>
-                </a:solidFill>
-                <a:latin typeface="AmericanSans"/>
-              </a:rPr>
-              <a:t>&gt;_&lt;escenario&gt;_&lt;</a:t>
-            </a:r>
-            <a:r>
-              <a:rPr lang="es-CL" sz="2000" b="0" dirty="0" err="1">
-                <a:solidFill>
-                  <a:schemeClr val="tx1"/>
-                </a:solidFill>
-                <a:latin typeface="AmericanSans"/>
-              </a:rPr>
-              <a:t>resultadoEsperado</a:t>
-            </a:r>
-            <a:r>
-              <a:rPr lang="es-CL" sz="2000" b="0" dirty="0">
-                <a:solidFill>
-                  <a:schemeClr val="tx1"/>
-                </a:solidFill>
-                <a:latin typeface="AmericanSans"/>
-              </a:rPr>
-              <a:t>&gt;()</a:t>
-            </a:r>
-          </a:p>
-          <a:p>
-            <a:r>
-              <a:rPr lang="es-CL" sz="2000" b="0" dirty="0" err="1">
-                <a:solidFill>
-                  <a:schemeClr val="tx1"/>
-                </a:solidFill>
-                <a:latin typeface="AmericanSans"/>
-              </a:rPr>
-              <a:t>Ej</a:t>
-            </a:r>
-            <a:r>
-              <a:rPr lang="es-CL" sz="2000" b="0" dirty="0">
-                <a:solidFill>
-                  <a:schemeClr val="tx1"/>
-                </a:solidFill>
-                <a:latin typeface="AmericanSans"/>
-              </a:rPr>
-              <a:t>:</a:t>
-            </a:r>
-          </a:p>
-          <a:p>
-            <a:endParaRPr lang="es-CL" sz="2000" b="0" dirty="0">
-              <a:solidFill>
-                <a:schemeClr val="tx1"/>
-              </a:solidFill>
-              <a:latin typeface="AmericanSans"/>
-            </a:endParaRPr>
-          </a:p>
-          <a:p>
-            <a:pPr marL="342900" indent="-342900">
-              <a:buFont typeface="Arial" panose="020B0604020202020204" pitchFamily="34" charset="0"/>
-              <a:buChar char="•"/>
-            </a:pPr>
-            <a:r>
-              <a:rPr lang="es-CL" sz="2000" b="0" dirty="0">
-                <a:solidFill>
-                  <a:schemeClr val="tx1"/>
-                </a:solidFill>
-                <a:latin typeface="AmericanSans"/>
-              </a:rPr>
-              <a:t>El test unitario se implementa con estructura </a:t>
-            </a:r>
-            <a:r>
-              <a:rPr lang="es-CL" sz="2000" dirty="0">
-                <a:solidFill>
-                  <a:schemeClr val="tx1"/>
-                </a:solidFill>
-                <a:latin typeface="AmericanSans"/>
-              </a:rPr>
-              <a:t>AAA</a:t>
-            </a:r>
-            <a:r>
-              <a:rPr lang="es-CL" sz="2000" b="0" dirty="0">
-                <a:solidFill>
-                  <a:schemeClr val="tx1"/>
-                </a:solidFill>
-                <a:latin typeface="AmericanSans"/>
-              </a:rPr>
-              <a:t>:</a:t>
-            </a:r>
-          </a:p>
-          <a:p>
-            <a:pPr marL="1028700" lvl="1" indent="-342900"/>
-            <a:r>
-              <a:rPr lang="es-CL" sz="1800" b="1" dirty="0" err="1">
-                <a:solidFill>
-                  <a:schemeClr val="tx1"/>
-                </a:solidFill>
-                <a:latin typeface="AmericanSans"/>
-              </a:rPr>
-              <a:t>A</a:t>
-            </a:r>
-            <a:r>
-              <a:rPr lang="es-CL" sz="1800" b="0" dirty="0" err="1">
-                <a:solidFill>
-                  <a:schemeClr val="tx1"/>
-                </a:solidFill>
-                <a:latin typeface="AmericanSans"/>
-              </a:rPr>
-              <a:t>rrange</a:t>
-            </a:r>
-            <a:r>
-              <a:rPr lang="es-CL" sz="1800" b="0" dirty="0">
-                <a:solidFill>
-                  <a:schemeClr val="tx1"/>
-                </a:solidFill>
-                <a:latin typeface="AmericanSans"/>
-              </a:rPr>
-              <a:t> (organizar): </a:t>
-            </a:r>
-            <a:r>
-              <a:rPr lang="es-CL" sz="1800" b="0" dirty="0" err="1">
-                <a:solidFill>
-                  <a:schemeClr val="tx1"/>
-                </a:solidFill>
-                <a:latin typeface="AmericanSans"/>
-              </a:rPr>
-              <a:t>setear</a:t>
-            </a:r>
-            <a:r>
-              <a:rPr lang="es-CL" sz="1800" b="0" dirty="0">
-                <a:solidFill>
-                  <a:schemeClr val="tx1"/>
-                </a:solidFill>
-                <a:latin typeface="AmericanSans"/>
-              </a:rPr>
-              <a:t> las variables y objetos del test, incluido los resultados esperados.</a:t>
-            </a:r>
-          </a:p>
-          <a:p>
-            <a:pPr marL="1028700" lvl="1" indent="-342900"/>
-            <a:r>
-              <a:rPr lang="es-CL" sz="1800" b="1" dirty="0" err="1">
-                <a:latin typeface="AmericanSans"/>
-              </a:rPr>
-              <a:t>A</a:t>
-            </a:r>
-            <a:r>
-              <a:rPr lang="es-CL" sz="1800" dirty="0" err="1">
-                <a:latin typeface="AmericanSans"/>
-              </a:rPr>
-              <a:t>ct</a:t>
-            </a:r>
-            <a:r>
-              <a:rPr lang="es-CL" sz="1800" dirty="0">
-                <a:latin typeface="AmericanSans"/>
-              </a:rPr>
-              <a:t> (actuar): actuar sobre el método y guardar el resultado obtenido.</a:t>
-            </a:r>
-          </a:p>
-          <a:p>
-            <a:pPr marL="1028700" lvl="1" indent="-342900"/>
-            <a:r>
-              <a:rPr lang="es-CL" sz="1800" b="1" dirty="0" err="1">
-                <a:solidFill>
-                  <a:schemeClr val="tx1"/>
-                </a:solidFill>
-                <a:latin typeface="AmericanSans"/>
-              </a:rPr>
-              <a:t>A</a:t>
-            </a:r>
-            <a:r>
-              <a:rPr lang="es-CL" sz="1800" b="0" dirty="0" err="1">
-                <a:solidFill>
-                  <a:schemeClr val="tx1"/>
-                </a:solidFill>
-                <a:latin typeface="AmericanSans"/>
-              </a:rPr>
-              <a:t>ssert</a:t>
-            </a:r>
-            <a:r>
-              <a:rPr lang="es-CL" sz="1800" b="0" dirty="0">
-                <a:solidFill>
-                  <a:schemeClr val="tx1"/>
-                </a:solidFill>
-                <a:latin typeface="AmericanSans"/>
-              </a:rPr>
-              <a:t> (chequear): comparar el resultado obtenido con el esperado.</a:t>
-            </a:r>
-          </a:p>
-          <a:p>
-            <a:pPr marL="1028700" lvl="1" indent="-342900"/>
-            <a:endParaRPr lang="es-CL" sz="1800" dirty="0">
-              <a:latin typeface="AmericanSans"/>
-            </a:endParaRPr>
+          <p:nvPr>
+            <p:ph type="sldNum" sz="quarter" idx="12"/>
+          </p:nvPr>
+        </p:nvSpPr>
+        <p:spPr/>
+        <p:txBody>
+          <a:bodyPr/>
+          <a:lstStyle/>
+          <a:p>
+            <a:fld id="{F00CFC7C-F3DD-4CCA-A309-41102AB6D153}" type="slidenum">
+              <a:rPr lang="en-US" smtClean="0"/>
+              <a:t>13</a:t>
+            </a:fld>
+            <a:endParaRPr lang="en-US"/>
           </a:p>
         </p:txBody>
       </p:sp>
       <p:pic>
         <p:nvPicPr>
-          <p:cNvPr id="10" name="Picture 9">
-            <a:extLst>
-              <a:ext uri="{FF2B5EF4-FFF2-40B4-BE49-F238E27FC236}">
-                <a16:creationId xmlns:a16="http://schemas.microsoft.com/office/drawing/2014/main" id="{94366426-551A-8FCA-41ED-A455AA792B45}"/>
+          <p:cNvPr id="4" name="Picture 3">
+            <a:extLst>
+              <a:ext uri="{FF2B5EF4-FFF2-40B4-BE49-F238E27FC236}">
+                <a16:creationId xmlns:a16="http://schemas.microsoft.com/office/drawing/2014/main" id="{FBA8406C-410F-7BC0-07CB-0A92D98988DB}"/>
               </a:ext>
             </a:extLst>
           </p:cNvPr>
@@ -10180,27 +13256,170 @@
           <p:nvPr/>
         </p:nvPicPr>
         <p:blipFill>
-          <a:blip r:embed="rId2"/>
+          <a:blip r:embed="rId3"/>
           <a:stretch>
             <a:fillRect/>
           </a:stretch>
         </p:blipFill>
         <p:spPr>
           <a:xfrm>
-            <a:off x="1668562" y="3262626"/>
-            <a:ext cx="9952163" cy="332748"/>
+            <a:off x="413072" y="1728024"/>
+            <a:ext cx="10512721" cy="4060796"/>
           </a:xfrm>
           <a:prstGeom prst="rect">
             <a:avLst/>
           </a:prstGeom>
         </p:spPr>
       </p:pic>
-      <p:sp>
-        <p:nvSpPr>
-          <p:cNvPr id="14" name="Arrow: Right 13">
-            <a:extLst>
-              <a:ext uri="{FF2B5EF4-FFF2-40B4-BE49-F238E27FC236}">
-                <a16:creationId xmlns:a16="http://schemas.microsoft.com/office/drawing/2014/main" id="{899C128B-67DD-CB3B-DF84-6DD4999D29A2}"/>
+    </p:spTree>
+    <p:extLst>
+      <p:ext uri="{BB962C8B-B14F-4D97-AF65-F5344CB8AC3E}">
+        <p14:creationId xmlns:p14="http://schemas.microsoft.com/office/powerpoint/2010/main" val="242680462"/>
+      </p:ext>
+    </p:extLst>
+  </p:cSld>
+  <p:clrMapOvr>
+    <a:masterClrMapping/>
+  </p:clrMapOvr>
+</p:sld>
+</file>
+
+<file path=ppt/slides/slide14.xml><?xml version="1.0" encoding="utf-8"?>
+<p:sld xmlns:a="http://schemas.openxmlformats.org/drawingml/2006/main" xmlns:r="http://schemas.openxmlformats.org/officeDocument/2006/relationships" xmlns:p="http://schemas.openxmlformats.org/presentationml/2006/main">
+  <p:cSld>
+    <p:spTree>
+      <p:nvGrpSpPr>
+        <p:cNvPr id="1" name="">
+          <a:extLst>
+            <a:ext uri="{FF2B5EF4-FFF2-40B4-BE49-F238E27FC236}">
+              <a16:creationId xmlns:a16="http://schemas.microsoft.com/office/drawing/2014/main" id="{9ACA2248-1766-88F5-37A1-A31AADF02BD5}"/>
+            </a:ext>
+          </a:extLst>
+        </p:cNvPr>
+        <p:cNvGrpSpPr/>
+        <p:nvPr/>
+      </p:nvGrpSpPr>
+      <p:grpSpPr>
+        <a:xfrm>
+          <a:off x="0" y="0"/>
+          <a:ext cx="0" cy="0"/>
+          <a:chOff x="0" y="0"/>
+          <a:chExt cx="0" cy="0"/>
+        </a:xfrm>
+      </p:grpSpPr>
+      <p:sp>
+        <p:nvSpPr>
+          <p:cNvPr id="2" name="Title 1">
+            <a:extLst>
+              <a:ext uri="{FF2B5EF4-FFF2-40B4-BE49-F238E27FC236}">
+                <a16:creationId xmlns:a16="http://schemas.microsoft.com/office/drawing/2014/main" id="{5CD513CF-50AF-59DA-B6CF-DB50B73C268A}"/>
+              </a:ext>
+            </a:extLst>
+          </p:cNvPr>
+          <p:cNvSpPr>
+            <a:spLocks noGrp="1"/>
+          </p:cNvSpPr>
+          <p:nvPr>
+            <p:ph type="ctrTitle"/>
+          </p:nvPr>
+        </p:nvSpPr>
+        <p:spPr>
+          <a:xfrm>
+            <a:off x="91440" y="132080"/>
+            <a:ext cx="12009120" cy="573722"/>
+          </a:xfrm>
+        </p:spPr>
+        <p:txBody>
+          <a:bodyPr>
+            <a:normAutofit fontScale="90000"/>
+          </a:bodyPr>
+          <a:lstStyle/>
+          <a:p>
+            <a:pPr algn="l"/>
+            <a:r>
+              <a:rPr lang="en-US" sz="3600" dirty="0"/>
+              <a:t>Typical </a:t>
+            </a:r>
+            <a:r>
+              <a:rPr lang="en-US" sz="3600" b="1" dirty="0"/>
+              <a:t>name structure </a:t>
+            </a:r>
+            <a:r>
+              <a:rPr lang="en-US" sz="3600" dirty="0"/>
+              <a:t>of a unit test &amp; the </a:t>
+            </a:r>
+            <a:r>
+              <a:rPr lang="en-US" sz="3600" b="1" dirty="0"/>
+              <a:t>AAA pattern</a:t>
+            </a:r>
+          </a:p>
+        </p:txBody>
+      </p:sp>
+      <p:sp>
+        <p:nvSpPr>
+          <p:cNvPr id="3" name="Slide Number Placeholder 2">
+            <a:extLst>
+              <a:ext uri="{FF2B5EF4-FFF2-40B4-BE49-F238E27FC236}">
+                <a16:creationId xmlns:a16="http://schemas.microsoft.com/office/drawing/2014/main" id="{74F0EE01-64B5-CF50-BA0C-EAF740309A11}"/>
+              </a:ext>
+            </a:extLst>
+          </p:cNvPr>
+          <p:cNvSpPr>
+            <a:spLocks noGrp="1"/>
+          </p:cNvSpPr>
+          <p:nvPr>
+            <p:ph type="sldNum" sz="quarter" idx="12"/>
+          </p:nvPr>
+        </p:nvSpPr>
+        <p:spPr/>
+        <p:txBody>
+          <a:bodyPr/>
+          <a:lstStyle/>
+          <a:p>
+            <a:fld id="{F00CFC7C-F3DD-4CCA-A309-41102AB6D153}" type="slidenum">
+              <a:rPr lang="en-US" smtClean="0"/>
+              <a:t>14</a:t>
+            </a:fld>
+            <a:endParaRPr lang="en-US"/>
+          </a:p>
+        </p:txBody>
+      </p:sp>
+      <p:pic>
+        <p:nvPicPr>
+          <p:cNvPr id="5" name="Picture 4">
+            <a:extLst>
+              <a:ext uri="{FF2B5EF4-FFF2-40B4-BE49-F238E27FC236}">
+                <a16:creationId xmlns:a16="http://schemas.microsoft.com/office/drawing/2014/main" id="{E749D6F3-1238-814A-370F-1E03E13FCFFE}"/>
+              </a:ext>
+            </a:extLst>
+          </p:cNvPr>
+          <p:cNvPicPr>
+            <a:picLocks noChangeAspect="1"/>
+          </p:cNvPicPr>
+          <p:nvPr/>
+        </p:nvPicPr>
+        <p:blipFill>
+          <a:blip r:embed="rId3"/>
+          <a:stretch>
+            <a:fillRect/>
+          </a:stretch>
+        </p:blipFill>
+        <p:spPr>
+          <a:xfrm>
+            <a:off x="413072" y="1728024"/>
+            <a:ext cx="10512721" cy="4060796"/>
+          </a:xfrm>
+          <a:prstGeom prst="rect">
+            <a:avLst/>
+          </a:prstGeom>
+        </p:spPr>
+      </p:pic>
+      <p:sp>
+        <p:nvSpPr>
+          <p:cNvPr id="9" name="Right Brace 8">
+            <a:extLst>
+              <a:ext uri="{FF2B5EF4-FFF2-40B4-BE49-F238E27FC236}">
+                <a16:creationId xmlns:a16="http://schemas.microsoft.com/office/drawing/2014/main" id="{D3412C99-2D44-9F4C-3794-C3638474EB21}"/>
               </a:ext>
             </a:extLst>
           </p:cNvPr>
@@ -10208,16 +13427,542 @@
           <p:nvPr/>
         </p:nvSpPr>
         <p:spPr>
+          <a:xfrm rot="16200000">
+            <a:off x="2308425" y="1200983"/>
+            <a:ext cx="266859" cy="887175"/>
+          </a:xfrm>
+          <a:prstGeom prst="rightBrace">
+            <a:avLst/>
+          </a:prstGeom>
+          <a:ln w="28575">
+            <a:solidFill>
+              <a:srgbClr val="FF0000"/>
+            </a:solidFill>
+          </a:ln>
+        </p:spPr>
+        <p:style>
+          <a:lnRef idx="2">
+            <a:schemeClr val="accent1"/>
+          </a:lnRef>
+          <a:fillRef idx="0">
+            <a:schemeClr val="accent1"/>
+          </a:fillRef>
+          <a:effectRef idx="1">
+            <a:schemeClr val="accent1"/>
+          </a:effectRef>
+          <a:fontRef idx="minor">
+            <a:schemeClr val="tx1"/>
+          </a:fontRef>
+        </p:style>
+        <p:txBody>
+          <a:bodyPr rtlCol="0" anchor="ctr"/>
+          <a:lstStyle/>
+          <a:p>
+            <a:pPr algn="ctr"/>
+            <a:endParaRPr lang="en-US"/>
+          </a:p>
+        </p:txBody>
+      </p:sp>
+      <p:sp>
+        <p:nvSpPr>
+          <p:cNvPr id="10" name="Right Brace 9">
+            <a:extLst>
+              <a:ext uri="{FF2B5EF4-FFF2-40B4-BE49-F238E27FC236}">
+                <a16:creationId xmlns:a16="http://schemas.microsoft.com/office/drawing/2014/main" id="{BF18EF11-DFCE-819B-D292-75DB6D6017BE}"/>
+              </a:ext>
+            </a:extLst>
+          </p:cNvPr>
+          <p:cNvSpPr/>
+          <p:nvPr/>
+        </p:nvSpPr>
+        <p:spPr>
+          <a:xfrm rot="16200000">
+            <a:off x="4333312" y="161616"/>
+            <a:ext cx="266859" cy="2965909"/>
+          </a:xfrm>
+          <a:prstGeom prst="rightBrace">
+            <a:avLst/>
+          </a:prstGeom>
+          <a:ln w="28575">
+            <a:solidFill>
+              <a:srgbClr val="FF0000"/>
+            </a:solidFill>
+          </a:ln>
+        </p:spPr>
+        <p:style>
+          <a:lnRef idx="2">
+            <a:schemeClr val="accent1"/>
+          </a:lnRef>
+          <a:fillRef idx="0">
+            <a:schemeClr val="accent1"/>
+          </a:fillRef>
+          <a:effectRef idx="1">
+            <a:schemeClr val="accent1"/>
+          </a:effectRef>
+          <a:fontRef idx="minor">
+            <a:schemeClr val="tx1"/>
+          </a:fontRef>
+        </p:style>
+        <p:txBody>
+          <a:bodyPr rtlCol="0" anchor="ctr"/>
+          <a:lstStyle/>
+          <a:p>
+            <a:pPr algn="ctr"/>
+            <a:endParaRPr lang="en-US"/>
+          </a:p>
+        </p:txBody>
+      </p:sp>
+      <p:sp>
+        <p:nvSpPr>
+          <p:cNvPr id="11" name="Right Brace 10">
+            <a:extLst>
+              <a:ext uri="{FF2B5EF4-FFF2-40B4-BE49-F238E27FC236}">
+                <a16:creationId xmlns:a16="http://schemas.microsoft.com/office/drawing/2014/main" id="{F4E0876B-A758-B716-9B74-931F396616A2}"/>
+              </a:ext>
+            </a:extLst>
+          </p:cNvPr>
+          <p:cNvSpPr/>
+          <p:nvPr/>
+        </p:nvSpPr>
+        <p:spPr>
+          <a:xfrm rot="16200000">
+            <a:off x="7541435" y="212009"/>
+            <a:ext cx="266859" cy="2865120"/>
+          </a:xfrm>
+          <a:prstGeom prst="rightBrace">
+            <a:avLst/>
+          </a:prstGeom>
+          <a:ln w="28575">
+            <a:solidFill>
+              <a:srgbClr val="FF0000"/>
+            </a:solidFill>
+          </a:ln>
+        </p:spPr>
+        <p:style>
+          <a:lnRef idx="2">
+            <a:schemeClr val="accent1"/>
+          </a:lnRef>
+          <a:fillRef idx="0">
+            <a:schemeClr val="accent1"/>
+          </a:fillRef>
+          <a:effectRef idx="1">
+            <a:schemeClr val="accent1"/>
+          </a:effectRef>
+          <a:fontRef idx="minor">
+            <a:schemeClr val="tx1"/>
+          </a:fontRef>
+        </p:style>
+        <p:txBody>
+          <a:bodyPr rtlCol="0" anchor="ctr"/>
+          <a:lstStyle/>
+          <a:p>
+            <a:pPr algn="ctr"/>
+            <a:endParaRPr lang="en-US"/>
+          </a:p>
+        </p:txBody>
+      </p:sp>
+      <p:sp>
+        <p:nvSpPr>
+          <p:cNvPr id="12" name="TextBox 11">
+            <a:extLst>
+              <a:ext uri="{FF2B5EF4-FFF2-40B4-BE49-F238E27FC236}">
+                <a16:creationId xmlns:a16="http://schemas.microsoft.com/office/drawing/2014/main" id="{C85EB99D-7690-245E-F25F-25EA2F6B08C1}"/>
+              </a:ext>
+            </a:extLst>
+          </p:cNvPr>
+          <p:cNvSpPr txBox="1"/>
+          <p:nvPr/>
+        </p:nvSpPr>
+        <p:spPr>
           <a:xfrm>
-            <a:off x="5618480" y="5756148"/>
-            <a:ext cx="5974746" cy="663222"/>
+            <a:off x="1849384" y="986080"/>
+            <a:ext cx="1184940" cy="461665"/>
           </a:xfrm>
-          <a:prstGeom prst="rightArrow">
+          <a:prstGeom prst="rect">
+            <a:avLst/>
+          </a:prstGeom>
+          <a:noFill/>
+        </p:spPr>
+        <p:txBody>
+          <a:bodyPr wrap="none" rtlCol="0">
+            <a:spAutoFit/>
+          </a:bodyPr>
+          <a:lstStyle/>
+          <a:p>
+            <a:r>
+              <a:rPr lang="en-US" sz="2400" dirty="0"/>
+              <a:t>Module</a:t>
+            </a:r>
+          </a:p>
+        </p:txBody>
+      </p:sp>
+      <p:sp>
+        <p:nvSpPr>
+          <p:cNvPr id="13" name="TextBox 12">
+            <a:extLst>
+              <a:ext uri="{FF2B5EF4-FFF2-40B4-BE49-F238E27FC236}">
+                <a16:creationId xmlns:a16="http://schemas.microsoft.com/office/drawing/2014/main" id="{524F22A6-10CD-04AA-8ED0-43EBC5465A32}"/>
+              </a:ext>
+            </a:extLst>
+          </p:cNvPr>
+          <p:cNvSpPr txBox="1"/>
+          <p:nvPr/>
+        </p:nvSpPr>
+        <p:spPr>
+          <a:xfrm>
+            <a:off x="3361300" y="986080"/>
+            <a:ext cx="2308132" cy="461665"/>
+          </a:xfrm>
+          <a:prstGeom prst="rect">
+            <a:avLst/>
+          </a:prstGeom>
+          <a:noFill/>
+        </p:spPr>
+        <p:txBody>
+          <a:bodyPr wrap="none" rtlCol="0">
+            <a:spAutoFit/>
+          </a:bodyPr>
+          <a:lstStyle/>
+          <a:p>
+            <a:r>
+              <a:rPr lang="en-US" sz="2400" dirty="0"/>
+              <a:t>Behavior &amp; case</a:t>
+            </a:r>
+          </a:p>
+        </p:txBody>
+      </p:sp>
+      <p:sp>
+        <p:nvSpPr>
+          <p:cNvPr id="14" name="TextBox 13">
+            <a:extLst>
+              <a:ext uri="{FF2B5EF4-FFF2-40B4-BE49-F238E27FC236}">
+                <a16:creationId xmlns:a16="http://schemas.microsoft.com/office/drawing/2014/main" id="{18B2D2CF-8362-4AAC-F5D3-6F970188E501}"/>
+              </a:ext>
+            </a:extLst>
+          </p:cNvPr>
+          <p:cNvSpPr txBox="1"/>
+          <p:nvPr/>
+        </p:nvSpPr>
+        <p:spPr>
+          <a:xfrm>
+            <a:off x="6552249" y="986080"/>
+            <a:ext cx="2245230" cy="461665"/>
+          </a:xfrm>
+          <a:prstGeom prst="rect">
+            <a:avLst/>
+          </a:prstGeom>
+          <a:noFill/>
+        </p:spPr>
+        <p:txBody>
+          <a:bodyPr wrap="none" rtlCol="0">
+            <a:spAutoFit/>
+          </a:bodyPr>
+          <a:lstStyle/>
+          <a:p>
+            <a:r>
+              <a:rPr lang="en-US" sz="2400" dirty="0"/>
+              <a:t>Expected result</a:t>
+            </a:r>
+          </a:p>
+        </p:txBody>
+      </p:sp>
+      <p:sp>
+        <p:nvSpPr>
+          <p:cNvPr id="15" name="Right Brace 14">
+            <a:extLst>
+              <a:ext uri="{FF2B5EF4-FFF2-40B4-BE49-F238E27FC236}">
+                <a16:creationId xmlns:a16="http://schemas.microsoft.com/office/drawing/2014/main" id="{CA8C41BB-01B3-AB27-CA0B-057EC82FFAD5}"/>
+              </a:ext>
+            </a:extLst>
+          </p:cNvPr>
+          <p:cNvSpPr/>
+          <p:nvPr/>
+        </p:nvSpPr>
+        <p:spPr>
+          <a:xfrm>
+            <a:off x="4515367" y="2267624"/>
+            <a:ext cx="259834" cy="993736"/>
+          </a:xfrm>
+          <a:prstGeom prst="rightBrace">
+            <a:avLst/>
+          </a:prstGeom>
+          <a:ln w="28575">
+            <a:solidFill>
+              <a:srgbClr val="92D050"/>
+            </a:solidFill>
+          </a:ln>
+        </p:spPr>
+        <p:style>
+          <a:lnRef idx="2">
+            <a:schemeClr val="accent1"/>
+          </a:lnRef>
+          <a:fillRef idx="0">
+            <a:schemeClr val="accent1"/>
+          </a:fillRef>
+          <a:effectRef idx="1">
+            <a:schemeClr val="accent1"/>
+          </a:effectRef>
+          <a:fontRef idx="minor">
+            <a:schemeClr val="tx1"/>
+          </a:fontRef>
+        </p:style>
+        <p:txBody>
+          <a:bodyPr rtlCol="0" anchor="ctr"/>
+          <a:lstStyle/>
+          <a:p>
+            <a:pPr algn="ctr"/>
+            <a:endParaRPr lang="en-US"/>
+          </a:p>
+        </p:txBody>
+      </p:sp>
+      <p:sp>
+        <p:nvSpPr>
+          <p:cNvPr id="16" name="TextBox 15">
+            <a:extLst>
+              <a:ext uri="{FF2B5EF4-FFF2-40B4-BE49-F238E27FC236}">
+                <a16:creationId xmlns:a16="http://schemas.microsoft.com/office/drawing/2014/main" id="{C7DA5880-6EF0-5EE3-9715-659046D788A3}"/>
+              </a:ext>
+            </a:extLst>
+          </p:cNvPr>
+          <p:cNvSpPr txBox="1"/>
+          <p:nvPr/>
+        </p:nvSpPr>
+        <p:spPr>
+          <a:xfrm>
+            <a:off x="5027007" y="2533659"/>
+            <a:ext cx="1907895" cy="461665"/>
+          </a:xfrm>
+          <a:prstGeom prst="rect">
+            <a:avLst/>
+          </a:prstGeom>
+          <a:noFill/>
+        </p:spPr>
+        <p:txBody>
+          <a:bodyPr wrap="none" rtlCol="0">
+            <a:spAutoFit/>
+          </a:bodyPr>
+          <a:lstStyle/>
+          <a:p>
+            <a:r>
+              <a:rPr lang="en-US" sz="2400" dirty="0">
+                <a:solidFill>
+                  <a:srgbClr val="92D050"/>
+                </a:solidFill>
+              </a:rPr>
+              <a:t>Setup phase</a:t>
+            </a:r>
+          </a:p>
+        </p:txBody>
+      </p:sp>
+      <p:sp>
+        <p:nvSpPr>
+          <p:cNvPr id="17" name="Right Brace 16">
+            <a:extLst>
+              <a:ext uri="{FF2B5EF4-FFF2-40B4-BE49-F238E27FC236}">
+                <a16:creationId xmlns:a16="http://schemas.microsoft.com/office/drawing/2014/main" id="{E7DC9222-A21A-6331-C231-5492FB828F89}"/>
+              </a:ext>
+            </a:extLst>
+          </p:cNvPr>
+          <p:cNvSpPr/>
+          <p:nvPr/>
+        </p:nvSpPr>
+        <p:spPr>
+          <a:xfrm>
+            <a:off x="6612550" y="3750983"/>
+            <a:ext cx="259834" cy="993736"/>
+          </a:xfrm>
+          <a:prstGeom prst="rightBrace">
+            <a:avLst/>
+          </a:prstGeom>
+          <a:ln w="28575">
+            <a:solidFill>
+              <a:srgbClr val="92D050"/>
+            </a:solidFill>
+          </a:ln>
+        </p:spPr>
+        <p:style>
+          <a:lnRef idx="2">
+            <a:schemeClr val="accent1"/>
+          </a:lnRef>
+          <a:fillRef idx="0">
+            <a:schemeClr val="accent1"/>
+          </a:fillRef>
+          <a:effectRef idx="1">
+            <a:schemeClr val="accent1"/>
+          </a:effectRef>
+          <a:fontRef idx="minor">
+            <a:schemeClr val="tx1"/>
+          </a:fontRef>
+        </p:style>
+        <p:txBody>
+          <a:bodyPr rtlCol="0" anchor="ctr"/>
+          <a:lstStyle/>
+          <a:p>
+            <a:pPr algn="ctr"/>
+            <a:endParaRPr lang="en-US"/>
+          </a:p>
+        </p:txBody>
+      </p:sp>
+      <p:sp>
+        <p:nvSpPr>
+          <p:cNvPr id="18" name="TextBox 17">
+            <a:extLst>
+              <a:ext uri="{FF2B5EF4-FFF2-40B4-BE49-F238E27FC236}">
+                <a16:creationId xmlns:a16="http://schemas.microsoft.com/office/drawing/2014/main" id="{5C92A7A8-D168-78A8-0468-22472B488F15}"/>
+              </a:ext>
+            </a:extLst>
+          </p:cNvPr>
+          <p:cNvSpPr txBox="1"/>
+          <p:nvPr/>
+        </p:nvSpPr>
+        <p:spPr>
+          <a:xfrm>
+            <a:off x="6991193" y="4017018"/>
+            <a:ext cx="2634952" cy="461665"/>
+          </a:xfrm>
+          <a:prstGeom prst="rect">
+            <a:avLst/>
+          </a:prstGeom>
+          <a:noFill/>
+        </p:spPr>
+        <p:txBody>
+          <a:bodyPr wrap="none" rtlCol="0">
+            <a:spAutoFit/>
+          </a:bodyPr>
+          <a:lstStyle/>
+          <a:p>
+            <a:r>
+              <a:rPr lang="en-US" sz="2400" dirty="0">
+                <a:solidFill>
+                  <a:srgbClr val="92D050"/>
+                </a:solidFill>
+              </a:rPr>
+              <a:t>Perform the action</a:t>
+            </a:r>
+          </a:p>
+        </p:txBody>
+      </p:sp>
+      <p:sp>
+        <p:nvSpPr>
+          <p:cNvPr id="19" name="Right Brace 18">
+            <a:extLst>
+              <a:ext uri="{FF2B5EF4-FFF2-40B4-BE49-F238E27FC236}">
+                <a16:creationId xmlns:a16="http://schemas.microsoft.com/office/drawing/2014/main" id="{E03FDB1A-B893-D180-5535-4A23141FF8BD}"/>
+              </a:ext>
+            </a:extLst>
+          </p:cNvPr>
+          <p:cNvSpPr/>
+          <p:nvPr/>
+        </p:nvSpPr>
+        <p:spPr>
+          <a:xfrm>
+            <a:off x="9982200" y="5078849"/>
+            <a:ext cx="259834" cy="993736"/>
+          </a:xfrm>
+          <a:prstGeom prst="rightBrace">
+            <a:avLst/>
+          </a:prstGeom>
+          <a:ln w="28575">
+            <a:solidFill>
+              <a:srgbClr val="92D050"/>
+            </a:solidFill>
+          </a:ln>
+        </p:spPr>
+        <p:style>
+          <a:lnRef idx="2">
+            <a:schemeClr val="accent1"/>
+          </a:lnRef>
+          <a:fillRef idx="0">
+            <a:schemeClr val="accent1"/>
+          </a:fillRef>
+          <a:effectRef idx="1">
+            <a:schemeClr val="accent1"/>
+          </a:effectRef>
+          <a:fontRef idx="minor">
+            <a:schemeClr val="tx1"/>
+          </a:fontRef>
+        </p:style>
+        <p:txBody>
+          <a:bodyPr rtlCol="0" anchor="ctr"/>
+          <a:lstStyle/>
+          <a:p>
+            <a:pPr algn="ctr"/>
+            <a:endParaRPr lang="en-US"/>
+          </a:p>
+        </p:txBody>
+      </p:sp>
+      <p:sp>
+        <p:nvSpPr>
+          <p:cNvPr id="20" name="TextBox 19">
+            <a:extLst>
+              <a:ext uri="{FF2B5EF4-FFF2-40B4-BE49-F238E27FC236}">
+                <a16:creationId xmlns:a16="http://schemas.microsoft.com/office/drawing/2014/main" id="{9C29111F-44A3-8208-BBF1-A1AC1430F71E}"/>
+              </a:ext>
+            </a:extLst>
+          </p:cNvPr>
+          <p:cNvSpPr txBox="1"/>
+          <p:nvPr/>
+        </p:nvSpPr>
+        <p:spPr>
+          <a:xfrm>
+            <a:off x="10275399" y="5160218"/>
+            <a:ext cx="1984548" cy="830997"/>
+          </a:xfrm>
+          <a:prstGeom prst="rect">
             <a:avLst/>
           </a:prstGeom>
           <a:solidFill>
-            <a:schemeClr val="bg1"/>
+            <a:schemeClr val="tx1"/>
           </a:solidFill>
+        </p:spPr>
+        <p:txBody>
+          <a:bodyPr wrap="square" rtlCol="0">
+            <a:spAutoFit/>
+          </a:bodyPr>
+          <a:lstStyle/>
+          <a:p>
+            <a:r>
+              <a:rPr lang="en-US" sz="2400" dirty="0">
+                <a:solidFill>
+                  <a:srgbClr val="92D050"/>
+                </a:solidFill>
+              </a:rPr>
+              <a:t>Assert expectations</a:t>
+            </a:r>
+          </a:p>
+        </p:txBody>
+      </p:sp>
+      <p:sp>
+        <p:nvSpPr>
+          <p:cNvPr id="21" name="Speech Bubble: Rectangle 20">
+            <a:extLst>
+              <a:ext uri="{FF2B5EF4-FFF2-40B4-BE49-F238E27FC236}">
+                <a16:creationId xmlns:a16="http://schemas.microsoft.com/office/drawing/2014/main" id="{B1896710-B061-E3BE-05BC-A8EAD274D7CE}"/>
+              </a:ext>
+            </a:extLst>
+          </p:cNvPr>
+          <p:cNvSpPr/>
+          <p:nvPr/>
+        </p:nvSpPr>
+        <p:spPr>
+          <a:xfrm>
+            <a:off x="3581401" y="5880970"/>
+            <a:ext cx="2128344" cy="475380"/>
+          </a:xfrm>
+          <a:prstGeom prst="wedgeRectCallout">
+            <a:avLst>
+              <a:gd name="adj1" fmla="val -13364"/>
+              <a:gd name="adj2" fmla="val -84533"/>
+            </a:avLst>
+          </a:prstGeom>
+          <a:solidFill>
+            <a:srgbClr val="F8F7C1"/>
+          </a:solidFill>
+          <a:ln>
+            <a:solidFill>
+              <a:schemeClr val="tx1"/>
+            </a:solidFill>
+          </a:ln>
         </p:spPr>
         <p:style>
           <a:lnRef idx="2">
@@ -10239,146 +13984,821 @@
           <a:bodyPr rtlCol="0" anchor="ctr"/>
           <a:lstStyle/>
           <a:p>
-            <a:pPr algn="ctr"/>
             <a:r>
               <a:rPr lang="en-US" dirty="0">
                 <a:solidFill>
                   <a:schemeClr val="tx1"/>
                 </a:solidFill>
               </a:rPr>
-              <a:t>Vamos al </a:t>
-            </a:r>
-            <a:r>
-              <a:rPr lang="en-US" dirty="0" err="1">
-                <a:solidFill>
-                  <a:schemeClr val="tx1"/>
-                </a:solidFill>
-              </a:rPr>
-              <a:t>repositorio</a:t>
-            </a:r>
-            <a:r>
-              <a:rPr lang="en-US" dirty="0">
-                <a:solidFill>
-                  <a:schemeClr val="tx1"/>
-                </a:solidFill>
-              </a:rPr>
-              <a:t>:        </a:t>
-            </a:r>
-            <a:r>
-              <a:rPr lang="en-US" dirty="0">
-                <a:solidFill>
-                  <a:srgbClr val="4A75CC"/>
-                </a:solidFill>
-                <a:hlinkClick r:id="rId3">
-                  <a:extLst>
-                    <a:ext uri="{A12FA001-AC4F-418D-AE19-62706E023703}">
-                      <ahyp:hlinkClr xmlns:ahyp="http://schemas.microsoft.com/office/drawing/2018/hyperlinkcolor" val="tx"/>
-                    </a:ext>
-                  </a:extLst>
-                </a:hlinkClick>
-              </a:rPr>
-              <a:t>https://github.com/fjzs/testing</a:t>
-            </a:r>
-            <a:r>
-              <a:rPr lang="en-US" dirty="0">
-                <a:solidFill>
-                  <a:srgbClr val="4A75CC"/>
-                </a:solidFill>
-              </a:rPr>
-              <a:t> </a:t>
-            </a:r>
-          </a:p>
-        </p:txBody>
-      </p:sp>
-      <p:pic>
-        <p:nvPicPr>
-          <p:cNvPr id="3077" name="Picture 5" descr="Java Logo and symbol, meaning, history ...">
-            <a:extLst>
-              <a:ext uri="{FF2B5EF4-FFF2-40B4-BE49-F238E27FC236}">
-                <a16:creationId xmlns:a16="http://schemas.microsoft.com/office/drawing/2014/main" id="{4DF16F9B-8FA5-4FE9-14B4-823F877C4709}"/>
-              </a:ext>
-            </a:extLst>
-          </p:cNvPr>
-          <p:cNvPicPr>
-            <a:picLocks noChangeAspect="1" noChangeArrowheads="1"/>
-          </p:cNvPicPr>
+              <a:t>Library for testing</a:t>
+            </a:r>
+          </a:p>
+        </p:txBody>
+      </p:sp>
+    </p:spTree>
+    <p:extLst>
+      <p:ext uri="{BB962C8B-B14F-4D97-AF65-F5344CB8AC3E}">
+        <p14:creationId xmlns:p14="http://schemas.microsoft.com/office/powerpoint/2010/main" val="1860313751"/>
+      </p:ext>
+    </p:extLst>
+  </p:cSld>
+  <p:clrMapOvr>
+    <a:masterClrMapping/>
+  </p:clrMapOvr>
+  <p:timing>
+    <p:tnLst>
+      <p:par>
+        <p:cTn id="1" dur="indefinite" restart="never" nodeType="tmRoot">
+          <p:childTnLst>
+            <p:seq concurrent="1" nextAc="seek">
+              <p:cTn id="2" dur="indefinite" nodeType="mainSeq">
+                <p:childTnLst>
+                  <p:par>
+                    <p:cTn id="3" fill="hold">
+                      <p:stCondLst>
+                        <p:cond delay="indefinite"/>
+                      </p:stCondLst>
+                      <p:childTnLst>
+                        <p:par>
+                          <p:cTn id="4" fill="hold">
+                            <p:stCondLst>
+                              <p:cond delay="0"/>
+                            </p:stCondLst>
+                            <p:childTnLst>
+                              <p:par>
+                                <p:cTn id="5" presetID="1" presetClass="entr" presetSubtype="0" fill="hold" grpId="0" nodeType="clickEffect">
+                                  <p:stCondLst>
+                                    <p:cond delay="0"/>
+                                  </p:stCondLst>
+                                  <p:childTnLst>
+                                    <p:set>
+                                      <p:cBhvr>
+                                        <p:cTn id="6" dur="1" fill="hold">
+                                          <p:stCondLst>
+                                            <p:cond delay="0"/>
+                                          </p:stCondLst>
+                                        </p:cTn>
+                                        <p:tgtEl>
+                                          <p:spTgt spid="12"/>
+                                        </p:tgtEl>
+                                        <p:attrNameLst>
+                                          <p:attrName>style.visibility</p:attrName>
+                                        </p:attrNameLst>
+                                      </p:cBhvr>
+                                      <p:to>
+                                        <p:strVal val="visible"/>
+                                      </p:to>
+                                    </p:set>
+                                  </p:childTnLst>
+                                </p:cTn>
+                              </p:par>
+                              <p:par>
+                                <p:cTn id="7" presetID="1" presetClass="entr" presetSubtype="0" fill="hold" grpId="0" nodeType="withEffect">
+                                  <p:stCondLst>
+                                    <p:cond delay="0"/>
+                                  </p:stCondLst>
+                                  <p:childTnLst>
+                                    <p:set>
+                                      <p:cBhvr>
+                                        <p:cTn id="8" dur="1" fill="hold">
+                                          <p:stCondLst>
+                                            <p:cond delay="0"/>
+                                          </p:stCondLst>
+                                        </p:cTn>
+                                        <p:tgtEl>
+                                          <p:spTgt spid="9"/>
+                                        </p:tgtEl>
+                                        <p:attrNameLst>
+                                          <p:attrName>style.visibility</p:attrName>
+                                        </p:attrNameLst>
+                                      </p:cBhvr>
+                                      <p:to>
+                                        <p:strVal val="visible"/>
+                                      </p:to>
+                                    </p:set>
+                                  </p:childTnLst>
+                                </p:cTn>
+                              </p:par>
+                              <p:par>
+                                <p:cTn id="9" presetID="1" presetClass="entr" presetSubtype="0" fill="hold" grpId="0" nodeType="withEffect">
+                                  <p:stCondLst>
+                                    <p:cond delay="0"/>
+                                  </p:stCondLst>
+                                  <p:childTnLst>
+                                    <p:set>
+                                      <p:cBhvr>
+                                        <p:cTn id="10" dur="1" fill="hold">
+                                          <p:stCondLst>
+                                            <p:cond delay="0"/>
+                                          </p:stCondLst>
+                                        </p:cTn>
+                                        <p:tgtEl>
+                                          <p:spTgt spid="10"/>
+                                        </p:tgtEl>
+                                        <p:attrNameLst>
+                                          <p:attrName>style.visibility</p:attrName>
+                                        </p:attrNameLst>
+                                      </p:cBhvr>
+                                      <p:to>
+                                        <p:strVal val="visible"/>
+                                      </p:to>
+                                    </p:set>
+                                  </p:childTnLst>
+                                </p:cTn>
+                              </p:par>
+                              <p:par>
+                                <p:cTn id="11" presetID="1" presetClass="entr" presetSubtype="0" fill="hold" grpId="0" nodeType="withEffect">
+                                  <p:stCondLst>
+                                    <p:cond delay="0"/>
+                                  </p:stCondLst>
+                                  <p:childTnLst>
+                                    <p:set>
+                                      <p:cBhvr>
+                                        <p:cTn id="12" dur="1" fill="hold">
+                                          <p:stCondLst>
+                                            <p:cond delay="0"/>
+                                          </p:stCondLst>
+                                        </p:cTn>
+                                        <p:tgtEl>
+                                          <p:spTgt spid="13"/>
+                                        </p:tgtEl>
+                                        <p:attrNameLst>
+                                          <p:attrName>style.visibility</p:attrName>
+                                        </p:attrNameLst>
+                                      </p:cBhvr>
+                                      <p:to>
+                                        <p:strVal val="visible"/>
+                                      </p:to>
+                                    </p:set>
+                                  </p:childTnLst>
+                                </p:cTn>
+                              </p:par>
+                              <p:par>
+                                <p:cTn id="13" presetID="1" presetClass="entr" presetSubtype="0" fill="hold" grpId="0" nodeType="withEffect">
+                                  <p:stCondLst>
+                                    <p:cond delay="0"/>
+                                  </p:stCondLst>
+                                  <p:childTnLst>
+                                    <p:set>
+                                      <p:cBhvr>
+                                        <p:cTn id="14" dur="1" fill="hold">
+                                          <p:stCondLst>
+                                            <p:cond delay="0"/>
+                                          </p:stCondLst>
+                                        </p:cTn>
+                                        <p:tgtEl>
+                                          <p:spTgt spid="14"/>
+                                        </p:tgtEl>
+                                        <p:attrNameLst>
+                                          <p:attrName>style.visibility</p:attrName>
+                                        </p:attrNameLst>
+                                      </p:cBhvr>
+                                      <p:to>
+                                        <p:strVal val="visible"/>
+                                      </p:to>
+                                    </p:set>
+                                  </p:childTnLst>
+                                </p:cTn>
+                              </p:par>
+                              <p:par>
+                                <p:cTn id="15" presetID="1" presetClass="entr" presetSubtype="0" fill="hold" grpId="0" nodeType="withEffect">
+                                  <p:stCondLst>
+                                    <p:cond delay="0"/>
+                                  </p:stCondLst>
+                                  <p:childTnLst>
+                                    <p:set>
+                                      <p:cBhvr>
+                                        <p:cTn id="16" dur="1" fill="hold">
+                                          <p:stCondLst>
+                                            <p:cond delay="0"/>
+                                          </p:stCondLst>
+                                        </p:cTn>
+                                        <p:tgtEl>
+                                          <p:spTgt spid="11"/>
+                                        </p:tgtEl>
+                                        <p:attrNameLst>
+                                          <p:attrName>style.visibility</p:attrName>
+                                        </p:attrNameLst>
+                                      </p:cBhvr>
+                                      <p:to>
+                                        <p:strVal val="visible"/>
+                                      </p:to>
+                                    </p:set>
+                                  </p:childTnLst>
+                                </p:cTn>
+                              </p:par>
+                            </p:childTnLst>
+                          </p:cTn>
+                        </p:par>
+                      </p:childTnLst>
+                    </p:cTn>
+                  </p:par>
+                  <p:par>
+                    <p:cTn id="17" fill="hold">
+                      <p:stCondLst>
+                        <p:cond delay="indefinite"/>
+                      </p:stCondLst>
+                      <p:childTnLst>
+                        <p:par>
+                          <p:cTn id="18" fill="hold">
+                            <p:stCondLst>
+                              <p:cond delay="0"/>
+                            </p:stCondLst>
+                            <p:childTnLst>
+                              <p:par>
+                                <p:cTn id="19" presetID="1" presetClass="entr" presetSubtype="0" fill="hold" grpId="0" nodeType="clickEffect">
+                                  <p:stCondLst>
+                                    <p:cond delay="0"/>
+                                  </p:stCondLst>
+                                  <p:childTnLst>
+                                    <p:set>
+                                      <p:cBhvr>
+                                        <p:cTn id="20" dur="1" fill="hold">
+                                          <p:stCondLst>
+                                            <p:cond delay="0"/>
+                                          </p:stCondLst>
+                                        </p:cTn>
+                                        <p:tgtEl>
+                                          <p:spTgt spid="15"/>
+                                        </p:tgtEl>
+                                        <p:attrNameLst>
+                                          <p:attrName>style.visibility</p:attrName>
+                                        </p:attrNameLst>
+                                      </p:cBhvr>
+                                      <p:to>
+                                        <p:strVal val="visible"/>
+                                      </p:to>
+                                    </p:set>
+                                  </p:childTnLst>
+                                </p:cTn>
+                              </p:par>
+                              <p:par>
+                                <p:cTn id="21" presetID="1" presetClass="entr" presetSubtype="0" fill="hold" grpId="0" nodeType="withEffect">
+                                  <p:stCondLst>
+                                    <p:cond delay="0"/>
+                                  </p:stCondLst>
+                                  <p:childTnLst>
+                                    <p:set>
+                                      <p:cBhvr>
+                                        <p:cTn id="22" dur="1" fill="hold">
+                                          <p:stCondLst>
+                                            <p:cond delay="0"/>
+                                          </p:stCondLst>
+                                        </p:cTn>
+                                        <p:tgtEl>
+                                          <p:spTgt spid="16"/>
+                                        </p:tgtEl>
+                                        <p:attrNameLst>
+                                          <p:attrName>style.visibility</p:attrName>
+                                        </p:attrNameLst>
+                                      </p:cBhvr>
+                                      <p:to>
+                                        <p:strVal val="visible"/>
+                                      </p:to>
+                                    </p:set>
+                                  </p:childTnLst>
+                                </p:cTn>
+                              </p:par>
+                              <p:par>
+                                <p:cTn id="23" presetID="1" presetClass="entr" presetSubtype="0" fill="hold" grpId="0" nodeType="withEffect">
+                                  <p:stCondLst>
+                                    <p:cond delay="0"/>
+                                  </p:stCondLst>
+                                  <p:childTnLst>
+                                    <p:set>
+                                      <p:cBhvr>
+                                        <p:cTn id="24" dur="1" fill="hold">
+                                          <p:stCondLst>
+                                            <p:cond delay="0"/>
+                                          </p:stCondLst>
+                                        </p:cTn>
+                                        <p:tgtEl>
+                                          <p:spTgt spid="17"/>
+                                        </p:tgtEl>
+                                        <p:attrNameLst>
+                                          <p:attrName>style.visibility</p:attrName>
+                                        </p:attrNameLst>
+                                      </p:cBhvr>
+                                      <p:to>
+                                        <p:strVal val="visible"/>
+                                      </p:to>
+                                    </p:set>
+                                  </p:childTnLst>
+                                </p:cTn>
+                              </p:par>
+                              <p:par>
+                                <p:cTn id="25" presetID="1" presetClass="entr" presetSubtype="0" fill="hold" grpId="0" nodeType="withEffect">
+                                  <p:stCondLst>
+                                    <p:cond delay="0"/>
+                                  </p:stCondLst>
+                                  <p:childTnLst>
+                                    <p:set>
+                                      <p:cBhvr>
+                                        <p:cTn id="26" dur="1" fill="hold">
+                                          <p:stCondLst>
+                                            <p:cond delay="0"/>
+                                          </p:stCondLst>
+                                        </p:cTn>
+                                        <p:tgtEl>
+                                          <p:spTgt spid="18"/>
+                                        </p:tgtEl>
+                                        <p:attrNameLst>
+                                          <p:attrName>style.visibility</p:attrName>
+                                        </p:attrNameLst>
+                                      </p:cBhvr>
+                                      <p:to>
+                                        <p:strVal val="visible"/>
+                                      </p:to>
+                                    </p:set>
+                                  </p:childTnLst>
+                                </p:cTn>
+                              </p:par>
+                              <p:par>
+                                <p:cTn id="27" presetID="1" presetClass="entr" presetSubtype="0" fill="hold" grpId="0" nodeType="withEffect">
+                                  <p:stCondLst>
+                                    <p:cond delay="0"/>
+                                  </p:stCondLst>
+                                  <p:childTnLst>
+                                    <p:set>
+                                      <p:cBhvr>
+                                        <p:cTn id="28" dur="1" fill="hold">
+                                          <p:stCondLst>
+                                            <p:cond delay="0"/>
+                                          </p:stCondLst>
+                                        </p:cTn>
+                                        <p:tgtEl>
+                                          <p:spTgt spid="19"/>
+                                        </p:tgtEl>
+                                        <p:attrNameLst>
+                                          <p:attrName>style.visibility</p:attrName>
+                                        </p:attrNameLst>
+                                      </p:cBhvr>
+                                      <p:to>
+                                        <p:strVal val="visible"/>
+                                      </p:to>
+                                    </p:set>
+                                  </p:childTnLst>
+                                </p:cTn>
+                              </p:par>
+                              <p:par>
+                                <p:cTn id="29" presetID="1" presetClass="entr" presetSubtype="0" fill="hold" grpId="0" nodeType="withEffect">
+                                  <p:stCondLst>
+                                    <p:cond delay="0"/>
+                                  </p:stCondLst>
+                                  <p:childTnLst>
+                                    <p:set>
+                                      <p:cBhvr>
+                                        <p:cTn id="30" dur="1" fill="hold">
+                                          <p:stCondLst>
+                                            <p:cond delay="0"/>
+                                          </p:stCondLst>
+                                        </p:cTn>
+                                        <p:tgtEl>
+                                          <p:spTgt spid="20"/>
+                                        </p:tgtEl>
+                                        <p:attrNameLst>
+                                          <p:attrName>style.visibility</p:attrName>
+                                        </p:attrNameLst>
+                                      </p:cBhvr>
+                                      <p:to>
+                                        <p:strVal val="visible"/>
+                                      </p:to>
+                                    </p:set>
+                                  </p:childTnLst>
+                                </p:cTn>
+                              </p:par>
+                            </p:childTnLst>
+                          </p:cTn>
+                        </p:par>
+                      </p:childTnLst>
+                    </p:cTn>
+                  </p:par>
+                </p:childTnLst>
+              </p:cTn>
+              <p:prevCondLst>
+                <p:cond evt="onPrev" delay="0">
+                  <p:tgtEl>
+                    <p:sldTgt/>
+                  </p:tgtEl>
+                </p:cond>
+              </p:prevCondLst>
+              <p:nextCondLst>
+                <p:cond evt="onNext" delay="0">
+                  <p:tgtEl>
+                    <p:sldTgt/>
+                  </p:tgtEl>
+                </p:cond>
+              </p:nextCondLst>
+            </p:seq>
+          </p:childTnLst>
+        </p:cTn>
+      </p:par>
+    </p:tnLst>
+    <p:bldLst>
+      <p:bldP spid="9" grpId="0" animBg="1"/>
+      <p:bldP spid="10" grpId="0" animBg="1"/>
+      <p:bldP spid="11" grpId="0" animBg="1"/>
+      <p:bldP spid="12" grpId="0"/>
+      <p:bldP spid="13" grpId="0"/>
+      <p:bldP spid="14" grpId="0"/>
+      <p:bldP spid="15" grpId="0" animBg="1"/>
+      <p:bldP spid="16" grpId="0"/>
+      <p:bldP spid="17" grpId="0" animBg="1"/>
+      <p:bldP spid="18" grpId="0"/>
+      <p:bldP spid="19" grpId="0" animBg="1"/>
+      <p:bldP spid="20" grpId="0" animBg="1"/>
+    </p:bldLst>
+  </p:timing>
+</p:sld>
+</file>
+
+<file path=ppt/slides/slide15.xml><?xml version="1.0" encoding="utf-8"?>
+<p:sld xmlns:a="http://schemas.openxmlformats.org/drawingml/2006/main" xmlns:r="http://schemas.openxmlformats.org/officeDocument/2006/relationships" xmlns:p="http://schemas.openxmlformats.org/presentationml/2006/main">
+  <p:cSld>
+    <p:spTree>
+      <p:nvGrpSpPr>
+        <p:cNvPr id="1" name="">
+          <a:extLst>
+            <a:ext uri="{FF2B5EF4-FFF2-40B4-BE49-F238E27FC236}">
+              <a16:creationId xmlns:a16="http://schemas.microsoft.com/office/drawing/2014/main" id="{2086FA7F-3DB6-299A-ED4C-2E740AD5C8DE}"/>
+            </a:ext>
+          </a:extLst>
+        </p:cNvPr>
+        <p:cNvGrpSpPr/>
+        <p:nvPr/>
+      </p:nvGrpSpPr>
+      <p:grpSpPr>
+        <a:xfrm>
+          <a:off x="0" y="0"/>
+          <a:ext cx="0" cy="0"/>
+          <a:chOff x="0" y="0"/>
+          <a:chExt cx="0" cy="0"/>
+        </a:xfrm>
+      </p:grpSpPr>
+      <p:sp>
+        <p:nvSpPr>
+          <p:cNvPr id="2" name="Title 1">
+            <a:extLst>
+              <a:ext uri="{FF2B5EF4-FFF2-40B4-BE49-F238E27FC236}">
+                <a16:creationId xmlns:a16="http://schemas.microsoft.com/office/drawing/2014/main" id="{D52E1AEB-CB21-157C-82CF-1B322025446B}"/>
+              </a:ext>
+            </a:extLst>
+          </p:cNvPr>
+          <p:cNvSpPr>
+            <a:spLocks noGrp="1"/>
+          </p:cNvSpPr>
+          <p:nvPr>
+            <p:ph type="ctrTitle"/>
+          </p:nvPr>
+        </p:nvSpPr>
+        <p:spPr>
+          <a:xfrm>
+            <a:off x="91440" y="132080"/>
+            <a:ext cx="9144000" cy="573722"/>
+          </a:xfrm>
+        </p:spPr>
+        <p:txBody>
+          <a:bodyPr>
+            <a:normAutofit fontScale="90000"/>
+          </a:bodyPr>
+          <a:lstStyle/>
+          <a:p>
+            <a:pPr algn="l"/>
+            <a:r>
+              <a:rPr lang="en-US" sz="3600" dirty="0"/>
+              <a:t>Your task:</a:t>
+            </a:r>
+          </a:p>
+        </p:txBody>
+      </p:sp>
+      <p:sp>
+        <p:nvSpPr>
+          <p:cNvPr id="4" name="Text Placeholder 1">
+            <a:extLst>
+              <a:ext uri="{FF2B5EF4-FFF2-40B4-BE49-F238E27FC236}">
+                <a16:creationId xmlns:a16="http://schemas.microsoft.com/office/drawing/2014/main" id="{7539B6F2-80A4-7EFA-F091-89D347AAAAB3}"/>
+              </a:ext>
+            </a:extLst>
+          </p:cNvPr>
+          <p:cNvSpPr txBox="1">
+            <a:spLocks/>
+          </p:cNvSpPr>
           <p:nvPr/>
-        </p:nvPicPr>
-        <p:blipFill>
-          <a:blip r:embed="rId4">
-            <a:extLst>
-              <a:ext uri="{28A0092B-C50C-407E-A947-70E740481C1C}">
-                <a14:useLocalDpi xmlns:a14="http://schemas.microsoft.com/office/drawing/2010/main" val="0"/>
-              </a:ext>
-            </a:extLst>
-          </a:blip>
-          <a:srcRect/>
-          <a:stretch>
-            <a:fillRect/>
-          </a:stretch>
-        </p:blipFill>
-        <p:spPr bwMode="auto">
+        </p:nvSpPr>
+        <p:spPr>
           <a:xfrm>
-            <a:off x="10763250" y="799156"/>
-            <a:ext cx="1428750" cy="800100"/>
+            <a:off x="351431" y="1243324"/>
+            <a:ext cx="9747609" cy="3584484"/>
           </a:xfrm>
           <a:prstGeom prst="rect">
             <a:avLst/>
           </a:prstGeom>
-          <a:noFill/>
         </p:spPr>
-      </p:pic>
-      <p:pic>
-        <p:nvPicPr>
-          <p:cNvPr id="3079" name="Picture 7" descr="JUnit · GitHub">
-            <a:extLst>
-              <a:ext uri="{FF2B5EF4-FFF2-40B4-BE49-F238E27FC236}">
-                <a16:creationId xmlns:a16="http://schemas.microsoft.com/office/drawing/2014/main" id="{DC665789-6969-C6D6-67C6-2F6EDD376AE4}"/>
-              </a:ext>
-            </a:extLst>
-          </p:cNvPr>
-          <p:cNvPicPr>
-            <a:picLocks noChangeAspect="1" noChangeArrowheads="1"/>
-          </p:cNvPicPr>
-          <p:nvPr/>
-        </p:nvPicPr>
-        <p:blipFill>
-          <a:blip r:embed="rId5">
-            <a:extLst>
-              <a:ext uri="{28A0092B-C50C-407E-A947-70E740481C1C}">
-                <a14:useLocalDpi xmlns:a14="http://schemas.microsoft.com/office/drawing/2010/main" val="0"/>
-              </a:ext>
-            </a:extLst>
-          </a:blip>
-          <a:srcRect/>
-          <a:stretch>
-            <a:fillRect/>
-          </a:stretch>
-        </p:blipFill>
-        <p:spPr bwMode="auto">
-          <a:xfrm>
-            <a:off x="10861855" y="-147318"/>
-            <a:ext cx="967101" cy="967101"/>
-          </a:xfrm>
-          <a:prstGeom prst="rect">
-            <a:avLst/>
-          </a:prstGeom>
-          <a:noFill/>
-          <a:extLst>
-            <a:ext uri="{909E8E84-426E-40DD-AFC4-6F175D3DCCD1}">
-              <a14:hiddenFill xmlns:a14="http://schemas.microsoft.com/office/drawing/2010/main">
-                <a:solidFill>
-                  <a:srgbClr val="FFFFFF"/>
-                </a:solidFill>
-              </a14:hiddenFill>
-            </a:ext>
-          </a:extLst>
-        </p:spPr>
-      </p:pic>
+        <p:txBody>
+          <a:bodyPr vert="horz" lIns="91440" tIns="45720" rIns="91440" bIns="45720" rtlCol="0" anchor="t">
+            <a:noAutofit/>
+          </a:bodyPr>
+          <a:lstStyle>
+            <a:lvl1pPr marL="0" indent="0" algn="l" defTabSz="914400" rtl="0" eaLnBrk="1" latinLnBrk="0" hangingPunct="1">
+              <a:lnSpc>
+                <a:spcPct val="90000"/>
+              </a:lnSpc>
+              <a:spcBef>
+                <a:spcPts val="1000"/>
+              </a:spcBef>
+              <a:buFont typeface="Arial" panose="020B0604020202020204" pitchFamily="34" charset="0"/>
+              <a:buNone/>
+              <a:defRPr sz="4400" b="1" kern="1200">
+                <a:solidFill>
+                  <a:srgbClr val="36495A"/>
+                </a:solidFill>
+                <a:latin typeface="+mn-lt"/>
+                <a:ea typeface="+mn-ea"/>
+                <a:cs typeface="+mn-cs"/>
+              </a:defRPr>
+            </a:lvl1pPr>
+            <a:lvl2pPr marL="685800" indent="-228600" algn="l" defTabSz="914400" rtl="0" eaLnBrk="1" latinLnBrk="0" hangingPunct="1">
+              <a:lnSpc>
+                <a:spcPct val="90000"/>
+              </a:lnSpc>
+              <a:spcBef>
+                <a:spcPts val="500"/>
+              </a:spcBef>
+              <a:buFont typeface="Arial" panose="020B0604020202020204" pitchFamily="34" charset="0"/>
+              <a:buChar char="•"/>
+              <a:defRPr sz="2400" kern="1200">
+                <a:solidFill>
+                  <a:schemeClr val="tx1"/>
+                </a:solidFill>
+                <a:latin typeface="+mn-lt"/>
+                <a:ea typeface="+mn-ea"/>
+                <a:cs typeface="+mn-cs"/>
+              </a:defRPr>
+            </a:lvl2pPr>
+            <a:lvl3pPr marL="1143000" indent="-228600" algn="l" defTabSz="914400" rtl="0" eaLnBrk="1" latinLnBrk="0" hangingPunct="1">
+              <a:lnSpc>
+                <a:spcPct val="90000"/>
+              </a:lnSpc>
+              <a:spcBef>
+                <a:spcPts val="500"/>
+              </a:spcBef>
+              <a:buFont typeface="Arial" panose="020B0604020202020204" pitchFamily="34" charset="0"/>
+              <a:buChar char="•"/>
+              <a:defRPr sz="2000" kern="1200">
+                <a:solidFill>
+                  <a:schemeClr val="tx1"/>
+                </a:solidFill>
+                <a:latin typeface="+mn-lt"/>
+                <a:ea typeface="+mn-ea"/>
+                <a:cs typeface="+mn-cs"/>
+              </a:defRPr>
+            </a:lvl3pPr>
+            <a:lvl4pPr marL="1600200" indent="-228600" algn="l" defTabSz="914400" rtl="0" eaLnBrk="1" latinLnBrk="0" hangingPunct="1">
+              <a:lnSpc>
+                <a:spcPct val="90000"/>
+              </a:lnSpc>
+              <a:spcBef>
+                <a:spcPts val="500"/>
+              </a:spcBef>
+              <a:buFont typeface="Arial" panose="020B0604020202020204" pitchFamily="34" charset="0"/>
+              <a:buChar char="•"/>
+              <a:defRPr sz="1800" kern="1200">
+                <a:solidFill>
+                  <a:schemeClr val="tx1"/>
+                </a:solidFill>
+                <a:latin typeface="+mn-lt"/>
+                <a:ea typeface="+mn-ea"/>
+                <a:cs typeface="+mn-cs"/>
+              </a:defRPr>
+            </a:lvl4pPr>
+            <a:lvl5pPr marL="2057400" indent="-228600" algn="l" defTabSz="914400" rtl="0" eaLnBrk="1" latinLnBrk="0" hangingPunct="1">
+              <a:lnSpc>
+                <a:spcPct val="90000"/>
+              </a:lnSpc>
+              <a:spcBef>
+                <a:spcPts val="500"/>
+              </a:spcBef>
+              <a:buFont typeface="Arial" panose="020B0604020202020204" pitchFamily="34" charset="0"/>
+              <a:buChar char="•"/>
+              <a:defRPr sz="1800" kern="1200">
+                <a:solidFill>
+                  <a:schemeClr val="tx1"/>
+                </a:solidFill>
+                <a:latin typeface="+mn-lt"/>
+                <a:ea typeface="+mn-ea"/>
+                <a:cs typeface="+mn-cs"/>
+              </a:defRPr>
+            </a:lvl5pPr>
+            <a:lvl6pPr marL="2514600" indent="-228600" algn="l" defTabSz="914400" rtl="0" eaLnBrk="1" latinLnBrk="0" hangingPunct="1">
+              <a:lnSpc>
+                <a:spcPct val="90000"/>
+              </a:lnSpc>
+              <a:spcBef>
+                <a:spcPts val="500"/>
+              </a:spcBef>
+              <a:buFont typeface="Arial" panose="020B0604020202020204" pitchFamily="34" charset="0"/>
+              <a:buChar char="•"/>
+              <a:defRPr sz="1800" kern="1200">
+                <a:solidFill>
+                  <a:schemeClr val="tx1"/>
+                </a:solidFill>
+                <a:latin typeface="+mn-lt"/>
+                <a:ea typeface="+mn-ea"/>
+                <a:cs typeface="+mn-cs"/>
+              </a:defRPr>
+            </a:lvl6pPr>
+            <a:lvl7pPr marL="2971800" indent="-228600" algn="l" defTabSz="914400" rtl="0" eaLnBrk="1" latinLnBrk="0" hangingPunct="1">
+              <a:lnSpc>
+                <a:spcPct val="90000"/>
+              </a:lnSpc>
+              <a:spcBef>
+                <a:spcPts val="500"/>
+              </a:spcBef>
+              <a:buFont typeface="Arial" panose="020B0604020202020204" pitchFamily="34" charset="0"/>
+              <a:buChar char="•"/>
+              <a:defRPr sz="1800" kern="1200">
+                <a:solidFill>
+                  <a:schemeClr val="tx1"/>
+                </a:solidFill>
+                <a:latin typeface="+mn-lt"/>
+                <a:ea typeface="+mn-ea"/>
+                <a:cs typeface="+mn-cs"/>
+              </a:defRPr>
+            </a:lvl7pPr>
+            <a:lvl8pPr marL="3429000" indent="-228600" algn="l" defTabSz="914400" rtl="0" eaLnBrk="1" latinLnBrk="0" hangingPunct="1">
+              <a:lnSpc>
+                <a:spcPct val="90000"/>
+              </a:lnSpc>
+              <a:spcBef>
+                <a:spcPts val="500"/>
+              </a:spcBef>
+              <a:buFont typeface="Arial" panose="020B0604020202020204" pitchFamily="34" charset="0"/>
+              <a:buChar char="•"/>
+              <a:defRPr sz="1800" kern="1200">
+                <a:solidFill>
+                  <a:schemeClr val="tx1"/>
+                </a:solidFill>
+                <a:latin typeface="+mn-lt"/>
+                <a:ea typeface="+mn-ea"/>
+                <a:cs typeface="+mn-cs"/>
+              </a:defRPr>
+            </a:lvl8pPr>
+            <a:lvl9pPr marL="3886200" indent="-228600" algn="l" defTabSz="914400" rtl="0" eaLnBrk="1" latinLnBrk="0" hangingPunct="1">
+              <a:lnSpc>
+                <a:spcPct val="90000"/>
+              </a:lnSpc>
+              <a:spcBef>
+                <a:spcPts val="500"/>
+              </a:spcBef>
+              <a:buFont typeface="Arial" panose="020B0604020202020204" pitchFamily="34" charset="0"/>
+              <a:buChar char="•"/>
+              <a:defRPr sz="1800" kern="1200">
+                <a:solidFill>
+                  <a:schemeClr val="tx1"/>
+                </a:solidFill>
+                <a:latin typeface="+mn-lt"/>
+                <a:ea typeface="+mn-ea"/>
+                <a:cs typeface="+mn-cs"/>
+              </a:defRPr>
+            </a:lvl9pPr>
+          </a:lstStyle>
+          <a:p>
+            <a:pPr marL="342900" indent="-342900">
+              <a:buChar char="•"/>
+            </a:pPr>
+            <a:r>
+              <a:rPr lang="en-US" sz="2000" b="0" dirty="0">
+                <a:solidFill>
+                  <a:schemeClr val="tx1"/>
+                </a:solidFill>
+                <a:latin typeface="AmericanSans"/>
+              </a:rPr>
+              <a:t>Implement the unit tests of the implemented </a:t>
+            </a:r>
+            <a:r>
+              <a:rPr lang="en-US" sz="2000" b="0" dirty="0" err="1">
+                <a:solidFill>
+                  <a:schemeClr val="tx1"/>
+                </a:solidFill>
+                <a:latin typeface="AmericanSans"/>
+              </a:rPr>
+              <a:t>function`divide</a:t>
+            </a:r>
+            <a:r>
+              <a:rPr lang="en-US" sz="2000" b="0" dirty="0">
+                <a:solidFill>
+                  <a:schemeClr val="tx1"/>
+                </a:solidFill>
+                <a:latin typeface="AmericanSans"/>
+              </a:rPr>
+              <a:t>` in the calculator.py script.</a:t>
+            </a:r>
+          </a:p>
+          <a:p>
+            <a:r>
+              <a:rPr lang="en-US" sz="2000" b="0" dirty="0">
+                <a:solidFill>
+                  <a:schemeClr val="tx1"/>
+                </a:solidFill>
+                <a:latin typeface="AmericanSans"/>
+                <a:hlinkClick r:id="rId2"/>
+              </a:rPr>
+              <a:t>https://github.com/sefop/training-testing-python/blob/main/src/calculator.py</a:t>
+            </a:r>
+            <a:endParaRPr lang="en-US" sz="2000" b="0" dirty="0">
+              <a:solidFill>
+                <a:schemeClr val="tx1"/>
+              </a:solidFill>
+              <a:latin typeface="AmericanSans"/>
+            </a:endParaRPr>
+          </a:p>
+          <a:p>
+            <a:endParaRPr lang="en-US" sz="2000" b="0" dirty="0">
+              <a:solidFill>
+                <a:schemeClr val="tx1"/>
+              </a:solidFill>
+              <a:latin typeface="AmericanSans"/>
+            </a:endParaRPr>
+          </a:p>
+          <a:p>
+            <a:endParaRPr lang="en-US" sz="2000" b="0" dirty="0">
+              <a:solidFill>
+                <a:schemeClr val="tx1"/>
+              </a:solidFill>
+              <a:latin typeface="AmericanSans"/>
+            </a:endParaRPr>
+          </a:p>
+          <a:p>
+            <a:pPr marL="342900" indent="-342900">
+              <a:buFont typeface="Arial" panose="020B0604020202020204" pitchFamily="34" charset="0"/>
+              <a:buChar char="•"/>
+            </a:pPr>
+            <a:r>
+              <a:rPr lang="en-US" sz="2000" b="0" dirty="0">
+                <a:solidFill>
+                  <a:schemeClr val="tx1"/>
+                </a:solidFill>
+                <a:latin typeface="AmericanSans"/>
+              </a:rPr>
+              <a:t> Place your unit tests on this test file:</a:t>
+            </a:r>
+          </a:p>
+          <a:p>
+            <a:r>
+              <a:rPr lang="en-US" sz="2000" b="0" dirty="0">
+                <a:solidFill>
+                  <a:schemeClr val="tx1"/>
+                </a:solidFill>
+                <a:latin typeface="AmericanSans"/>
+                <a:hlinkClick r:id="rId3"/>
+              </a:rPr>
+              <a:t>https://github.com/sefop/training-testing-python/blob/main/tests/test_calculator_divide.py</a:t>
+            </a:r>
+            <a:r>
+              <a:rPr lang="en-US" sz="2000" b="0" dirty="0">
+                <a:solidFill>
+                  <a:schemeClr val="tx1"/>
+                </a:solidFill>
+                <a:latin typeface="AmericanSans"/>
+              </a:rPr>
+              <a:t>  </a:t>
+            </a:r>
+          </a:p>
+        </p:txBody>
+      </p:sp>
+      <p:sp>
+        <p:nvSpPr>
+          <p:cNvPr id="5" name="Slide Number Placeholder 4">
+            <a:extLst>
+              <a:ext uri="{FF2B5EF4-FFF2-40B4-BE49-F238E27FC236}">
+                <a16:creationId xmlns:a16="http://schemas.microsoft.com/office/drawing/2014/main" id="{DC231C85-44A5-F533-336E-44508CDF33C4}"/>
+              </a:ext>
+            </a:extLst>
+          </p:cNvPr>
+          <p:cNvSpPr>
+            <a:spLocks noGrp="1"/>
+          </p:cNvSpPr>
+          <p:nvPr>
+            <p:ph type="sldNum" sz="quarter" idx="12"/>
+          </p:nvPr>
+        </p:nvSpPr>
+        <p:spPr/>
+        <p:txBody>
+          <a:bodyPr/>
+          <a:lstStyle/>
+          <a:p>
+            <a:fld id="{F00CFC7C-F3DD-4CCA-A309-41102AB6D153}" type="slidenum">
+              <a:rPr lang="en-US" smtClean="0"/>
+              <a:t>15</a:t>
+            </a:fld>
+            <a:endParaRPr lang="en-US"/>
+          </a:p>
+        </p:txBody>
+      </p:sp>
     </p:spTree>
     <p:extLst>
       <p:ext uri="{BB962C8B-B14F-4D97-AF65-F5344CB8AC3E}">
-        <p14:creationId xmlns:p14="http://schemas.microsoft.com/office/powerpoint/2010/main" val="891241924"/>
+        <p14:creationId xmlns:p14="http://schemas.microsoft.com/office/powerpoint/2010/main" val="1075100624"/>
       </p:ext>
     </p:extLst>
   </p:cSld>
@@ -10693,7 +15113,7 @@
             <a:pPr algn="ctr"/>
             <a:r>
               <a:rPr lang="en-US" dirty="0"/>
-              <a:t>Does my program offer its services correctly?</a:t>
+              <a:t>Does my program provide its services correctly?</a:t>
             </a:r>
           </a:p>
         </p:txBody>
@@ -10769,8 +15189,8 @@
         </p:nvSpPr>
         <p:spPr>
           <a:xfrm>
-            <a:off x="1252922" y="1733788"/>
-            <a:ext cx="3928678" cy="369332"/>
+            <a:off x="1252922" y="1678523"/>
+            <a:ext cx="3928678" cy="461665"/>
           </a:xfrm>
           <a:prstGeom prst="rect">
             <a:avLst/>
@@ -10785,7 +15205,7 @@
           <a:p>
             <a:pPr algn="ctr"/>
             <a:r>
-              <a:rPr lang="en-US" b="1" dirty="0"/>
+              <a:rPr lang="en-US" sz="2400" b="1" dirty="0"/>
               <a:t>Functional</a:t>
             </a:r>
           </a:p>
@@ -10805,8 +15225,8 @@
         </p:nvSpPr>
         <p:spPr>
           <a:xfrm>
-            <a:off x="6424362" y="1733788"/>
-            <a:ext cx="3928678" cy="369332"/>
+            <a:off x="6424362" y="1678523"/>
+            <a:ext cx="3928678" cy="461665"/>
           </a:xfrm>
           <a:prstGeom prst="rect">
             <a:avLst/>
@@ -10821,7 +15241,7 @@
           <a:p>
             <a:pPr algn="ctr"/>
             <a:r>
-              <a:rPr lang="en-US" b="1" dirty="0"/>
+              <a:rPr lang="en-US" sz="2400" b="1" dirty="0"/>
               <a:t>Non-functional</a:t>
             </a:r>
           </a:p>

--- a/exercises/unit-tests/instructions.pptx
+++ b/exercises/unit-tests/instructions.pptx
@@ -5,7 +5,7 @@
     <p:sldMasterId id="2147483648" r:id="rId1"/>
   </p:sldMasterIdLst>
   <p:notesMasterIdLst>
-    <p:notesMasterId r:id="rId17"/>
+    <p:notesMasterId r:id="rId19"/>
   </p:notesMasterIdLst>
   <p:sldIdLst>
     <p:sldId id="256" r:id="rId2"/>
@@ -18,11 +18,13 @@
     <p:sldId id="261" r:id="rId9"/>
     <p:sldId id="267" r:id="rId10"/>
     <p:sldId id="409" r:id="rId11"/>
-    <p:sldId id="410" r:id="rId12"/>
-    <p:sldId id="402" r:id="rId13"/>
-    <p:sldId id="412" r:id="rId14"/>
-    <p:sldId id="411" r:id="rId15"/>
-    <p:sldId id="413" r:id="rId16"/>
+    <p:sldId id="414" r:id="rId12"/>
+    <p:sldId id="410" r:id="rId13"/>
+    <p:sldId id="402" r:id="rId14"/>
+    <p:sldId id="412" r:id="rId15"/>
+    <p:sldId id="411" r:id="rId16"/>
+    <p:sldId id="415" r:id="rId17"/>
+    <p:sldId id="413" r:id="rId18"/>
   </p:sldIdLst>
   <p:sldSz cx="12192000" cy="6858000"/>
   <p:notesSz cx="6858000" cy="9144000"/>
@@ -211,7 +213,7 @@
           <a:p>
             <a:fld id="{F78929D2-0E8B-4573-AA4B-C87D4F90B452}" type="datetimeFigureOut">
               <a:rPr lang="en-US" smtClean="0"/>
-              <a:t>6/21/2026</a:t>
+              <a:t>6/22/2026</a:t>
             </a:fld>
             <a:endParaRPr lang="en-US"/>
           </a:p>
@@ -2380,7 +2382,7 @@
           <a:p>
             <a:fld id="{FA41C955-0A53-4CE8-B014-58EE68AEC52A}" type="slidenum">
               <a:rPr lang="en-US" smtClean="0"/>
-              <a:t>12</a:t>
+              <a:t>13</a:t>
             </a:fld>
             <a:endParaRPr lang="en-US"/>
           </a:p>
@@ -4157,7 +4159,7 @@
           <a:p>
             <a:fld id="{FA41C955-0A53-4CE8-B014-58EE68AEC52A}" type="slidenum">
               <a:rPr lang="en-US" smtClean="0"/>
-              <a:t>13</a:t>
+              <a:t>14</a:t>
             </a:fld>
             <a:endParaRPr lang="en-US"/>
           </a:p>
@@ -5934,7 +5936,7 @@
           <a:p>
             <a:fld id="{FA41C955-0A53-4CE8-B014-58EE68AEC52A}" type="slidenum">
               <a:rPr lang="en-US" smtClean="0"/>
-              <a:t>14</a:t>
+              <a:t>15</a:t>
             </a:fld>
             <a:endParaRPr lang="en-US"/>
           </a:p>
@@ -5944,6 +5946,1783 @@
     <p:extLst>
       <p:ext uri="{BB962C8B-B14F-4D97-AF65-F5344CB8AC3E}">
         <p14:creationId xmlns:p14="http://schemas.microsoft.com/office/powerpoint/2010/main" val="232118320"/>
+      </p:ext>
+    </p:extLst>
+  </p:cSld>
+  <p:clrMapOvr>
+    <a:masterClrMapping/>
+  </p:clrMapOvr>
+</p:notes>
+</file>
+
+<file path=ppt/notesSlides/notesSlide6.xml><?xml version="1.0" encoding="utf-8"?>
+<p:notes xmlns:a="http://schemas.openxmlformats.org/drawingml/2006/main" xmlns:r="http://schemas.openxmlformats.org/officeDocument/2006/relationships" xmlns:p="http://schemas.openxmlformats.org/presentationml/2006/main">
+  <p:cSld>
+    <p:spTree>
+      <p:nvGrpSpPr>
+        <p:cNvPr id="1" name="">
+          <a:extLst>
+            <a:ext uri="{FF2B5EF4-FFF2-40B4-BE49-F238E27FC236}">
+              <a16:creationId xmlns:a16="http://schemas.microsoft.com/office/drawing/2014/main" id="{64E147D5-A839-9DA9-18DE-5239118CDE5E}"/>
+            </a:ext>
+          </a:extLst>
+        </p:cNvPr>
+        <p:cNvGrpSpPr/>
+        <p:nvPr/>
+      </p:nvGrpSpPr>
+      <p:grpSpPr>
+        <a:xfrm>
+          <a:off x="0" y="0"/>
+          <a:ext cx="0" cy="0"/>
+          <a:chOff x="0" y="0"/>
+          <a:chExt cx="0" cy="0"/>
+        </a:xfrm>
+      </p:grpSpPr>
+      <p:sp>
+        <p:nvSpPr>
+          <p:cNvPr id="2" name="Slide Image Placeholder 1">
+            <a:extLst>
+              <a:ext uri="{FF2B5EF4-FFF2-40B4-BE49-F238E27FC236}">
+                <a16:creationId xmlns:a16="http://schemas.microsoft.com/office/drawing/2014/main" id="{F9F159F8-B23F-2504-0EA8-50E106E8D2CF}"/>
+              </a:ext>
+            </a:extLst>
+          </p:cNvPr>
+          <p:cNvSpPr>
+            <a:spLocks noGrp="1" noRot="1" noChangeAspect="1"/>
+          </p:cNvSpPr>
+          <p:nvPr>
+            <p:ph type="sldImg"/>
+          </p:nvPr>
+        </p:nvSpPr>
+        <p:spPr/>
+      </p:sp>
+      <p:sp>
+        <p:nvSpPr>
+          <p:cNvPr id="3" name="Notes Placeholder 2">
+            <a:extLst>
+              <a:ext uri="{FF2B5EF4-FFF2-40B4-BE49-F238E27FC236}">
+                <a16:creationId xmlns:a16="http://schemas.microsoft.com/office/drawing/2014/main" id="{724F84EC-CBAD-6503-68B1-57F49B65807D}"/>
+              </a:ext>
+            </a:extLst>
+          </p:cNvPr>
+          <p:cNvSpPr>
+            <a:spLocks noGrp="1"/>
+          </p:cNvSpPr>
+          <p:nvPr>
+            <p:ph type="body" idx="1"/>
+          </p:nvPr>
+        </p:nvSpPr>
+        <p:spPr/>
+        <p:txBody>
+          <a:bodyPr/>
+          <a:lstStyle/>
+          <a:p>
+            <a:pPr marL="0" marR="0" lvl="0" indent="0" algn="l" defTabSz="914400" rtl="0" eaLnBrk="1" fontAlgn="auto" latinLnBrk="0" hangingPunct="1">
+              <a:lnSpc>
+                <a:spcPct val="100000"/>
+              </a:lnSpc>
+              <a:spcBef>
+                <a:spcPts val="0"/>
+              </a:spcBef>
+              <a:spcAft>
+                <a:spcPts val="0"/>
+              </a:spcAft>
+              <a:buClrTx/>
+              <a:buSzTx/>
+              <a:buFontTx/>
+              <a:buNone/>
+              <a:tabLst/>
+              <a:defRPr/>
+            </a:pPr>
+            <a:r>
+              <a:rPr lang="en-US" sz="1200" kern="1200" dirty="0">
+                <a:solidFill>
+                  <a:schemeClr val="tx1"/>
+                </a:solidFill>
+                <a:effectLst/>
+                <a:latin typeface="+mn-lt"/>
+                <a:ea typeface="+mn-ea"/>
+                <a:cs typeface="+mn-cs"/>
+              </a:rPr>
+              <a:t>import sys</a:t>
+            </a:r>
+            <a:br>
+              <a:rPr lang="en-US" sz="1200" kern="1200" dirty="0">
+                <a:solidFill>
+                  <a:schemeClr val="tx1"/>
+                </a:solidFill>
+                <a:effectLst/>
+                <a:latin typeface="+mn-lt"/>
+                <a:ea typeface="+mn-ea"/>
+                <a:cs typeface="+mn-cs"/>
+              </a:rPr>
+            </a:br>
+            <a:br>
+              <a:rPr lang="en-US" sz="1200" kern="1200" dirty="0">
+                <a:solidFill>
+                  <a:schemeClr val="tx1"/>
+                </a:solidFill>
+                <a:effectLst/>
+                <a:latin typeface="+mn-lt"/>
+                <a:ea typeface="+mn-ea"/>
+                <a:cs typeface="+mn-cs"/>
+              </a:rPr>
+            </a:br>
+            <a:br>
+              <a:rPr lang="en-US" sz="1200" kern="1200" dirty="0">
+                <a:solidFill>
+                  <a:schemeClr val="tx1"/>
+                </a:solidFill>
+                <a:effectLst/>
+                <a:latin typeface="+mn-lt"/>
+                <a:ea typeface="+mn-ea"/>
+                <a:cs typeface="+mn-cs"/>
+              </a:rPr>
+            </a:br>
+            <a:r>
+              <a:rPr lang="en-US" sz="1200" kern="1200" dirty="0">
+                <a:solidFill>
+                  <a:schemeClr val="tx1"/>
+                </a:solidFill>
+                <a:effectLst/>
+                <a:latin typeface="+mn-lt"/>
+                <a:ea typeface="+mn-ea"/>
+                <a:cs typeface="+mn-cs"/>
+              </a:rPr>
+              <a:t>def add(x: int, y: int) -&gt; int:</a:t>
+            </a:r>
+            <a:br>
+              <a:rPr lang="en-US" sz="1200" kern="1200" dirty="0">
+                <a:solidFill>
+                  <a:schemeClr val="tx1"/>
+                </a:solidFill>
+                <a:effectLst/>
+                <a:latin typeface="+mn-lt"/>
+                <a:ea typeface="+mn-ea"/>
+                <a:cs typeface="+mn-cs"/>
+              </a:rPr>
+            </a:br>
+            <a:r>
+              <a:rPr lang="en-US" sz="1200" kern="1200" dirty="0">
+                <a:solidFill>
+                  <a:schemeClr val="tx1"/>
+                </a:solidFill>
+                <a:effectLst/>
+                <a:latin typeface="+mn-lt"/>
+                <a:ea typeface="+mn-ea"/>
+                <a:cs typeface="+mn-cs"/>
+              </a:rPr>
+              <a:t>    </a:t>
+            </a:r>
+            <a:r>
+              <a:rPr lang="en-US" sz="1200" i="1" kern="1200" dirty="0">
+                <a:solidFill>
+                  <a:schemeClr val="tx1"/>
+                </a:solidFill>
+                <a:effectLst/>
+                <a:latin typeface="+mn-lt"/>
+                <a:ea typeface="+mn-ea"/>
+                <a:cs typeface="+mn-cs"/>
+              </a:rPr>
+              <a:t>"""</a:t>
+            </a:r>
+            <a:br>
+              <a:rPr lang="en-US" sz="1200" i="1" kern="1200" dirty="0">
+                <a:solidFill>
+                  <a:schemeClr val="tx1"/>
+                </a:solidFill>
+                <a:effectLst/>
+                <a:latin typeface="+mn-lt"/>
+                <a:ea typeface="+mn-ea"/>
+                <a:cs typeface="+mn-cs"/>
+              </a:rPr>
+            </a:br>
+            <a:r>
+              <a:rPr lang="en-US" sz="1200" i="1" kern="1200" dirty="0">
+                <a:solidFill>
+                  <a:schemeClr val="tx1"/>
+                </a:solidFill>
+                <a:effectLst/>
+                <a:latin typeface="+mn-lt"/>
+                <a:ea typeface="+mn-ea"/>
+                <a:cs typeface="+mn-cs"/>
+              </a:rPr>
+              <a:t>    Add two integers with validation and overflow detection.</a:t>
+            </a:r>
+            <a:br>
+              <a:rPr lang="en-US" sz="1200" i="1" kern="1200" dirty="0">
+                <a:solidFill>
+                  <a:schemeClr val="tx1"/>
+                </a:solidFill>
+                <a:effectLst/>
+                <a:latin typeface="+mn-lt"/>
+                <a:ea typeface="+mn-ea"/>
+                <a:cs typeface="+mn-cs"/>
+              </a:rPr>
+            </a:br>
+            <a:r>
+              <a:rPr lang="en-US" sz="1200" i="1" kern="1200" dirty="0">
+                <a:solidFill>
+                  <a:schemeClr val="tx1"/>
+                </a:solidFill>
+                <a:effectLst/>
+                <a:latin typeface="+mn-lt"/>
+                <a:ea typeface="+mn-ea"/>
+                <a:cs typeface="+mn-cs"/>
+              </a:rPr>
+              <a:t>    - Complies with commutativity: add(</a:t>
+            </a:r>
+            <a:r>
+              <a:rPr lang="en-US" sz="1200" i="1" kern="1200" dirty="0" err="1">
+                <a:solidFill>
+                  <a:schemeClr val="tx1"/>
+                </a:solidFill>
+                <a:effectLst/>
+                <a:latin typeface="+mn-lt"/>
+                <a:ea typeface="+mn-ea"/>
+                <a:cs typeface="+mn-cs"/>
+              </a:rPr>
+              <a:t>x,y</a:t>
+            </a:r>
+            <a:r>
+              <a:rPr lang="en-US" sz="1200" i="1" kern="1200" dirty="0">
+                <a:solidFill>
+                  <a:schemeClr val="tx1"/>
+                </a:solidFill>
+                <a:effectLst/>
+                <a:latin typeface="+mn-lt"/>
+                <a:ea typeface="+mn-ea"/>
+                <a:cs typeface="+mn-cs"/>
+              </a:rPr>
+              <a:t>) = add(</a:t>
+            </a:r>
+            <a:r>
+              <a:rPr lang="en-US" sz="1200" i="1" kern="1200" dirty="0" err="1">
+                <a:solidFill>
+                  <a:schemeClr val="tx1"/>
+                </a:solidFill>
+                <a:effectLst/>
+                <a:latin typeface="+mn-lt"/>
+                <a:ea typeface="+mn-ea"/>
+                <a:cs typeface="+mn-cs"/>
+              </a:rPr>
+              <a:t>y,x</a:t>
+            </a:r>
+            <a:r>
+              <a:rPr lang="en-US" sz="1200" i="1" kern="1200" dirty="0">
+                <a:solidFill>
+                  <a:schemeClr val="tx1"/>
+                </a:solidFill>
+                <a:effectLst/>
+                <a:latin typeface="+mn-lt"/>
+                <a:ea typeface="+mn-ea"/>
+                <a:cs typeface="+mn-cs"/>
+              </a:rPr>
+              <a:t>)</a:t>
+            </a:r>
+            <a:br>
+              <a:rPr lang="en-US" sz="1200" i="1" kern="1200" dirty="0">
+                <a:solidFill>
+                  <a:schemeClr val="tx1"/>
+                </a:solidFill>
+                <a:effectLst/>
+                <a:latin typeface="+mn-lt"/>
+                <a:ea typeface="+mn-ea"/>
+                <a:cs typeface="+mn-cs"/>
+              </a:rPr>
+            </a:br>
+            <a:r>
+              <a:rPr lang="en-US" sz="1200" i="1" kern="1200" dirty="0">
+                <a:solidFill>
+                  <a:schemeClr val="tx1"/>
+                </a:solidFill>
+                <a:effectLst/>
+                <a:latin typeface="+mn-lt"/>
+                <a:ea typeface="+mn-ea"/>
+                <a:cs typeface="+mn-cs"/>
+              </a:rPr>
+              <a:t>    - Complies with identity: add(x,0) = add(0,x)</a:t>
+            </a:r>
+            <a:br>
+              <a:rPr lang="en-US" sz="1200" i="1" kern="1200" dirty="0">
+                <a:solidFill>
+                  <a:schemeClr val="tx1"/>
+                </a:solidFill>
+                <a:effectLst/>
+                <a:latin typeface="+mn-lt"/>
+                <a:ea typeface="+mn-ea"/>
+                <a:cs typeface="+mn-cs"/>
+              </a:rPr>
+            </a:br>
+            <a:br>
+              <a:rPr lang="en-US" sz="1200" i="1" kern="1200" dirty="0">
+                <a:solidFill>
+                  <a:schemeClr val="tx1"/>
+                </a:solidFill>
+                <a:effectLst/>
+                <a:latin typeface="+mn-lt"/>
+                <a:ea typeface="+mn-ea"/>
+                <a:cs typeface="+mn-cs"/>
+              </a:rPr>
+            </a:br>
+            <a:r>
+              <a:rPr lang="en-US" sz="1200" i="1" kern="1200" dirty="0">
+                <a:solidFill>
+                  <a:schemeClr val="tx1"/>
+                </a:solidFill>
+                <a:effectLst/>
+                <a:latin typeface="+mn-lt"/>
+                <a:ea typeface="+mn-ea"/>
+                <a:cs typeface="+mn-cs"/>
+              </a:rPr>
+              <a:t>    :param x: First integer to add</a:t>
+            </a:r>
+            <a:br>
+              <a:rPr lang="en-US" sz="1200" i="1" kern="1200" dirty="0">
+                <a:solidFill>
+                  <a:schemeClr val="tx1"/>
+                </a:solidFill>
+                <a:effectLst/>
+                <a:latin typeface="+mn-lt"/>
+                <a:ea typeface="+mn-ea"/>
+                <a:cs typeface="+mn-cs"/>
+              </a:rPr>
+            </a:br>
+            <a:r>
+              <a:rPr lang="en-US" sz="1200" i="1" kern="1200" dirty="0">
+                <a:solidFill>
+                  <a:schemeClr val="tx1"/>
+                </a:solidFill>
+                <a:effectLst/>
+                <a:latin typeface="+mn-lt"/>
+                <a:ea typeface="+mn-ea"/>
+                <a:cs typeface="+mn-cs"/>
+              </a:rPr>
+              <a:t>    :param y: Second integer to add</a:t>
+            </a:r>
+            <a:br>
+              <a:rPr lang="en-US" sz="1200" i="1" kern="1200" dirty="0">
+                <a:solidFill>
+                  <a:schemeClr val="tx1"/>
+                </a:solidFill>
+                <a:effectLst/>
+                <a:latin typeface="+mn-lt"/>
+                <a:ea typeface="+mn-ea"/>
+                <a:cs typeface="+mn-cs"/>
+              </a:rPr>
+            </a:br>
+            <a:r>
+              <a:rPr lang="en-US" sz="1200" i="1" kern="1200" dirty="0">
+                <a:solidFill>
+                  <a:schemeClr val="tx1"/>
+                </a:solidFill>
+                <a:effectLst/>
+                <a:latin typeface="+mn-lt"/>
+                <a:ea typeface="+mn-ea"/>
+                <a:cs typeface="+mn-cs"/>
+              </a:rPr>
+              <a:t>    :return: x + y</a:t>
+            </a:r>
+            <a:br>
+              <a:rPr lang="en-US" sz="1200" i="1" kern="1200" dirty="0">
+                <a:solidFill>
+                  <a:schemeClr val="tx1"/>
+                </a:solidFill>
+                <a:effectLst/>
+                <a:latin typeface="+mn-lt"/>
+                <a:ea typeface="+mn-ea"/>
+                <a:cs typeface="+mn-cs"/>
+              </a:rPr>
+            </a:br>
+            <a:r>
+              <a:rPr lang="en-US" sz="1200" i="1" kern="1200" dirty="0">
+                <a:solidFill>
+                  <a:schemeClr val="tx1"/>
+                </a:solidFill>
+                <a:effectLst/>
+                <a:latin typeface="+mn-lt"/>
+                <a:ea typeface="+mn-ea"/>
+                <a:cs typeface="+mn-cs"/>
+              </a:rPr>
+              <a:t>    :raises </a:t>
+            </a:r>
+            <a:r>
+              <a:rPr lang="en-US" sz="1200" i="1" kern="1200" dirty="0" err="1">
+                <a:solidFill>
+                  <a:schemeClr val="tx1"/>
+                </a:solidFill>
+                <a:effectLst/>
+                <a:latin typeface="+mn-lt"/>
+                <a:ea typeface="+mn-ea"/>
+                <a:cs typeface="+mn-cs"/>
+              </a:rPr>
+              <a:t>TypeError</a:t>
+            </a:r>
+            <a:r>
+              <a:rPr lang="en-US" sz="1200" i="1" kern="1200" dirty="0">
+                <a:solidFill>
+                  <a:schemeClr val="tx1"/>
+                </a:solidFill>
+                <a:effectLst/>
+                <a:latin typeface="+mn-lt"/>
+                <a:ea typeface="+mn-ea"/>
+                <a:cs typeface="+mn-cs"/>
+              </a:rPr>
+              <a:t>: If either x or y is not an integer</a:t>
+            </a:r>
+            <a:br>
+              <a:rPr lang="en-US" sz="1200" i="1" kern="1200" dirty="0">
+                <a:solidFill>
+                  <a:schemeClr val="tx1"/>
+                </a:solidFill>
+                <a:effectLst/>
+                <a:latin typeface="+mn-lt"/>
+                <a:ea typeface="+mn-ea"/>
+                <a:cs typeface="+mn-cs"/>
+              </a:rPr>
+            </a:br>
+            <a:r>
+              <a:rPr lang="en-US" sz="1200" i="1" kern="1200" dirty="0">
+                <a:solidFill>
+                  <a:schemeClr val="tx1"/>
+                </a:solidFill>
+                <a:effectLst/>
+                <a:latin typeface="+mn-lt"/>
+                <a:ea typeface="+mn-ea"/>
+                <a:cs typeface="+mn-cs"/>
+              </a:rPr>
+              <a:t>    :raises </a:t>
+            </a:r>
+            <a:r>
+              <a:rPr lang="en-US" sz="1200" i="1" kern="1200" dirty="0" err="1">
+                <a:solidFill>
+                  <a:schemeClr val="tx1"/>
+                </a:solidFill>
+                <a:effectLst/>
+                <a:latin typeface="+mn-lt"/>
+                <a:ea typeface="+mn-ea"/>
+                <a:cs typeface="+mn-cs"/>
+              </a:rPr>
+              <a:t>OverflowError</a:t>
+            </a:r>
+            <a:r>
+              <a:rPr lang="en-US" sz="1200" i="1" kern="1200" dirty="0">
+                <a:solidFill>
+                  <a:schemeClr val="tx1"/>
+                </a:solidFill>
+                <a:effectLst/>
+                <a:latin typeface="+mn-lt"/>
+                <a:ea typeface="+mn-ea"/>
+                <a:cs typeface="+mn-cs"/>
+              </a:rPr>
+              <a:t>: If the sum exceeds the maximum</a:t>
+            </a:r>
+            <a:br>
+              <a:rPr lang="en-US" sz="1200" i="1" kern="1200" dirty="0">
+                <a:solidFill>
+                  <a:schemeClr val="tx1"/>
+                </a:solidFill>
+                <a:effectLst/>
+                <a:latin typeface="+mn-lt"/>
+                <a:ea typeface="+mn-ea"/>
+                <a:cs typeface="+mn-cs"/>
+              </a:rPr>
+            </a:br>
+            <a:r>
+              <a:rPr lang="en-US" sz="1200" i="1" kern="1200" dirty="0">
+                <a:solidFill>
+                  <a:schemeClr val="tx1"/>
+                </a:solidFill>
+                <a:effectLst/>
+                <a:latin typeface="+mn-lt"/>
+                <a:ea typeface="+mn-ea"/>
+                <a:cs typeface="+mn-cs"/>
+              </a:rPr>
+              <a:t>    representable integer</a:t>
+            </a:r>
+            <a:br>
+              <a:rPr lang="en-US" sz="1200" i="1" kern="1200" dirty="0">
+                <a:solidFill>
+                  <a:schemeClr val="tx1"/>
+                </a:solidFill>
+                <a:effectLst/>
+                <a:latin typeface="+mn-lt"/>
+                <a:ea typeface="+mn-ea"/>
+                <a:cs typeface="+mn-cs"/>
+              </a:rPr>
+            </a:br>
+            <a:r>
+              <a:rPr lang="en-US" sz="1200" i="1" kern="1200" dirty="0">
+                <a:solidFill>
+                  <a:schemeClr val="tx1"/>
+                </a:solidFill>
+                <a:effectLst/>
+                <a:latin typeface="+mn-lt"/>
+                <a:ea typeface="+mn-ea"/>
+                <a:cs typeface="+mn-cs"/>
+              </a:rPr>
+              <a:t>    """</a:t>
+            </a:r>
+            <a:br>
+              <a:rPr lang="en-US" sz="1200" i="1" kern="1200" dirty="0">
+                <a:solidFill>
+                  <a:schemeClr val="tx1"/>
+                </a:solidFill>
+                <a:effectLst/>
+                <a:latin typeface="+mn-lt"/>
+                <a:ea typeface="+mn-ea"/>
+                <a:cs typeface="+mn-cs"/>
+              </a:rPr>
+            </a:br>
+            <a:r>
+              <a:rPr lang="en-US" sz="1200" i="1" kern="1200" dirty="0">
+                <a:solidFill>
+                  <a:schemeClr val="tx1"/>
+                </a:solidFill>
+                <a:effectLst/>
+                <a:latin typeface="+mn-lt"/>
+                <a:ea typeface="+mn-ea"/>
+                <a:cs typeface="+mn-cs"/>
+              </a:rPr>
+              <a:t>    </a:t>
+            </a:r>
+            <a:r>
+              <a:rPr lang="en-US" sz="1200" kern="1200" dirty="0">
+                <a:solidFill>
+                  <a:schemeClr val="tx1"/>
+                </a:solidFill>
+                <a:effectLst/>
+                <a:latin typeface="+mn-lt"/>
+                <a:ea typeface="+mn-ea"/>
+                <a:cs typeface="+mn-cs"/>
+              </a:rPr>
+              <a:t># Input validation</a:t>
+            </a:r>
+            <a:br>
+              <a:rPr lang="en-US" sz="1200" kern="1200" dirty="0">
+                <a:solidFill>
+                  <a:schemeClr val="tx1"/>
+                </a:solidFill>
+                <a:effectLst/>
+                <a:latin typeface="+mn-lt"/>
+                <a:ea typeface="+mn-ea"/>
+                <a:cs typeface="+mn-cs"/>
+              </a:rPr>
+            </a:br>
+            <a:r>
+              <a:rPr lang="en-US" sz="1200" kern="1200" dirty="0">
+                <a:solidFill>
+                  <a:schemeClr val="tx1"/>
+                </a:solidFill>
+                <a:effectLst/>
+                <a:latin typeface="+mn-lt"/>
+                <a:ea typeface="+mn-ea"/>
+                <a:cs typeface="+mn-cs"/>
+              </a:rPr>
+              <a:t>    if not </a:t>
+            </a:r>
+            <a:r>
+              <a:rPr lang="en-US" sz="1200" kern="1200" dirty="0" err="1">
+                <a:solidFill>
+                  <a:schemeClr val="tx1"/>
+                </a:solidFill>
+                <a:effectLst/>
+                <a:latin typeface="+mn-lt"/>
+                <a:ea typeface="+mn-ea"/>
+                <a:cs typeface="+mn-cs"/>
+              </a:rPr>
+              <a:t>isinstance</a:t>
+            </a:r>
+            <a:r>
+              <a:rPr lang="en-US" sz="1200" kern="1200" dirty="0">
+                <a:solidFill>
+                  <a:schemeClr val="tx1"/>
+                </a:solidFill>
+                <a:effectLst/>
+                <a:latin typeface="+mn-lt"/>
+                <a:ea typeface="+mn-ea"/>
+                <a:cs typeface="+mn-cs"/>
+              </a:rPr>
+              <a:t>(x, int) or </a:t>
+            </a:r>
+            <a:r>
+              <a:rPr lang="en-US" sz="1200" kern="1200" dirty="0" err="1">
+                <a:solidFill>
+                  <a:schemeClr val="tx1"/>
+                </a:solidFill>
+                <a:effectLst/>
+                <a:latin typeface="+mn-lt"/>
+                <a:ea typeface="+mn-ea"/>
+                <a:cs typeface="+mn-cs"/>
+              </a:rPr>
+              <a:t>isinstance</a:t>
+            </a:r>
+            <a:r>
+              <a:rPr lang="en-US" sz="1200" kern="1200" dirty="0">
+                <a:solidFill>
+                  <a:schemeClr val="tx1"/>
+                </a:solidFill>
+                <a:effectLst/>
+                <a:latin typeface="+mn-lt"/>
+                <a:ea typeface="+mn-ea"/>
+                <a:cs typeface="+mn-cs"/>
+              </a:rPr>
+              <a:t>(x, bool):</a:t>
+            </a:r>
+            <a:br>
+              <a:rPr lang="en-US" sz="1200" kern="1200" dirty="0">
+                <a:solidFill>
+                  <a:schemeClr val="tx1"/>
+                </a:solidFill>
+                <a:effectLst/>
+                <a:latin typeface="+mn-lt"/>
+                <a:ea typeface="+mn-ea"/>
+                <a:cs typeface="+mn-cs"/>
+              </a:rPr>
+            </a:br>
+            <a:r>
+              <a:rPr lang="en-US" sz="1200" kern="1200" dirty="0">
+                <a:solidFill>
+                  <a:schemeClr val="tx1"/>
+                </a:solidFill>
+                <a:effectLst/>
+                <a:latin typeface="+mn-lt"/>
+                <a:ea typeface="+mn-ea"/>
+                <a:cs typeface="+mn-cs"/>
+              </a:rPr>
+              <a:t>        raise </a:t>
+            </a:r>
+            <a:r>
+              <a:rPr lang="en-US" sz="1200" kern="1200" dirty="0" err="1">
+                <a:solidFill>
+                  <a:schemeClr val="tx1"/>
+                </a:solidFill>
+                <a:effectLst/>
+                <a:latin typeface="+mn-lt"/>
+                <a:ea typeface="+mn-ea"/>
+                <a:cs typeface="+mn-cs"/>
+              </a:rPr>
+              <a:t>TypeError</a:t>
+            </a:r>
+            <a:r>
+              <a:rPr lang="en-US" sz="1200" kern="1200" dirty="0">
+                <a:solidFill>
+                  <a:schemeClr val="tx1"/>
+                </a:solidFill>
+                <a:effectLst/>
+                <a:latin typeface="+mn-lt"/>
+                <a:ea typeface="+mn-ea"/>
+                <a:cs typeface="+mn-cs"/>
+              </a:rPr>
+              <a:t>("x is not an integer")</a:t>
+            </a:r>
+            <a:br>
+              <a:rPr lang="en-US" sz="1200" kern="1200" dirty="0">
+                <a:solidFill>
+                  <a:schemeClr val="tx1"/>
+                </a:solidFill>
+                <a:effectLst/>
+                <a:latin typeface="+mn-lt"/>
+                <a:ea typeface="+mn-ea"/>
+                <a:cs typeface="+mn-cs"/>
+              </a:rPr>
+            </a:br>
+            <a:r>
+              <a:rPr lang="en-US" sz="1200" kern="1200" dirty="0">
+                <a:solidFill>
+                  <a:schemeClr val="tx1"/>
+                </a:solidFill>
+                <a:effectLst/>
+                <a:latin typeface="+mn-lt"/>
+                <a:ea typeface="+mn-ea"/>
+                <a:cs typeface="+mn-cs"/>
+              </a:rPr>
+              <a:t>    if not </a:t>
+            </a:r>
+            <a:r>
+              <a:rPr lang="en-US" sz="1200" kern="1200" dirty="0" err="1">
+                <a:solidFill>
+                  <a:schemeClr val="tx1"/>
+                </a:solidFill>
+                <a:effectLst/>
+                <a:latin typeface="+mn-lt"/>
+                <a:ea typeface="+mn-ea"/>
+                <a:cs typeface="+mn-cs"/>
+              </a:rPr>
+              <a:t>isinstance</a:t>
+            </a:r>
+            <a:r>
+              <a:rPr lang="en-US" sz="1200" kern="1200" dirty="0">
+                <a:solidFill>
+                  <a:schemeClr val="tx1"/>
+                </a:solidFill>
+                <a:effectLst/>
+                <a:latin typeface="+mn-lt"/>
+                <a:ea typeface="+mn-ea"/>
+                <a:cs typeface="+mn-cs"/>
+              </a:rPr>
+              <a:t>(y, int) or </a:t>
+            </a:r>
+            <a:r>
+              <a:rPr lang="en-US" sz="1200" kern="1200" dirty="0" err="1">
+                <a:solidFill>
+                  <a:schemeClr val="tx1"/>
+                </a:solidFill>
+                <a:effectLst/>
+                <a:latin typeface="+mn-lt"/>
+                <a:ea typeface="+mn-ea"/>
+                <a:cs typeface="+mn-cs"/>
+              </a:rPr>
+              <a:t>isinstance</a:t>
+            </a:r>
+            <a:r>
+              <a:rPr lang="en-US" sz="1200" kern="1200" dirty="0">
+                <a:solidFill>
+                  <a:schemeClr val="tx1"/>
+                </a:solidFill>
+                <a:effectLst/>
+                <a:latin typeface="+mn-lt"/>
+                <a:ea typeface="+mn-ea"/>
+                <a:cs typeface="+mn-cs"/>
+              </a:rPr>
+              <a:t>(y, bool):</a:t>
+            </a:r>
+            <a:br>
+              <a:rPr lang="en-US" sz="1200" kern="1200" dirty="0">
+                <a:solidFill>
+                  <a:schemeClr val="tx1"/>
+                </a:solidFill>
+                <a:effectLst/>
+                <a:latin typeface="+mn-lt"/>
+                <a:ea typeface="+mn-ea"/>
+                <a:cs typeface="+mn-cs"/>
+              </a:rPr>
+            </a:br>
+            <a:r>
+              <a:rPr lang="en-US" sz="1200" kern="1200" dirty="0">
+                <a:solidFill>
+                  <a:schemeClr val="tx1"/>
+                </a:solidFill>
+                <a:effectLst/>
+                <a:latin typeface="+mn-lt"/>
+                <a:ea typeface="+mn-ea"/>
+                <a:cs typeface="+mn-cs"/>
+              </a:rPr>
+              <a:t>        raise </a:t>
+            </a:r>
+            <a:r>
+              <a:rPr lang="en-US" sz="1200" kern="1200" dirty="0" err="1">
+                <a:solidFill>
+                  <a:schemeClr val="tx1"/>
+                </a:solidFill>
+                <a:effectLst/>
+                <a:latin typeface="+mn-lt"/>
+                <a:ea typeface="+mn-ea"/>
+                <a:cs typeface="+mn-cs"/>
+              </a:rPr>
+              <a:t>TypeError</a:t>
+            </a:r>
+            <a:r>
+              <a:rPr lang="en-US" sz="1200" kern="1200" dirty="0">
+                <a:solidFill>
+                  <a:schemeClr val="tx1"/>
+                </a:solidFill>
+                <a:effectLst/>
+                <a:latin typeface="+mn-lt"/>
+                <a:ea typeface="+mn-ea"/>
+                <a:cs typeface="+mn-cs"/>
+              </a:rPr>
+              <a:t>("y is not an integer")</a:t>
+            </a:r>
+            <a:br>
+              <a:rPr lang="en-US" sz="1200" kern="1200" dirty="0">
+                <a:solidFill>
+                  <a:schemeClr val="tx1"/>
+                </a:solidFill>
+                <a:effectLst/>
+                <a:latin typeface="+mn-lt"/>
+                <a:ea typeface="+mn-ea"/>
+                <a:cs typeface="+mn-cs"/>
+              </a:rPr>
+            </a:br>
+            <a:br>
+              <a:rPr lang="en-US" sz="1200" kern="1200" dirty="0">
+                <a:solidFill>
+                  <a:schemeClr val="tx1"/>
+                </a:solidFill>
+                <a:effectLst/>
+                <a:latin typeface="+mn-lt"/>
+                <a:ea typeface="+mn-ea"/>
+                <a:cs typeface="+mn-cs"/>
+              </a:rPr>
+            </a:br>
+            <a:r>
+              <a:rPr lang="en-US" sz="1200" kern="1200" dirty="0">
+                <a:solidFill>
+                  <a:schemeClr val="tx1"/>
+                </a:solidFill>
+                <a:effectLst/>
+                <a:latin typeface="+mn-lt"/>
+                <a:ea typeface="+mn-ea"/>
+                <a:cs typeface="+mn-cs"/>
+              </a:rPr>
+              <a:t>    # Compute the sum</a:t>
+            </a:r>
+            <a:br>
+              <a:rPr lang="en-US" sz="1200" kern="1200" dirty="0">
+                <a:solidFill>
+                  <a:schemeClr val="tx1"/>
+                </a:solidFill>
+                <a:effectLst/>
+                <a:latin typeface="+mn-lt"/>
+                <a:ea typeface="+mn-ea"/>
+                <a:cs typeface="+mn-cs"/>
+              </a:rPr>
+            </a:br>
+            <a:r>
+              <a:rPr lang="en-US" sz="1200" kern="1200" dirty="0">
+                <a:solidFill>
+                  <a:schemeClr val="tx1"/>
+                </a:solidFill>
+                <a:effectLst/>
+                <a:latin typeface="+mn-lt"/>
+                <a:ea typeface="+mn-ea"/>
+                <a:cs typeface="+mn-cs"/>
+              </a:rPr>
+              <a:t>    result = x + y</a:t>
+            </a:r>
+            <a:br>
+              <a:rPr lang="en-US" sz="1200" kern="1200" dirty="0">
+                <a:solidFill>
+                  <a:schemeClr val="tx1"/>
+                </a:solidFill>
+                <a:effectLst/>
+                <a:latin typeface="+mn-lt"/>
+                <a:ea typeface="+mn-ea"/>
+                <a:cs typeface="+mn-cs"/>
+              </a:rPr>
+            </a:br>
+            <a:br>
+              <a:rPr lang="en-US" sz="1200" kern="1200" dirty="0">
+                <a:solidFill>
+                  <a:schemeClr val="tx1"/>
+                </a:solidFill>
+                <a:effectLst/>
+                <a:latin typeface="+mn-lt"/>
+                <a:ea typeface="+mn-ea"/>
+                <a:cs typeface="+mn-cs"/>
+              </a:rPr>
+            </a:br>
+            <a:r>
+              <a:rPr lang="en-US" sz="1200" kern="1200" dirty="0">
+                <a:solidFill>
+                  <a:schemeClr val="tx1"/>
+                </a:solidFill>
+                <a:effectLst/>
+                <a:latin typeface="+mn-lt"/>
+                <a:ea typeface="+mn-ea"/>
+                <a:cs typeface="+mn-cs"/>
+              </a:rPr>
+              <a:t>    # Check for overflow</a:t>
+            </a:r>
+            <a:br>
+              <a:rPr lang="en-US" sz="1200" kern="1200" dirty="0">
+                <a:solidFill>
+                  <a:schemeClr val="tx1"/>
+                </a:solidFill>
+                <a:effectLst/>
+                <a:latin typeface="+mn-lt"/>
+                <a:ea typeface="+mn-ea"/>
+                <a:cs typeface="+mn-cs"/>
+              </a:rPr>
+            </a:br>
+            <a:r>
+              <a:rPr lang="en-US" sz="1200" kern="1200" dirty="0">
+                <a:solidFill>
+                  <a:schemeClr val="tx1"/>
+                </a:solidFill>
+                <a:effectLst/>
+                <a:latin typeface="+mn-lt"/>
+                <a:ea typeface="+mn-ea"/>
+                <a:cs typeface="+mn-cs"/>
+              </a:rPr>
+              <a:t>    if result &gt; </a:t>
+            </a:r>
+            <a:r>
+              <a:rPr lang="en-US" sz="1200" kern="1200" dirty="0" err="1">
+                <a:solidFill>
+                  <a:schemeClr val="tx1"/>
+                </a:solidFill>
+                <a:effectLst/>
+                <a:latin typeface="+mn-lt"/>
+                <a:ea typeface="+mn-ea"/>
+                <a:cs typeface="+mn-cs"/>
+              </a:rPr>
+              <a:t>sys.maxsize</a:t>
+            </a:r>
+            <a:r>
+              <a:rPr lang="en-US" sz="1200" kern="1200" dirty="0">
+                <a:solidFill>
+                  <a:schemeClr val="tx1"/>
+                </a:solidFill>
+                <a:effectLst/>
+                <a:latin typeface="+mn-lt"/>
+                <a:ea typeface="+mn-ea"/>
+                <a:cs typeface="+mn-cs"/>
+              </a:rPr>
+              <a:t> or result &lt; -</a:t>
+            </a:r>
+            <a:r>
+              <a:rPr lang="en-US" sz="1200" kern="1200" dirty="0" err="1">
+                <a:solidFill>
+                  <a:schemeClr val="tx1"/>
+                </a:solidFill>
+                <a:effectLst/>
+                <a:latin typeface="+mn-lt"/>
+                <a:ea typeface="+mn-ea"/>
+                <a:cs typeface="+mn-cs"/>
+              </a:rPr>
+              <a:t>sys.maxsize</a:t>
+            </a:r>
+            <a:r>
+              <a:rPr lang="en-US" sz="1200" kern="1200" dirty="0">
+                <a:solidFill>
+                  <a:schemeClr val="tx1"/>
+                </a:solidFill>
+                <a:effectLst/>
+                <a:latin typeface="+mn-lt"/>
+                <a:ea typeface="+mn-ea"/>
+                <a:cs typeface="+mn-cs"/>
+              </a:rPr>
+              <a:t> - 1:</a:t>
+            </a:r>
+            <a:br>
+              <a:rPr lang="en-US" sz="1200" kern="1200" dirty="0">
+                <a:solidFill>
+                  <a:schemeClr val="tx1"/>
+                </a:solidFill>
+                <a:effectLst/>
+                <a:latin typeface="+mn-lt"/>
+                <a:ea typeface="+mn-ea"/>
+                <a:cs typeface="+mn-cs"/>
+              </a:rPr>
+            </a:br>
+            <a:r>
+              <a:rPr lang="en-US" sz="1200" kern="1200" dirty="0">
+                <a:solidFill>
+                  <a:schemeClr val="tx1"/>
+                </a:solidFill>
+                <a:effectLst/>
+                <a:latin typeface="+mn-lt"/>
+                <a:ea typeface="+mn-ea"/>
+                <a:cs typeface="+mn-cs"/>
+              </a:rPr>
+              <a:t>        raise </a:t>
+            </a:r>
+            <a:r>
+              <a:rPr lang="en-US" sz="1200" kern="1200" dirty="0" err="1">
+                <a:solidFill>
+                  <a:schemeClr val="tx1"/>
+                </a:solidFill>
+                <a:effectLst/>
+                <a:latin typeface="+mn-lt"/>
+                <a:ea typeface="+mn-ea"/>
+                <a:cs typeface="+mn-cs"/>
+              </a:rPr>
+              <a:t>OverflowError</a:t>
+            </a:r>
+            <a:r>
+              <a:rPr lang="en-US" sz="1200" kern="1200" dirty="0">
+                <a:solidFill>
+                  <a:schemeClr val="tx1"/>
+                </a:solidFill>
+                <a:effectLst/>
+                <a:latin typeface="+mn-lt"/>
+                <a:ea typeface="+mn-ea"/>
+                <a:cs typeface="+mn-cs"/>
+              </a:rPr>
+              <a:t>("Integer overflow")</a:t>
+            </a:r>
+            <a:br>
+              <a:rPr lang="en-US" sz="1200" kern="1200" dirty="0">
+                <a:solidFill>
+                  <a:schemeClr val="tx1"/>
+                </a:solidFill>
+                <a:effectLst/>
+                <a:latin typeface="+mn-lt"/>
+                <a:ea typeface="+mn-ea"/>
+                <a:cs typeface="+mn-cs"/>
+              </a:rPr>
+            </a:br>
+            <a:br>
+              <a:rPr lang="en-US" sz="1200" kern="1200" dirty="0">
+                <a:solidFill>
+                  <a:schemeClr val="tx1"/>
+                </a:solidFill>
+                <a:effectLst/>
+                <a:latin typeface="+mn-lt"/>
+                <a:ea typeface="+mn-ea"/>
+                <a:cs typeface="+mn-cs"/>
+              </a:rPr>
+            </a:br>
+            <a:r>
+              <a:rPr lang="en-US" sz="1200" kern="1200" dirty="0">
+                <a:solidFill>
+                  <a:schemeClr val="tx1"/>
+                </a:solidFill>
+                <a:effectLst/>
+                <a:latin typeface="+mn-lt"/>
+                <a:ea typeface="+mn-ea"/>
+                <a:cs typeface="+mn-cs"/>
+              </a:rPr>
+              <a:t>    return result</a:t>
+            </a:r>
+            <a:br>
+              <a:rPr lang="en-US" sz="1200" kern="1200" dirty="0">
+                <a:solidFill>
+                  <a:schemeClr val="tx1"/>
+                </a:solidFill>
+                <a:effectLst/>
+                <a:latin typeface="+mn-lt"/>
+                <a:ea typeface="+mn-ea"/>
+                <a:cs typeface="+mn-cs"/>
+              </a:rPr>
+            </a:br>
+            <a:br>
+              <a:rPr lang="en-US" sz="1200" kern="1200" dirty="0">
+                <a:solidFill>
+                  <a:schemeClr val="tx1"/>
+                </a:solidFill>
+                <a:effectLst/>
+                <a:latin typeface="+mn-lt"/>
+                <a:ea typeface="+mn-ea"/>
+                <a:cs typeface="+mn-cs"/>
+              </a:rPr>
+            </a:br>
+            <a:br>
+              <a:rPr lang="en-US" sz="1200" kern="1200" dirty="0">
+                <a:solidFill>
+                  <a:schemeClr val="tx1"/>
+                </a:solidFill>
+                <a:effectLst/>
+                <a:latin typeface="+mn-lt"/>
+                <a:ea typeface="+mn-ea"/>
+                <a:cs typeface="+mn-cs"/>
+              </a:rPr>
+            </a:br>
+            <a:br>
+              <a:rPr lang="en-US" sz="1200" kern="1200" dirty="0">
+                <a:solidFill>
+                  <a:schemeClr val="tx1"/>
+                </a:solidFill>
+                <a:effectLst/>
+                <a:latin typeface="+mn-lt"/>
+                <a:ea typeface="+mn-ea"/>
+                <a:cs typeface="+mn-cs"/>
+              </a:rPr>
+            </a:br>
+            <a:br>
+              <a:rPr lang="en-US" sz="1200" kern="1200" dirty="0">
+                <a:solidFill>
+                  <a:schemeClr val="tx1"/>
+                </a:solidFill>
+                <a:effectLst/>
+                <a:latin typeface="+mn-lt"/>
+                <a:ea typeface="+mn-ea"/>
+                <a:cs typeface="+mn-cs"/>
+              </a:rPr>
+            </a:br>
+            <a:br>
+              <a:rPr lang="en-US" sz="1200" kern="1200" dirty="0">
+                <a:solidFill>
+                  <a:schemeClr val="tx1"/>
+                </a:solidFill>
+                <a:effectLst/>
+                <a:latin typeface="+mn-lt"/>
+                <a:ea typeface="+mn-ea"/>
+                <a:cs typeface="+mn-cs"/>
+              </a:rPr>
+            </a:br>
+            <a:r>
+              <a:rPr lang="en-US" sz="1200" kern="1200" dirty="0">
+                <a:solidFill>
+                  <a:schemeClr val="tx1"/>
+                </a:solidFill>
+                <a:effectLst/>
+                <a:latin typeface="+mn-lt"/>
+                <a:ea typeface="+mn-ea"/>
+                <a:cs typeface="+mn-cs"/>
+              </a:rPr>
+              <a:t>if __name__ == "__main__":</a:t>
+            </a:r>
+            <a:br>
+              <a:rPr lang="en-US" sz="1200" kern="1200" dirty="0">
+                <a:solidFill>
+                  <a:schemeClr val="tx1"/>
+                </a:solidFill>
+                <a:effectLst/>
+                <a:latin typeface="+mn-lt"/>
+                <a:ea typeface="+mn-ea"/>
+                <a:cs typeface="+mn-cs"/>
+              </a:rPr>
+            </a:br>
+            <a:r>
+              <a:rPr lang="en-US" sz="1200" kern="1200" dirty="0">
+                <a:solidFill>
+                  <a:schemeClr val="tx1"/>
+                </a:solidFill>
+                <a:effectLst/>
+                <a:latin typeface="+mn-lt"/>
+                <a:ea typeface="+mn-ea"/>
+                <a:cs typeface="+mn-cs"/>
+              </a:rPr>
+              <a:t>    # Demonstrate normal usage</a:t>
+            </a:r>
+            <a:br>
+              <a:rPr lang="en-US" sz="1200" kern="1200" dirty="0">
+                <a:solidFill>
+                  <a:schemeClr val="tx1"/>
+                </a:solidFill>
+                <a:effectLst/>
+                <a:latin typeface="+mn-lt"/>
+                <a:ea typeface="+mn-ea"/>
+                <a:cs typeface="+mn-cs"/>
+              </a:rPr>
+            </a:br>
+            <a:r>
+              <a:rPr lang="en-US" sz="1200" kern="1200" dirty="0">
+                <a:solidFill>
+                  <a:schemeClr val="tx1"/>
+                </a:solidFill>
+                <a:effectLst/>
+                <a:latin typeface="+mn-lt"/>
+                <a:ea typeface="+mn-ea"/>
+                <a:cs typeface="+mn-cs"/>
+              </a:rPr>
+              <a:t>    print("=== Normal Usage ===")</a:t>
+            </a:r>
+            <a:br>
+              <a:rPr lang="en-US" sz="1200" kern="1200" dirty="0">
+                <a:solidFill>
+                  <a:schemeClr val="tx1"/>
+                </a:solidFill>
+                <a:effectLst/>
+                <a:latin typeface="+mn-lt"/>
+                <a:ea typeface="+mn-ea"/>
+                <a:cs typeface="+mn-cs"/>
+              </a:rPr>
+            </a:br>
+            <a:r>
+              <a:rPr lang="en-US" sz="1200" kern="1200" dirty="0">
+                <a:solidFill>
+                  <a:schemeClr val="tx1"/>
+                </a:solidFill>
+                <a:effectLst/>
+                <a:latin typeface="+mn-lt"/>
+                <a:ea typeface="+mn-ea"/>
+                <a:cs typeface="+mn-cs"/>
+              </a:rPr>
+              <a:t>    print(</a:t>
+            </a:r>
+            <a:r>
+              <a:rPr lang="en-US" sz="1200" kern="1200" dirty="0" err="1">
+                <a:solidFill>
+                  <a:schemeClr val="tx1"/>
+                </a:solidFill>
+                <a:effectLst/>
+                <a:latin typeface="+mn-lt"/>
+                <a:ea typeface="+mn-ea"/>
+                <a:cs typeface="+mn-cs"/>
+              </a:rPr>
+              <a:t>f"add</a:t>
+            </a:r>
+            <a:r>
+              <a:rPr lang="en-US" sz="1200" kern="1200" dirty="0">
+                <a:solidFill>
+                  <a:schemeClr val="tx1"/>
+                </a:solidFill>
+                <a:effectLst/>
+                <a:latin typeface="+mn-lt"/>
+                <a:ea typeface="+mn-ea"/>
+                <a:cs typeface="+mn-cs"/>
+              </a:rPr>
+              <a:t>(5, 3) = {add(5, 3)}")</a:t>
+            </a:r>
+            <a:br>
+              <a:rPr lang="en-US" sz="1200" kern="1200" dirty="0">
+                <a:solidFill>
+                  <a:schemeClr val="tx1"/>
+                </a:solidFill>
+                <a:effectLst/>
+                <a:latin typeface="+mn-lt"/>
+                <a:ea typeface="+mn-ea"/>
+                <a:cs typeface="+mn-cs"/>
+              </a:rPr>
+            </a:br>
+            <a:r>
+              <a:rPr lang="en-US" sz="1200" kern="1200" dirty="0">
+                <a:solidFill>
+                  <a:schemeClr val="tx1"/>
+                </a:solidFill>
+                <a:effectLst/>
+                <a:latin typeface="+mn-lt"/>
+                <a:ea typeface="+mn-ea"/>
+                <a:cs typeface="+mn-cs"/>
+              </a:rPr>
+              <a:t>    print(</a:t>
+            </a:r>
+            <a:r>
+              <a:rPr lang="en-US" sz="1200" kern="1200" dirty="0" err="1">
+                <a:solidFill>
+                  <a:schemeClr val="tx1"/>
+                </a:solidFill>
+                <a:effectLst/>
+                <a:latin typeface="+mn-lt"/>
+                <a:ea typeface="+mn-ea"/>
+                <a:cs typeface="+mn-cs"/>
+              </a:rPr>
+              <a:t>f"add</a:t>
+            </a:r>
+            <a:r>
+              <a:rPr lang="en-US" sz="1200" kern="1200" dirty="0">
+                <a:solidFill>
+                  <a:schemeClr val="tx1"/>
+                </a:solidFill>
+                <a:effectLst/>
+                <a:latin typeface="+mn-lt"/>
+                <a:ea typeface="+mn-ea"/>
+                <a:cs typeface="+mn-cs"/>
+              </a:rPr>
+              <a:t>(-10, 4) = {add(-10, 4)}")</a:t>
+            </a:r>
+            <a:br>
+              <a:rPr lang="en-US" sz="1200" kern="1200" dirty="0">
+                <a:solidFill>
+                  <a:schemeClr val="tx1"/>
+                </a:solidFill>
+                <a:effectLst/>
+                <a:latin typeface="+mn-lt"/>
+                <a:ea typeface="+mn-ea"/>
+                <a:cs typeface="+mn-cs"/>
+              </a:rPr>
+            </a:br>
+            <a:r>
+              <a:rPr lang="en-US" sz="1200" kern="1200" dirty="0">
+                <a:solidFill>
+                  <a:schemeClr val="tx1"/>
+                </a:solidFill>
+                <a:effectLst/>
+                <a:latin typeface="+mn-lt"/>
+                <a:ea typeface="+mn-ea"/>
+                <a:cs typeface="+mn-cs"/>
+              </a:rPr>
+              <a:t>    print(</a:t>
+            </a:r>
+            <a:r>
+              <a:rPr lang="en-US" sz="1200" kern="1200" dirty="0" err="1">
+                <a:solidFill>
+                  <a:schemeClr val="tx1"/>
+                </a:solidFill>
+                <a:effectLst/>
+                <a:latin typeface="+mn-lt"/>
+                <a:ea typeface="+mn-ea"/>
+                <a:cs typeface="+mn-cs"/>
+              </a:rPr>
+              <a:t>f"add</a:t>
+            </a:r>
+            <a:r>
+              <a:rPr lang="en-US" sz="1200" kern="1200" dirty="0">
+                <a:solidFill>
+                  <a:schemeClr val="tx1"/>
+                </a:solidFill>
+                <a:effectLst/>
+                <a:latin typeface="+mn-lt"/>
+                <a:ea typeface="+mn-ea"/>
+                <a:cs typeface="+mn-cs"/>
+              </a:rPr>
+              <a:t>(0, 42) = {add(0, 42)}")</a:t>
+            </a:r>
+            <a:br>
+              <a:rPr lang="en-US" sz="1200" kern="1200" dirty="0">
+                <a:solidFill>
+                  <a:schemeClr val="tx1"/>
+                </a:solidFill>
+                <a:effectLst/>
+                <a:latin typeface="+mn-lt"/>
+                <a:ea typeface="+mn-ea"/>
+                <a:cs typeface="+mn-cs"/>
+              </a:rPr>
+            </a:br>
+            <a:br>
+              <a:rPr lang="en-US" sz="1200" kern="1200" dirty="0">
+                <a:solidFill>
+                  <a:schemeClr val="tx1"/>
+                </a:solidFill>
+                <a:effectLst/>
+                <a:latin typeface="+mn-lt"/>
+                <a:ea typeface="+mn-ea"/>
+                <a:cs typeface="+mn-cs"/>
+              </a:rPr>
+            </a:br>
+            <a:r>
+              <a:rPr lang="en-US" sz="1200" kern="1200" dirty="0">
+                <a:solidFill>
+                  <a:schemeClr val="tx1"/>
+                </a:solidFill>
+                <a:effectLst/>
+                <a:latin typeface="+mn-lt"/>
+                <a:ea typeface="+mn-ea"/>
+                <a:cs typeface="+mn-cs"/>
+              </a:rPr>
+              <a:t>    # Demonstrate </a:t>
+            </a:r>
+            <a:r>
+              <a:rPr lang="en-US" sz="1200" kern="1200" dirty="0" err="1">
+                <a:solidFill>
+                  <a:schemeClr val="tx1"/>
+                </a:solidFill>
+                <a:effectLst/>
+                <a:latin typeface="+mn-lt"/>
+                <a:ea typeface="+mn-ea"/>
+                <a:cs typeface="+mn-cs"/>
+              </a:rPr>
+              <a:t>TypeError</a:t>
+            </a:r>
+            <a:br>
+              <a:rPr lang="en-US" sz="1200" kern="1200" dirty="0">
+                <a:solidFill>
+                  <a:schemeClr val="tx1"/>
+                </a:solidFill>
+                <a:effectLst/>
+                <a:latin typeface="+mn-lt"/>
+                <a:ea typeface="+mn-ea"/>
+                <a:cs typeface="+mn-cs"/>
+              </a:rPr>
+            </a:br>
+            <a:r>
+              <a:rPr lang="en-US" sz="1200" kern="1200" dirty="0">
+                <a:solidFill>
+                  <a:schemeClr val="tx1"/>
+                </a:solidFill>
+                <a:effectLst/>
+                <a:latin typeface="+mn-lt"/>
+                <a:ea typeface="+mn-ea"/>
+                <a:cs typeface="+mn-cs"/>
+              </a:rPr>
+              <a:t>    print("\n=== Type Error Handling ===")</a:t>
+            </a:r>
+            <a:br>
+              <a:rPr lang="en-US" sz="1200" kern="1200" dirty="0">
+                <a:solidFill>
+                  <a:schemeClr val="tx1"/>
+                </a:solidFill>
+                <a:effectLst/>
+                <a:latin typeface="+mn-lt"/>
+                <a:ea typeface="+mn-ea"/>
+                <a:cs typeface="+mn-cs"/>
+              </a:rPr>
+            </a:br>
+            <a:r>
+              <a:rPr lang="en-US" sz="1200" kern="1200" dirty="0">
+                <a:solidFill>
+                  <a:schemeClr val="tx1"/>
+                </a:solidFill>
+                <a:effectLst/>
+                <a:latin typeface="+mn-lt"/>
+                <a:ea typeface="+mn-ea"/>
+                <a:cs typeface="+mn-cs"/>
+              </a:rPr>
+              <a:t>    try:</a:t>
+            </a:r>
+            <a:br>
+              <a:rPr lang="en-US" sz="1200" kern="1200" dirty="0">
+                <a:solidFill>
+                  <a:schemeClr val="tx1"/>
+                </a:solidFill>
+                <a:effectLst/>
+                <a:latin typeface="+mn-lt"/>
+                <a:ea typeface="+mn-ea"/>
+                <a:cs typeface="+mn-cs"/>
+              </a:rPr>
+            </a:br>
+            <a:r>
+              <a:rPr lang="en-US" sz="1200" kern="1200" dirty="0">
+                <a:solidFill>
+                  <a:schemeClr val="tx1"/>
+                </a:solidFill>
+                <a:effectLst/>
+                <a:latin typeface="+mn-lt"/>
+                <a:ea typeface="+mn-ea"/>
+                <a:cs typeface="+mn-cs"/>
+              </a:rPr>
+              <a:t>        add("5", 3)</a:t>
+            </a:r>
+            <a:br>
+              <a:rPr lang="en-US" sz="1200" kern="1200" dirty="0">
+                <a:solidFill>
+                  <a:schemeClr val="tx1"/>
+                </a:solidFill>
+                <a:effectLst/>
+                <a:latin typeface="+mn-lt"/>
+                <a:ea typeface="+mn-ea"/>
+                <a:cs typeface="+mn-cs"/>
+              </a:rPr>
+            </a:br>
+            <a:r>
+              <a:rPr lang="en-US" sz="1200" kern="1200" dirty="0">
+                <a:solidFill>
+                  <a:schemeClr val="tx1"/>
+                </a:solidFill>
+                <a:effectLst/>
+                <a:latin typeface="+mn-lt"/>
+                <a:ea typeface="+mn-ea"/>
+                <a:cs typeface="+mn-cs"/>
+              </a:rPr>
+              <a:t>    except </a:t>
+            </a:r>
+            <a:r>
+              <a:rPr lang="en-US" sz="1200" kern="1200" dirty="0" err="1">
+                <a:solidFill>
+                  <a:schemeClr val="tx1"/>
+                </a:solidFill>
+                <a:effectLst/>
+                <a:latin typeface="+mn-lt"/>
+                <a:ea typeface="+mn-ea"/>
+                <a:cs typeface="+mn-cs"/>
+              </a:rPr>
+              <a:t>TypeError</a:t>
+            </a:r>
+            <a:r>
+              <a:rPr lang="en-US" sz="1200" kern="1200" dirty="0">
+                <a:solidFill>
+                  <a:schemeClr val="tx1"/>
+                </a:solidFill>
+                <a:effectLst/>
+                <a:latin typeface="+mn-lt"/>
+                <a:ea typeface="+mn-ea"/>
+                <a:cs typeface="+mn-cs"/>
+              </a:rPr>
+              <a:t> as e:</a:t>
+            </a:r>
+            <a:br>
+              <a:rPr lang="en-US" sz="1200" kern="1200" dirty="0">
+                <a:solidFill>
+                  <a:schemeClr val="tx1"/>
+                </a:solidFill>
+                <a:effectLst/>
+                <a:latin typeface="+mn-lt"/>
+                <a:ea typeface="+mn-ea"/>
+                <a:cs typeface="+mn-cs"/>
+              </a:rPr>
+            </a:br>
+            <a:r>
+              <a:rPr lang="en-US" sz="1200" kern="1200" dirty="0">
+                <a:solidFill>
+                  <a:schemeClr val="tx1"/>
+                </a:solidFill>
+                <a:effectLst/>
+                <a:latin typeface="+mn-lt"/>
+                <a:ea typeface="+mn-ea"/>
+                <a:cs typeface="+mn-cs"/>
+              </a:rPr>
+              <a:t>        print(</a:t>
+            </a:r>
+            <a:r>
+              <a:rPr lang="en-US" sz="1200" kern="1200" dirty="0" err="1">
+                <a:solidFill>
+                  <a:schemeClr val="tx1"/>
+                </a:solidFill>
+                <a:effectLst/>
+                <a:latin typeface="+mn-lt"/>
+                <a:ea typeface="+mn-ea"/>
+                <a:cs typeface="+mn-cs"/>
+              </a:rPr>
+              <a:t>f"TypeError</a:t>
+            </a:r>
+            <a:r>
+              <a:rPr lang="en-US" sz="1200" kern="1200" dirty="0">
+                <a:solidFill>
+                  <a:schemeClr val="tx1"/>
+                </a:solidFill>
+                <a:effectLst/>
+                <a:latin typeface="+mn-lt"/>
+                <a:ea typeface="+mn-ea"/>
+                <a:cs typeface="+mn-cs"/>
+              </a:rPr>
+              <a:t> caught: {e}")</a:t>
+            </a:r>
+            <a:br>
+              <a:rPr lang="en-US" sz="1200" kern="1200" dirty="0">
+                <a:solidFill>
+                  <a:schemeClr val="tx1"/>
+                </a:solidFill>
+                <a:effectLst/>
+                <a:latin typeface="+mn-lt"/>
+                <a:ea typeface="+mn-ea"/>
+                <a:cs typeface="+mn-cs"/>
+              </a:rPr>
+            </a:br>
+            <a:br>
+              <a:rPr lang="en-US" sz="1200" kern="1200" dirty="0">
+                <a:solidFill>
+                  <a:schemeClr val="tx1"/>
+                </a:solidFill>
+                <a:effectLst/>
+                <a:latin typeface="+mn-lt"/>
+                <a:ea typeface="+mn-ea"/>
+                <a:cs typeface="+mn-cs"/>
+              </a:rPr>
+            </a:br>
+            <a:r>
+              <a:rPr lang="en-US" sz="1200" kern="1200" dirty="0">
+                <a:solidFill>
+                  <a:schemeClr val="tx1"/>
+                </a:solidFill>
+                <a:effectLst/>
+                <a:latin typeface="+mn-lt"/>
+                <a:ea typeface="+mn-ea"/>
+                <a:cs typeface="+mn-cs"/>
+              </a:rPr>
+              <a:t>    # Demonstrate </a:t>
+            </a:r>
+            <a:r>
+              <a:rPr lang="en-US" sz="1200" kern="1200" dirty="0" err="1">
+                <a:solidFill>
+                  <a:schemeClr val="tx1"/>
+                </a:solidFill>
+                <a:effectLst/>
+                <a:latin typeface="+mn-lt"/>
+                <a:ea typeface="+mn-ea"/>
+                <a:cs typeface="+mn-cs"/>
+              </a:rPr>
+              <a:t>OverflowError</a:t>
+            </a:r>
+            <a:br>
+              <a:rPr lang="en-US" sz="1200" kern="1200" dirty="0">
+                <a:solidFill>
+                  <a:schemeClr val="tx1"/>
+                </a:solidFill>
+                <a:effectLst/>
+                <a:latin typeface="+mn-lt"/>
+                <a:ea typeface="+mn-ea"/>
+                <a:cs typeface="+mn-cs"/>
+              </a:rPr>
+            </a:br>
+            <a:r>
+              <a:rPr lang="en-US" sz="1200" kern="1200" dirty="0">
+                <a:solidFill>
+                  <a:schemeClr val="tx1"/>
+                </a:solidFill>
+                <a:effectLst/>
+                <a:latin typeface="+mn-lt"/>
+                <a:ea typeface="+mn-ea"/>
+                <a:cs typeface="+mn-cs"/>
+              </a:rPr>
+              <a:t>    print("\n=== Overflow Error Handling ===")</a:t>
+            </a:r>
+            <a:br>
+              <a:rPr lang="en-US" sz="1200" kern="1200" dirty="0">
+                <a:solidFill>
+                  <a:schemeClr val="tx1"/>
+                </a:solidFill>
+                <a:effectLst/>
+                <a:latin typeface="+mn-lt"/>
+                <a:ea typeface="+mn-ea"/>
+                <a:cs typeface="+mn-cs"/>
+              </a:rPr>
+            </a:br>
+            <a:r>
+              <a:rPr lang="en-US" sz="1200" kern="1200" dirty="0">
+                <a:solidFill>
+                  <a:schemeClr val="tx1"/>
+                </a:solidFill>
+                <a:effectLst/>
+                <a:latin typeface="+mn-lt"/>
+                <a:ea typeface="+mn-ea"/>
+                <a:cs typeface="+mn-cs"/>
+              </a:rPr>
+              <a:t>    try:</a:t>
+            </a:r>
+            <a:br>
+              <a:rPr lang="en-US" sz="1200" kern="1200" dirty="0">
+                <a:solidFill>
+                  <a:schemeClr val="tx1"/>
+                </a:solidFill>
+                <a:effectLst/>
+                <a:latin typeface="+mn-lt"/>
+                <a:ea typeface="+mn-ea"/>
+                <a:cs typeface="+mn-cs"/>
+              </a:rPr>
+            </a:br>
+            <a:r>
+              <a:rPr lang="en-US" sz="1200" kern="1200" dirty="0">
+                <a:solidFill>
+                  <a:schemeClr val="tx1"/>
+                </a:solidFill>
+                <a:effectLst/>
+                <a:latin typeface="+mn-lt"/>
+                <a:ea typeface="+mn-ea"/>
+                <a:cs typeface="+mn-cs"/>
+              </a:rPr>
+              <a:t>        print(add(</a:t>
+            </a:r>
+            <a:r>
+              <a:rPr lang="en-US" sz="1200" kern="1200" dirty="0" err="1">
+                <a:solidFill>
+                  <a:schemeClr val="tx1"/>
+                </a:solidFill>
+                <a:effectLst/>
+                <a:latin typeface="+mn-lt"/>
+                <a:ea typeface="+mn-ea"/>
+                <a:cs typeface="+mn-cs"/>
+              </a:rPr>
+              <a:t>sys.maxsize</a:t>
+            </a:r>
+            <a:r>
+              <a:rPr lang="en-US" sz="1200" kern="1200" dirty="0">
+                <a:solidFill>
+                  <a:schemeClr val="tx1"/>
+                </a:solidFill>
+                <a:effectLst/>
+                <a:latin typeface="+mn-lt"/>
+                <a:ea typeface="+mn-ea"/>
+                <a:cs typeface="+mn-cs"/>
+              </a:rPr>
+              <a:t>, 1))</a:t>
+            </a:r>
+            <a:br>
+              <a:rPr lang="en-US" sz="1200" kern="1200" dirty="0">
+                <a:solidFill>
+                  <a:schemeClr val="tx1"/>
+                </a:solidFill>
+                <a:effectLst/>
+                <a:latin typeface="+mn-lt"/>
+                <a:ea typeface="+mn-ea"/>
+                <a:cs typeface="+mn-cs"/>
+              </a:rPr>
+            </a:br>
+            <a:r>
+              <a:rPr lang="en-US" sz="1200" kern="1200" dirty="0">
+                <a:solidFill>
+                  <a:schemeClr val="tx1"/>
+                </a:solidFill>
+                <a:effectLst/>
+                <a:latin typeface="+mn-lt"/>
+                <a:ea typeface="+mn-ea"/>
+                <a:cs typeface="+mn-cs"/>
+              </a:rPr>
+              <a:t>    except </a:t>
+            </a:r>
+            <a:r>
+              <a:rPr lang="en-US" sz="1200" kern="1200" dirty="0" err="1">
+                <a:solidFill>
+                  <a:schemeClr val="tx1"/>
+                </a:solidFill>
+                <a:effectLst/>
+                <a:latin typeface="+mn-lt"/>
+                <a:ea typeface="+mn-ea"/>
+                <a:cs typeface="+mn-cs"/>
+              </a:rPr>
+              <a:t>OverflowError</a:t>
+            </a:r>
+            <a:r>
+              <a:rPr lang="en-US" sz="1200" kern="1200" dirty="0">
+                <a:solidFill>
+                  <a:schemeClr val="tx1"/>
+                </a:solidFill>
+                <a:effectLst/>
+                <a:latin typeface="+mn-lt"/>
+                <a:ea typeface="+mn-ea"/>
+                <a:cs typeface="+mn-cs"/>
+              </a:rPr>
+              <a:t> as e:</a:t>
+            </a:r>
+            <a:br>
+              <a:rPr lang="en-US" sz="1200" kern="1200" dirty="0">
+                <a:solidFill>
+                  <a:schemeClr val="tx1"/>
+                </a:solidFill>
+                <a:effectLst/>
+                <a:latin typeface="+mn-lt"/>
+                <a:ea typeface="+mn-ea"/>
+                <a:cs typeface="+mn-cs"/>
+              </a:rPr>
+            </a:br>
+            <a:r>
+              <a:rPr lang="en-US" sz="1200" kern="1200" dirty="0">
+                <a:solidFill>
+                  <a:schemeClr val="tx1"/>
+                </a:solidFill>
+                <a:effectLst/>
+                <a:latin typeface="+mn-lt"/>
+                <a:ea typeface="+mn-ea"/>
+                <a:cs typeface="+mn-cs"/>
+              </a:rPr>
+              <a:t>        print(</a:t>
+            </a:r>
+            <a:r>
+              <a:rPr lang="en-US" sz="1200" kern="1200" dirty="0" err="1">
+                <a:solidFill>
+                  <a:schemeClr val="tx1"/>
+                </a:solidFill>
+                <a:effectLst/>
+                <a:latin typeface="+mn-lt"/>
+                <a:ea typeface="+mn-ea"/>
+                <a:cs typeface="+mn-cs"/>
+              </a:rPr>
+              <a:t>f"OverflowError</a:t>
+            </a:r>
+            <a:r>
+              <a:rPr lang="en-US" sz="1200" kern="1200" dirty="0">
+                <a:solidFill>
+                  <a:schemeClr val="tx1"/>
+                </a:solidFill>
+                <a:effectLst/>
+                <a:latin typeface="+mn-lt"/>
+                <a:ea typeface="+mn-ea"/>
+                <a:cs typeface="+mn-cs"/>
+              </a:rPr>
+              <a:t> caught: {e}")</a:t>
+            </a:r>
+          </a:p>
+          <a:p>
+            <a:endParaRPr lang="en-US" dirty="0"/>
+          </a:p>
+        </p:txBody>
+      </p:sp>
+      <p:sp>
+        <p:nvSpPr>
+          <p:cNvPr id="4" name="Slide Number Placeholder 3">
+            <a:extLst>
+              <a:ext uri="{FF2B5EF4-FFF2-40B4-BE49-F238E27FC236}">
+                <a16:creationId xmlns:a16="http://schemas.microsoft.com/office/drawing/2014/main" id="{6128D303-89CE-AB84-CE24-12EFF48D72CF}"/>
+              </a:ext>
+            </a:extLst>
+          </p:cNvPr>
+          <p:cNvSpPr>
+            <a:spLocks noGrp="1"/>
+          </p:cNvSpPr>
+          <p:nvPr>
+            <p:ph type="sldNum" sz="quarter" idx="5"/>
+          </p:nvPr>
+        </p:nvSpPr>
+        <p:spPr/>
+        <p:txBody>
+          <a:bodyPr/>
+          <a:lstStyle/>
+          <a:p>
+            <a:fld id="{FA41C955-0A53-4CE8-B014-58EE68AEC52A}" type="slidenum">
+              <a:rPr lang="en-US" smtClean="0"/>
+              <a:t>16</a:t>
+            </a:fld>
+            <a:endParaRPr lang="en-US"/>
+          </a:p>
+        </p:txBody>
+      </p:sp>
+    </p:spTree>
+    <p:extLst>
+      <p:ext uri="{BB962C8B-B14F-4D97-AF65-F5344CB8AC3E}">
+        <p14:creationId xmlns:p14="http://schemas.microsoft.com/office/powerpoint/2010/main" val="1420613079"/>
       </p:ext>
     </p:extLst>
   </p:cSld>
@@ -6100,7 +7879,7 @@
           <a:p>
             <a:fld id="{8CF8D308-A2A6-458E-94F6-BC214F8ABC37}" type="datetime1">
               <a:rPr lang="en-US" smtClean="0"/>
-              <a:t>6/21/2026</a:t>
+              <a:t>6/22/2026</a:t>
             </a:fld>
             <a:endParaRPr lang="en-US"/>
           </a:p>
@@ -6298,7 +8077,7 @@
           <a:p>
             <a:fld id="{B75DB6CE-6FE7-4B2B-9FC6-2BCAE31CBB40}" type="datetime1">
               <a:rPr lang="en-US" smtClean="0"/>
-              <a:t>6/21/2026</a:t>
+              <a:t>6/22/2026</a:t>
             </a:fld>
             <a:endParaRPr lang="en-US"/>
           </a:p>
@@ -6506,7 +8285,7 @@
           <a:p>
             <a:fld id="{5ABCA857-2376-48D2-96A8-556A5B78D1EC}" type="datetime1">
               <a:rPr lang="en-US" smtClean="0"/>
-              <a:t>6/21/2026</a:t>
+              <a:t>6/22/2026</a:t>
             </a:fld>
             <a:endParaRPr lang="en-US"/>
           </a:p>
@@ -7901,7 +9680,7 @@
           <a:p>
             <a:fld id="{4D8885F6-4E0D-4F96-9D4A-701A51C03A8E}" type="datetime1">
               <a:rPr lang="en-US" smtClean="0"/>
-              <a:t>6/21/2026</a:t>
+              <a:t>6/22/2026</a:t>
             </a:fld>
             <a:endParaRPr lang="en-US"/>
           </a:p>
@@ -8176,7 +9955,7 @@
           <a:p>
             <a:fld id="{D0FE6074-FB5B-4111-AD69-45F699D11CEE}" type="datetime1">
               <a:rPr lang="en-US" smtClean="0"/>
-              <a:t>6/21/2026</a:t>
+              <a:t>6/22/2026</a:t>
             </a:fld>
             <a:endParaRPr lang="en-US"/>
           </a:p>
@@ -8441,7 +10220,7 @@
           <a:p>
             <a:fld id="{4D043287-A541-4FBC-9DFE-4C26D02CBEED}" type="datetime1">
               <a:rPr lang="en-US" smtClean="0"/>
-              <a:t>6/21/2026</a:t>
+              <a:t>6/22/2026</a:t>
             </a:fld>
             <a:endParaRPr lang="en-US"/>
           </a:p>
@@ -8853,7 +10632,7 @@
           <a:p>
             <a:fld id="{16F4DCE4-AB02-448D-8752-78E172822B45}" type="datetime1">
               <a:rPr lang="en-US" smtClean="0"/>
-              <a:t>6/21/2026</a:t>
+              <a:t>6/22/2026</a:t>
             </a:fld>
             <a:endParaRPr lang="en-US"/>
           </a:p>
@@ -8994,7 +10773,7 @@
           <a:p>
             <a:fld id="{306880FA-E6AF-4379-8F5E-BF92A0077603}" type="datetime1">
               <a:rPr lang="en-US" smtClean="0"/>
-              <a:t>6/21/2026</a:t>
+              <a:t>6/22/2026</a:t>
             </a:fld>
             <a:endParaRPr lang="en-US"/>
           </a:p>
@@ -9107,7 +10886,7 @@
           <a:p>
             <a:fld id="{118573D9-244C-41BD-9010-1679B124B651}" type="datetime1">
               <a:rPr lang="en-US" smtClean="0"/>
-              <a:t>6/21/2026</a:t>
+              <a:t>6/22/2026</a:t>
             </a:fld>
             <a:endParaRPr lang="en-US"/>
           </a:p>
@@ -9418,7 +11197,7 @@
           <a:p>
             <a:fld id="{FAE75AE8-4771-44FE-AD20-D090FAF8EACD}" type="datetime1">
               <a:rPr lang="en-US" smtClean="0"/>
-              <a:t>6/21/2026</a:t>
+              <a:t>6/22/2026</a:t>
             </a:fld>
             <a:endParaRPr lang="en-US"/>
           </a:p>
@@ -9706,7 +11485,7 @@
           <a:p>
             <a:fld id="{D972CF6E-9787-4A8B-BC44-1D044A98129C}" type="datetime1">
               <a:rPr lang="en-US" smtClean="0"/>
-              <a:t>6/21/2026</a:t>
+              <a:t>6/22/2026</a:t>
             </a:fld>
             <a:endParaRPr lang="en-US"/>
           </a:p>
@@ -9947,7 +11726,7 @@
           <a:p>
             <a:fld id="{BBCA354C-DC0A-4C3E-BF4A-9931F7807B94}" type="datetime1">
               <a:rPr lang="en-US" smtClean="0"/>
-              <a:t>6/21/2026</a:t>
+              <a:t>6/22/2026</a:t>
             </a:fld>
             <a:endParaRPr lang="en-US"/>
           </a:p>
@@ -10953,16 +12732,16 @@
                 </a:solidFill>
                 <a:latin typeface="AmericanSans"/>
               </a:rPr>
-              <a:t> (“signature”, “API” or “contract”) of the module. Specifies what it does, inputs conditions and outputs. It </a:t>
-            </a:r>
-            <a:r>
-              <a:rPr lang="en-US" sz="2000" b="0" u="sng" dirty="0">
-                <a:solidFill>
-                  <a:schemeClr val="tx1"/>
+              <a:t> (“signature”, “API”, “contract” or “abstraction”) of the module. Specifies to its </a:t>
+            </a:r>
+            <a:r>
+              <a:rPr lang="en-US" sz="2400" dirty="0">
+                <a:solidFill>
+                  <a:srgbClr val="00B050"/>
                 </a:solidFill>
                 <a:latin typeface="AmericanSans"/>
               </a:rPr>
-              <a:t>should not specify how the contract is fulfilled</a:t>
+              <a:t>clients</a:t>
             </a:r>
             <a:r>
               <a:rPr lang="en-US" sz="2000" b="0" dirty="0">
@@ -10971,7 +12750,7 @@
                 </a:solidFill>
                 <a:latin typeface="AmericanSans"/>
               </a:rPr>
-              <a:t>.</a:t>
+              <a:t> what it does, inputs conditions and outputs. </a:t>
             </a:r>
           </a:p>
           <a:p>
@@ -10980,12 +12759,33 @@
                 <a:spcPct val="100000"/>
               </a:lnSpc>
             </a:pPr>
-            <a:endParaRPr lang="es-CL" sz="2000" b="0" dirty="0">
-              <a:solidFill>
-                <a:schemeClr val="tx1"/>
-              </a:solidFill>
-              <a:latin typeface="AmericanSans"/>
-            </a:endParaRPr>
+            <a:r>
+              <a:rPr lang="en-US" sz="2000" b="0" dirty="0">
+                <a:solidFill>
+                  <a:schemeClr val="tx1"/>
+                </a:solidFill>
+                <a:latin typeface="AmericanSans"/>
+              </a:rPr>
+              <a:t>Design best practice: it </a:t>
+            </a:r>
+            <a:r>
+              <a:rPr lang="en-US" sz="2000" b="0" u="sng" dirty="0">
+                <a:solidFill>
+                  <a:schemeClr val="tx1"/>
+                </a:solidFill>
+                <a:latin typeface="AmericanSans"/>
+              </a:rPr>
+              <a:t>should not specify how the contract is implemented</a:t>
+            </a:r>
+            <a:r>
+              <a:rPr lang="en-US" sz="2000" b="0" dirty="0">
+                <a:solidFill>
+                  <a:schemeClr val="tx1"/>
+                </a:solidFill>
+                <a:latin typeface="AmericanSans"/>
+              </a:rPr>
+              <a:t>.</a:t>
+            </a:r>
           </a:p>
           <a:p>
             <a:pPr>
@@ -11313,7 +13113,34 @@
                 </a:solidFill>
                 <a:latin typeface="AmericanSans"/>
               </a:rPr>
-              <a:t>Best practice: it should be hidden from the clients to avoid coupling.</a:t>
+              <a:t>Design best practice: it </a:t>
+            </a:r>
+            <a:r>
+              <a:rPr lang="en-US" sz="2000" b="0" u="sng" dirty="0">
+                <a:solidFill>
+                  <a:schemeClr val="tx1"/>
+                </a:solidFill>
+                <a:latin typeface="AmericanSans"/>
+              </a:rPr>
+              <a:t>should be hidden from the </a:t>
+            </a:r>
+            <a:r>
+              <a:rPr lang="en-US" sz="2400" u="sng" dirty="0">
+                <a:solidFill>
+                  <a:srgbClr val="00B050"/>
+                </a:solidFill>
+                <a:latin typeface="AmericanSans"/>
+              </a:rPr>
+              <a:t>clients</a:t>
+            </a:r>
+            <a:r>
+              <a:rPr lang="en-US" sz="2000" b="0" dirty="0">
+                <a:solidFill>
+                  <a:schemeClr val="tx1"/>
+                </a:solidFill>
+                <a:latin typeface="AmericanSans"/>
+              </a:rPr>
+              <a:t>.</a:t>
             </a:r>
           </a:p>
         </p:txBody>
@@ -11463,6 +13290,487 @@
         <p:cNvPr id="1" name="">
           <a:extLst>
             <a:ext uri="{FF2B5EF4-FFF2-40B4-BE49-F238E27FC236}">
+              <a16:creationId xmlns:a16="http://schemas.microsoft.com/office/drawing/2014/main" id="{23EE62A6-3905-46D7-2377-E74A206CFFA5}"/>
+            </a:ext>
+          </a:extLst>
+        </p:cNvPr>
+        <p:cNvGrpSpPr/>
+        <p:nvPr/>
+      </p:nvGrpSpPr>
+      <p:grpSpPr>
+        <a:xfrm>
+          <a:off x="0" y="0"/>
+          <a:ext cx="0" cy="0"/>
+          <a:chOff x="0" y="0"/>
+          <a:chExt cx="0" cy="0"/>
+        </a:xfrm>
+      </p:grpSpPr>
+      <p:sp>
+        <p:nvSpPr>
+          <p:cNvPr id="3" name="Slide Number Placeholder 2">
+            <a:extLst>
+              <a:ext uri="{FF2B5EF4-FFF2-40B4-BE49-F238E27FC236}">
+                <a16:creationId xmlns:a16="http://schemas.microsoft.com/office/drawing/2014/main" id="{8434BB0C-4EFC-B338-EC15-6AEAB9256410}"/>
+              </a:ext>
+            </a:extLst>
+          </p:cNvPr>
+          <p:cNvSpPr>
+            <a:spLocks noGrp="1"/>
+          </p:cNvSpPr>
+          <p:nvPr>
+            <p:ph type="sldNum" sz="quarter" idx="12"/>
+          </p:nvPr>
+        </p:nvSpPr>
+        <p:spPr/>
+        <p:txBody>
+          <a:bodyPr/>
+          <a:lstStyle/>
+          <a:p>
+            <a:fld id="{F00CFC7C-F3DD-4CCA-A309-41102AB6D153}" type="slidenum">
+              <a:rPr lang="en-US" smtClean="0"/>
+              <a:t>11</a:t>
+            </a:fld>
+            <a:endParaRPr lang="en-US"/>
+          </a:p>
+        </p:txBody>
+      </p:sp>
+      <p:sp>
+        <p:nvSpPr>
+          <p:cNvPr id="6" name="Title 1">
+            <a:extLst>
+              <a:ext uri="{FF2B5EF4-FFF2-40B4-BE49-F238E27FC236}">
+                <a16:creationId xmlns:a16="http://schemas.microsoft.com/office/drawing/2014/main" id="{75F116E8-FA1E-DACF-DAE0-94BCB0D1A8F3}"/>
+              </a:ext>
+            </a:extLst>
+          </p:cNvPr>
+          <p:cNvSpPr>
+            <a:spLocks noGrp="1"/>
+          </p:cNvSpPr>
+          <p:nvPr>
+            <p:ph type="ctrTitle"/>
+          </p:nvPr>
+        </p:nvSpPr>
+        <p:spPr>
+          <a:xfrm>
+            <a:off x="91440" y="132080"/>
+            <a:ext cx="11694160" cy="573722"/>
+          </a:xfrm>
+        </p:spPr>
+        <p:txBody>
+          <a:bodyPr>
+            <a:normAutofit fontScale="90000"/>
+          </a:bodyPr>
+          <a:lstStyle/>
+          <a:p>
+            <a:pPr algn="l"/>
+            <a:r>
+              <a:rPr lang="en-US" sz="3600" dirty="0"/>
+              <a:t>An outlet providing power as an analogy</a:t>
+            </a:r>
+          </a:p>
+        </p:txBody>
+      </p:sp>
+      <p:pic>
+        <p:nvPicPr>
+          <p:cNvPr id="2" name="Picture 1" descr="How Much Draw from a Single Outlet? | Promise Electric - Sarasota, FL">
+            <a:extLst>
+              <a:ext uri="{FF2B5EF4-FFF2-40B4-BE49-F238E27FC236}">
+                <a16:creationId xmlns:a16="http://schemas.microsoft.com/office/drawing/2014/main" id="{0DFDA07E-B26E-8330-9655-575233A249F8}"/>
+              </a:ext>
+            </a:extLst>
+          </p:cNvPr>
+          <p:cNvPicPr>
+            <a:picLocks noChangeAspect="1"/>
+          </p:cNvPicPr>
+          <p:nvPr/>
+        </p:nvPicPr>
+        <p:blipFill>
+          <a:blip r:embed="rId2"/>
+          <a:stretch>
+            <a:fillRect/>
+          </a:stretch>
+        </p:blipFill>
+        <p:spPr>
+          <a:xfrm>
+            <a:off x="6463863" y="2119189"/>
+            <a:ext cx="5415226" cy="3617202"/>
+          </a:xfrm>
+          <a:prstGeom prst="rect">
+            <a:avLst/>
+          </a:prstGeom>
+        </p:spPr>
+      </p:pic>
+      <p:pic>
+        <p:nvPicPr>
+          <p:cNvPr id="4" name="Picture 3" descr="How Receptacles work (US/CAN) - The Engineering Mindset">
+            <a:extLst>
+              <a:ext uri="{FF2B5EF4-FFF2-40B4-BE49-F238E27FC236}">
+                <a16:creationId xmlns:a16="http://schemas.microsoft.com/office/drawing/2014/main" id="{C29B3DD7-372D-F8A3-9FAB-AE85DF7C85B1}"/>
+              </a:ext>
+            </a:extLst>
+          </p:cNvPr>
+          <p:cNvPicPr>
+            <a:picLocks noChangeAspect="1"/>
+          </p:cNvPicPr>
+          <p:nvPr/>
+        </p:nvPicPr>
+        <p:blipFill>
+          <a:blip r:embed="rId3"/>
+          <a:stretch>
+            <a:fillRect/>
+          </a:stretch>
+        </p:blipFill>
+        <p:spPr>
+          <a:xfrm>
+            <a:off x="91439" y="2119189"/>
+            <a:ext cx="6290786" cy="3617202"/>
+          </a:xfrm>
+          <a:prstGeom prst="rect">
+            <a:avLst/>
+          </a:prstGeom>
+        </p:spPr>
+      </p:pic>
+      <p:sp>
+        <p:nvSpPr>
+          <p:cNvPr id="5" name="TextBox 4">
+            <a:extLst>
+              <a:ext uri="{FF2B5EF4-FFF2-40B4-BE49-F238E27FC236}">
+                <a16:creationId xmlns:a16="http://schemas.microsoft.com/office/drawing/2014/main" id="{666B435E-CECA-D667-781C-948CCCA8FD0F}"/>
+              </a:ext>
+            </a:extLst>
+          </p:cNvPr>
+          <p:cNvSpPr txBox="1"/>
+          <p:nvPr/>
+        </p:nvSpPr>
+        <p:spPr>
+          <a:xfrm>
+            <a:off x="91440" y="1481958"/>
+            <a:ext cx="6290785" cy="461665"/>
+          </a:xfrm>
+          <a:prstGeom prst="rect">
+            <a:avLst/>
+          </a:prstGeom>
+          <a:solidFill>
+            <a:srgbClr val="5959EB"/>
+          </a:solidFill>
+        </p:spPr>
+        <p:txBody>
+          <a:bodyPr wrap="square" rtlCol="0">
+            <a:spAutoFit/>
+          </a:bodyPr>
+          <a:lstStyle/>
+          <a:p>
+            <a:pPr algn="ctr"/>
+            <a:r>
+              <a:rPr lang="en-US" sz="2400" b="1" dirty="0">
+                <a:solidFill>
+                  <a:schemeClr val="bg1"/>
+                </a:solidFill>
+              </a:rPr>
+              <a:t>Implementation</a:t>
+            </a:r>
+          </a:p>
+        </p:txBody>
+      </p:sp>
+      <p:sp>
+        <p:nvSpPr>
+          <p:cNvPr id="7" name="TextBox 6">
+            <a:extLst>
+              <a:ext uri="{FF2B5EF4-FFF2-40B4-BE49-F238E27FC236}">
+                <a16:creationId xmlns:a16="http://schemas.microsoft.com/office/drawing/2014/main" id="{59B821DC-2D4A-75B9-642B-6CBBC82BB7BB}"/>
+              </a:ext>
+            </a:extLst>
+          </p:cNvPr>
+          <p:cNvSpPr txBox="1"/>
+          <p:nvPr/>
+        </p:nvSpPr>
+        <p:spPr>
+          <a:xfrm>
+            <a:off x="6463864" y="1481958"/>
+            <a:ext cx="2606564" cy="461665"/>
+          </a:xfrm>
+          <a:prstGeom prst="rect">
+            <a:avLst/>
+          </a:prstGeom>
+          <a:solidFill>
+            <a:srgbClr val="FF0000"/>
+          </a:solidFill>
+        </p:spPr>
+        <p:txBody>
+          <a:bodyPr wrap="square" rtlCol="0">
+            <a:spAutoFit/>
+          </a:bodyPr>
+          <a:lstStyle/>
+          <a:p>
+            <a:pPr algn="ctr"/>
+            <a:r>
+              <a:rPr lang="en-US" sz="2400" b="1" dirty="0">
+                <a:solidFill>
+                  <a:schemeClr val="bg1"/>
+                </a:solidFill>
+              </a:rPr>
+              <a:t>Interface</a:t>
+            </a:r>
+          </a:p>
+        </p:txBody>
+      </p:sp>
+      <p:sp>
+        <p:nvSpPr>
+          <p:cNvPr id="8" name="TextBox 7">
+            <a:extLst>
+              <a:ext uri="{FF2B5EF4-FFF2-40B4-BE49-F238E27FC236}">
+                <a16:creationId xmlns:a16="http://schemas.microsoft.com/office/drawing/2014/main" id="{2AD2884A-BFC5-2902-249F-0EF43C7560E6}"/>
+              </a:ext>
+            </a:extLst>
+          </p:cNvPr>
+          <p:cNvSpPr txBox="1"/>
+          <p:nvPr/>
+        </p:nvSpPr>
+        <p:spPr>
+          <a:xfrm>
+            <a:off x="9171476" y="1481957"/>
+            <a:ext cx="2606564" cy="461665"/>
+          </a:xfrm>
+          <a:prstGeom prst="rect">
+            <a:avLst/>
+          </a:prstGeom>
+          <a:solidFill>
+            <a:srgbClr val="00B050"/>
+          </a:solidFill>
+        </p:spPr>
+        <p:txBody>
+          <a:bodyPr wrap="square" rtlCol="0">
+            <a:spAutoFit/>
+          </a:bodyPr>
+          <a:lstStyle/>
+          <a:p>
+            <a:pPr algn="ctr"/>
+            <a:r>
+              <a:rPr lang="en-US" sz="2400" b="1" dirty="0">
+                <a:solidFill>
+                  <a:schemeClr val="bg1"/>
+                </a:solidFill>
+              </a:rPr>
+              <a:t>Clients</a:t>
+            </a:r>
+          </a:p>
+        </p:txBody>
+      </p:sp>
+      <p:sp>
+        <p:nvSpPr>
+          <p:cNvPr id="9" name="Rectangle 8">
+            <a:extLst>
+              <a:ext uri="{FF2B5EF4-FFF2-40B4-BE49-F238E27FC236}">
+                <a16:creationId xmlns:a16="http://schemas.microsoft.com/office/drawing/2014/main" id="{4DDD8B54-94CC-EBA6-44FA-249254981F96}"/>
+              </a:ext>
+            </a:extLst>
+          </p:cNvPr>
+          <p:cNvSpPr/>
+          <p:nvPr/>
+        </p:nvSpPr>
+        <p:spPr>
+          <a:xfrm>
+            <a:off x="6424713" y="1388821"/>
+            <a:ext cx="2707613" cy="4410630"/>
+          </a:xfrm>
+          <a:prstGeom prst="rect">
+            <a:avLst/>
+          </a:prstGeom>
+          <a:noFill/>
+          <a:ln w="28575">
+            <a:solidFill>
+              <a:srgbClr val="FF0000"/>
+            </a:solidFill>
+            <a:prstDash val="dash"/>
+          </a:ln>
+        </p:spPr>
+        <p:style>
+          <a:lnRef idx="2">
+            <a:schemeClr val="accent1">
+              <a:shade val="15000"/>
+            </a:schemeClr>
+          </a:lnRef>
+          <a:fillRef idx="1">
+            <a:schemeClr val="accent1"/>
+          </a:fillRef>
+          <a:effectRef idx="0">
+            <a:schemeClr val="accent1"/>
+          </a:effectRef>
+          <a:fontRef idx="minor">
+            <a:schemeClr val="lt1"/>
+          </a:fontRef>
+        </p:style>
+        <p:txBody>
+          <a:bodyPr rtlCol="0" anchor="ctr"/>
+          <a:lstStyle/>
+          <a:p>
+            <a:pPr algn="ctr"/>
+            <a:endParaRPr lang="en-US"/>
+          </a:p>
+        </p:txBody>
+      </p:sp>
+      <p:sp>
+        <p:nvSpPr>
+          <p:cNvPr id="10" name="TextBox 9">
+            <a:extLst>
+              <a:ext uri="{FF2B5EF4-FFF2-40B4-BE49-F238E27FC236}">
+                <a16:creationId xmlns:a16="http://schemas.microsoft.com/office/drawing/2014/main" id="{9439D38D-A513-97A3-AC8D-037D1B81A0A2}"/>
+              </a:ext>
+            </a:extLst>
+          </p:cNvPr>
+          <p:cNvSpPr txBox="1"/>
+          <p:nvPr/>
+        </p:nvSpPr>
+        <p:spPr>
+          <a:xfrm>
+            <a:off x="7022858" y="906282"/>
+            <a:ext cx="1587742" cy="400110"/>
+          </a:xfrm>
+          <a:prstGeom prst="rect">
+            <a:avLst/>
+          </a:prstGeom>
+          <a:noFill/>
+        </p:spPr>
+        <p:txBody>
+          <a:bodyPr wrap="none" rtlCol="0">
+            <a:spAutoFit/>
+          </a:bodyPr>
+          <a:lstStyle/>
+          <a:p>
+            <a:r>
+              <a:rPr lang="en-US" sz="2000" b="1" dirty="0"/>
+              <a:t>To be tested</a:t>
+            </a:r>
+          </a:p>
+        </p:txBody>
+      </p:sp>
+    </p:spTree>
+    <p:extLst>
+      <p:ext uri="{BB962C8B-B14F-4D97-AF65-F5344CB8AC3E}">
+        <p14:creationId xmlns:p14="http://schemas.microsoft.com/office/powerpoint/2010/main" val="3377240888"/>
+      </p:ext>
+    </p:extLst>
+  </p:cSld>
+  <p:clrMapOvr>
+    <a:masterClrMapping/>
+  </p:clrMapOvr>
+  <p:timing>
+    <p:tnLst>
+      <p:par>
+        <p:cTn id="1" dur="indefinite" restart="never" nodeType="tmRoot">
+          <p:childTnLst>
+            <p:seq concurrent="1" nextAc="seek">
+              <p:cTn id="2" dur="indefinite" nodeType="mainSeq">
+                <p:childTnLst>
+                  <p:par>
+                    <p:cTn id="3" fill="hold">
+                      <p:stCondLst>
+                        <p:cond delay="indefinite"/>
+                      </p:stCondLst>
+                      <p:childTnLst>
+                        <p:par>
+                          <p:cTn id="4" fill="hold">
+                            <p:stCondLst>
+                              <p:cond delay="0"/>
+                            </p:stCondLst>
+                            <p:childTnLst>
+                              <p:par>
+                                <p:cTn id="5" presetID="1" presetClass="entr" presetSubtype="0" fill="hold" grpId="0" nodeType="clickEffect">
+                                  <p:stCondLst>
+                                    <p:cond delay="0"/>
+                                  </p:stCondLst>
+                                  <p:childTnLst>
+                                    <p:set>
+                                      <p:cBhvr>
+                                        <p:cTn id="6" dur="1" fill="hold">
+                                          <p:stCondLst>
+                                            <p:cond delay="0"/>
+                                          </p:stCondLst>
+                                        </p:cTn>
+                                        <p:tgtEl>
+                                          <p:spTgt spid="9"/>
+                                        </p:tgtEl>
+                                        <p:attrNameLst>
+                                          <p:attrName>style.visibility</p:attrName>
+                                        </p:attrNameLst>
+                                      </p:cBhvr>
+                                      <p:to>
+                                        <p:strVal val="visible"/>
+                                      </p:to>
+                                    </p:set>
+                                  </p:childTnLst>
+                                </p:cTn>
+                              </p:par>
+                              <p:par>
+                                <p:cTn id="7" presetID="1" presetClass="entr" presetSubtype="0" fill="hold" grpId="0" nodeType="withEffect">
+                                  <p:stCondLst>
+                                    <p:cond delay="0"/>
+                                  </p:stCondLst>
+                                  <p:childTnLst>
+                                    <p:set>
+                                      <p:cBhvr>
+                                        <p:cTn id="8" dur="1" fill="hold">
+                                          <p:stCondLst>
+                                            <p:cond delay="0"/>
+                                          </p:stCondLst>
+                                        </p:cTn>
+                                        <p:tgtEl>
+                                          <p:spTgt spid="10"/>
+                                        </p:tgtEl>
+                                        <p:attrNameLst>
+                                          <p:attrName>style.visibility</p:attrName>
+                                        </p:attrNameLst>
+                                      </p:cBhvr>
+                                      <p:to>
+                                        <p:strVal val="visible"/>
+                                      </p:to>
+                                    </p:set>
+                                  </p:childTnLst>
+                                </p:cTn>
+                              </p:par>
+                            </p:childTnLst>
+                          </p:cTn>
+                        </p:par>
+                      </p:childTnLst>
+                    </p:cTn>
+                  </p:par>
+                </p:childTnLst>
+              </p:cTn>
+              <p:prevCondLst>
+                <p:cond evt="onPrev" delay="0">
+                  <p:tgtEl>
+                    <p:sldTgt/>
+                  </p:tgtEl>
+                </p:cond>
+              </p:prevCondLst>
+              <p:nextCondLst>
+                <p:cond evt="onNext" delay="0">
+                  <p:tgtEl>
+                    <p:sldTgt/>
+                  </p:tgtEl>
+                </p:cond>
+              </p:nextCondLst>
+            </p:seq>
+          </p:childTnLst>
+        </p:cTn>
+      </p:par>
+    </p:tnLst>
+    <p:bldLst>
+      <p:bldP spid="9" grpId="0" animBg="1"/>
+      <p:bldP spid="10" grpId="0"/>
+    </p:bldLst>
+  </p:timing>
+</p:sld>
+</file>
+
+<file path=ppt/slides/slide12.xml><?xml version="1.0" encoding="utf-8"?>
+<p:sld xmlns:a="http://schemas.openxmlformats.org/drawingml/2006/main" xmlns:r="http://schemas.openxmlformats.org/officeDocument/2006/relationships" xmlns:p="http://schemas.openxmlformats.org/presentationml/2006/main">
+  <p:cSld>
+    <p:spTree>
+      <p:nvGrpSpPr>
+        <p:cNvPr id="1" name="">
+          <a:extLst>
+            <a:ext uri="{FF2B5EF4-FFF2-40B4-BE49-F238E27FC236}">
               <a16:creationId xmlns:a16="http://schemas.microsoft.com/office/drawing/2014/main" id="{64A62266-A326-8DE5-3554-2ED08C1CE811}"/>
             </a:ext>
           </a:extLst>
@@ -11501,7 +13809,7 @@
           <a:p>
             <a:fld id="{F00CFC7C-F3DD-4CCA-A309-41102AB6D153}" type="slidenum">
               <a:rPr lang="en-US" smtClean="0"/>
-              <a:t>11</a:t>
+              <a:t>12</a:t>
             </a:fld>
             <a:endParaRPr lang="en-US"/>
           </a:p>
@@ -12280,7 +14588,7 @@
 </p:sld>
 </file>
 
-<file path=ppt/slides/slide12.xml><?xml version="1.0" encoding="utf-8"?>
+<file path=ppt/slides/slide13.xml><?xml version="1.0" encoding="utf-8"?>
 <p:sld xmlns:a="http://schemas.openxmlformats.org/drawingml/2006/main" xmlns:r="http://schemas.openxmlformats.org/officeDocument/2006/relationships" xmlns:p="http://schemas.openxmlformats.org/presentationml/2006/main">
   <p:cSld>
     <p:spTree>
@@ -13153,7 +15461,7 @@
 </p:sld>
 </file>
 
-<file path=ppt/slides/slide13.xml><?xml version="1.0" encoding="utf-8"?>
+<file path=ppt/slides/slide14.xml><?xml version="1.0" encoding="utf-8"?>
 <p:sld xmlns:a="http://schemas.openxmlformats.org/drawingml/2006/main" xmlns:r="http://schemas.openxmlformats.org/officeDocument/2006/relationships" xmlns:p="http://schemas.openxmlformats.org/presentationml/2006/main">
   <p:cSld>
     <p:spTree>
@@ -13235,7 +15543,7 @@
           <a:p>
             <a:fld id="{F00CFC7C-F3DD-4CCA-A309-41102AB6D153}" type="slidenum">
               <a:rPr lang="en-US" smtClean="0"/>
-              <a:t>13</a:t>
+              <a:t>14</a:t>
             </a:fld>
             <a:endParaRPr lang="en-US"/>
           </a:p>
@@ -13284,7 +15592,7 @@
 </p:sld>
 </file>
 
-<file path=ppt/slides/slide14.xml><?xml version="1.0" encoding="utf-8"?>
+<file path=ppt/slides/slide15.xml><?xml version="1.0" encoding="utf-8"?>
 <p:sld xmlns:a="http://schemas.openxmlformats.org/drawingml/2006/main" xmlns:r="http://schemas.openxmlformats.org/officeDocument/2006/relationships" xmlns:p="http://schemas.openxmlformats.org/presentationml/2006/main">
   <p:cSld>
     <p:spTree>
@@ -13337,12 +15645,8 @@
           <a:p>
             <a:pPr algn="l"/>
             <a:r>
-              <a:rPr lang="en-US" sz="3600" dirty="0"/>
-              <a:t>Typical </a:t>
-            </a:r>
-            <a:r>
               <a:rPr lang="en-US" sz="3600" b="1" dirty="0"/>
-              <a:t>name structure </a:t>
+              <a:t>Name structure </a:t>
             </a:r>
             <a:r>
               <a:rPr lang="en-US" sz="3600" dirty="0"/>
@@ -13378,7 +15682,7 @@
           <a:p>
             <a:fld id="{F00CFC7C-F3DD-4CCA-A309-41102AB6D153}" type="slidenum">
               <a:rPr lang="en-US" smtClean="0"/>
-              <a:t>14</a:t>
+              <a:t>15</a:t>
             </a:fld>
             <a:endParaRPr lang="en-US"/>
           </a:p>
@@ -13995,6 +16299,175 @@
           </a:p>
         </p:txBody>
       </p:sp>
+      <p:sp>
+        <p:nvSpPr>
+          <p:cNvPr id="4" name="TextBox 3">
+            <a:extLst>
+              <a:ext uri="{FF2B5EF4-FFF2-40B4-BE49-F238E27FC236}">
+                <a16:creationId xmlns:a16="http://schemas.microsoft.com/office/drawing/2014/main" id="{57260548-9E03-81A4-BB3D-816FEBABA180}"/>
+              </a:ext>
+            </a:extLst>
+          </p:cNvPr>
+          <p:cNvSpPr txBox="1"/>
+          <p:nvPr/>
+        </p:nvSpPr>
+        <p:spPr>
+          <a:xfrm>
+            <a:off x="8610600" y="2620809"/>
+            <a:ext cx="1848391" cy="461665"/>
+          </a:xfrm>
+          <a:prstGeom prst="rect">
+            <a:avLst/>
+          </a:prstGeom>
+          <a:noFill/>
+        </p:spPr>
+        <p:txBody>
+          <a:bodyPr wrap="none" rtlCol="0">
+            <a:spAutoFit/>
+          </a:bodyPr>
+          <a:lstStyle/>
+          <a:p>
+            <a:r>
+              <a:rPr lang="en-US" sz="2400" b="1" dirty="0">
+                <a:solidFill>
+                  <a:srgbClr val="92D050"/>
+                </a:solidFill>
+              </a:rPr>
+              <a:t>AAA pattern</a:t>
+            </a:r>
+          </a:p>
+        </p:txBody>
+      </p:sp>
+      <p:cxnSp>
+        <p:nvCxnSpPr>
+          <p:cNvPr id="7" name="Straight Arrow Connector 6">
+            <a:extLst>
+              <a:ext uri="{FF2B5EF4-FFF2-40B4-BE49-F238E27FC236}">
+                <a16:creationId xmlns:a16="http://schemas.microsoft.com/office/drawing/2014/main" id="{12A025CB-6A21-2AC0-70CD-EB4CE9870492}"/>
+              </a:ext>
+            </a:extLst>
+          </p:cNvPr>
+          <p:cNvCxnSpPr/>
+          <p:nvPr/>
+        </p:nvCxnSpPr>
+        <p:spPr>
+          <a:xfrm flipH="1">
+            <a:off x="7283669" y="2851641"/>
+            <a:ext cx="1187669" cy="0"/>
+          </a:xfrm>
+          <a:prstGeom prst="straightConnector1">
+            <a:avLst/>
+          </a:prstGeom>
+          <a:ln w="28575">
+            <a:solidFill>
+              <a:srgbClr val="92D050"/>
+            </a:solidFill>
+            <a:tailEnd type="triangle"/>
+          </a:ln>
+        </p:spPr>
+        <p:style>
+          <a:lnRef idx="1">
+            <a:schemeClr val="accent6"/>
+          </a:lnRef>
+          <a:fillRef idx="0">
+            <a:schemeClr val="accent6"/>
+          </a:fillRef>
+          <a:effectRef idx="0">
+            <a:schemeClr val="accent6"/>
+          </a:effectRef>
+          <a:fontRef idx="minor">
+            <a:schemeClr val="tx1"/>
+          </a:fontRef>
+        </p:style>
+      </p:cxnSp>
+      <p:cxnSp>
+        <p:nvCxnSpPr>
+          <p:cNvPr id="8" name="Straight Arrow Connector 7">
+            <a:extLst>
+              <a:ext uri="{FF2B5EF4-FFF2-40B4-BE49-F238E27FC236}">
+                <a16:creationId xmlns:a16="http://schemas.microsoft.com/office/drawing/2014/main" id="{42507A85-C0A6-D7DD-EE8E-303D4D9EA5EA}"/>
+              </a:ext>
+            </a:extLst>
+          </p:cNvPr>
+          <p:cNvCxnSpPr>
+            <a:cxnSpLocks/>
+          </p:cNvCxnSpPr>
+          <p:nvPr/>
+        </p:nvCxnSpPr>
+        <p:spPr>
+          <a:xfrm flipH="1">
+            <a:off x="8471338" y="3166952"/>
+            <a:ext cx="811924" cy="591470"/>
+          </a:xfrm>
+          <a:prstGeom prst="straightConnector1">
+            <a:avLst/>
+          </a:prstGeom>
+          <a:ln w="28575">
+            <a:solidFill>
+              <a:srgbClr val="92D050"/>
+            </a:solidFill>
+            <a:tailEnd type="triangle"/>
+          </a:ln>
+        </p:spPr>
+        <p:style>
+          <a:lnRef idx="1">
+            <a:schemeClr val="accent6"/>
+          </a:lnRef>
+          <a:fillRef idx="0">
+            <a:schemeClr val="accent6"/>
+          </a:fillRef>
+          <a:effectRef idx="0">
+            <a:schemeClr val="accent6"/>
+          </a:effectRef>
+          <a:fontRef idx="minor">
+            <a:schemeClr val="tx1"/>
+          </a:fontRef>
+        </p:style>
+      </p:cxnSp>
+      <p:cxnSp>
+        <p:nvCxnSpPr>
+          <p:cNvPr id="23" name="Straight Arrow Connector 22">
+            <a:extLst>
+              <a:ext uri="{FF2B5EF4-FFF2-40B4-BE49-F238E27FC236}">
+                <a16:creationId xmlns:a16="http://schemas.microsoft.com/office/drawing/2014/main" id="{53871137-5A17-AB6E-A0EC-5F327B172434}"/>
+              </a:ext>
+            </a:extLst>
+          </p:cNvPr>
+          <p:cNvCxnSpPr>
+            <a:cxnSpLocks/>
+          </p:cNvCxnSpPr>
+          <p:nvPr/>
+        </p:nvCxnSpPr>
+        <p:spPr>
+          <a:xfrm>
+            <a:off x="9787759" y="3193456"/>
+            <a:ext cx="504497" cy="1502110"/>
+          </a:xfrm>
+          <a:prstGeom prst="straightConnector1">
+            <a:avLst/>
+          </a:prstGeom>
+          <a:ln w="28575">
+            <a:solidFill>
+              <a:srgbClr val="92D050"/>
+            </a:solidFill>
+            <a:tailEnd type="triangle"/>
+          </a:ln>
+        </p:spPr>
+        <p:style>
+          <a:lnRef idx="1">
+            <a:schemeClr val="accent6"/>
+          </a:lnRef>
+          <a:fillRef idx="0">
+            <a:schemeClr val="accent6"/>
+          </a:fillRef>
+          <a:effectRef idx="0">
+            <a:schemeClr val="accent6"/>
+          </a:effectRef>
+          <a:fontRef idx="minor">
+            <a:schemeClr val="tx1"/>
+          </a:fontRef>
+        </p:style>
+      </p:cxnSp>
     </p:spTree>
     <p:extLst>
       <p:ext uri="{BB962C8B-B14F-4D97-AF65-F5344CB8AC3E}">
@@ -14367,6 +16840,114 @@
                                   </p:childTnLst>
                                 </p:cTn>
                               </p:par>
+                              <p:par>
+                                <p:cTn id="31" presetID="1" presetClass="entr" presetSubtype="0" fill="hold" grpId="0" nodeType="withEffect">
+                                  <p:stCondLst>
+                                    <p:cond delay="0"/>
+                                  </p:stCondLst>
+                                  <p:childTnLst>
+                                    <p:set>
+                                      <p:cBhvr>
+                                        <p:cTn id="32" dur="1" fill="hold">
+                                          <p:stCondLst>
+                                            <p:cond delay="0"/>
+                                          </p:stCondLst>
+                                        </p:cTn>
+                                        <p:tgtEl>
+                                          <p:spTgt spid="4"/>
+                                        </p:tgtEl>
+                                        <p:attrNameLst>
+                                          <p:attrName>style.visibility</p:attrName>
+                                        </p:attrNameLst>
+                                      </p:cBhvr>
+                                      <p:to>
+                                        <p:strVal val="visible"/>
+                                      </p:to>
+                                    </p:set>
+                                  </p:childTnLst>
+                                </p:cTn>
+                              </p:par>
+                              <p:par>
+                                <p:cTn id="33" presetID="1" presetClass="entr" presetSubtype="0" fill="hold" nodeType="withEffect">
+                                  <p:stCondLst>
+                                    <p:cond delay="0"/>
+                                  </p:stCondLst>
+                                  <p:childTnLst>
+                                    <p:set>
+                                      <p:cBhvr>
+                                        <p:cTn id="34" dur="1" fill="hold">
+                                          <p:stCondLst>
+                                            <p:cond delay="0"/>
+                                          </p:stCondLst>
+                                        </p:cTn>
+                                        <p:tgtEl>
+                                          <p:spTgt spid="7"/>
+                                        </p:tgtEl>
+                                        <p:attrNameLst>
+                                          <p:attrName>style.visibility</p:attrName>
+                                        </p:attrNameLst>
+                                      </p:cBhvr>
+                                      <p:to>
+                                        <p:strVal val="visible"/>
+                                      </p:to>
+                                    </p:set>
+                                  </p:childTnLst>
+                                </p:cTn>
+                              </p:par>
+                              <p:par>
+                                <p:cTn id="35" presetID="1" presetClass="entr" presetSubtype="0" fill="hold" nodeType="withEffect">
+                                  <p:stCondLst>
+                                    <p:cond delay="0"/>
+                                  </p:stCondLst>
+                                  <p:childTnLst>
+                                    <p:set>
+                                      <p:cBhvr>
+                                        <p:cTn id="36" dur="1" fill="hold">
+                                          <p:stCondLst>
+                                            <p:cond delay="0"/>
+                                          </p:stCondLst>
+                                        </p:cTn>
+                                        <p:tgtEl>
+                                          <p:spTgt spid="8"/>
+                                        </p:tgtEl>
+                                        <p:attrNameLst>
+                                          <p:attrName>style.visibility</p:attrName>
+                                        </p:attrNameLst>
+                                      </p:cBhvr>
+                                      <p:to>
+                                        <p:strVal val="visible"/>
+                                      </p:to>
+                                    </p:set>
+                                  </p:childTnLst>
+                                </p:cTn>
+                              </p:par>
+                              <p:par>
+                                <p:cTn id="37" presetID="1" presetClass="entr" presetSubtype="0" fill="hold" nodeType="withEffect">
+                                  <p:stCondLst>
+                                    <p:cond delay="0"/>
+                                  </p:stCondLst>
+                                  <p:childTnLst>
+                                    <p:set>
+                                      <p:cBhvr>
+                                        <p:cTn id="38" dur="1" fill="hold">
+                                          <p:stCondLst>
+                                            <p:cond delay="0"/>
+                                          </p:stCondLst>
+                                        </p:cTn>
+                                        <p:tgtEl>
+                                          <p:spTgt spid="23"/>
+                                        </p:tgtEl>
+                                        <p:attrNameLst>
+                                          <p:attrName>style.visibility</p:attrName>
+                                        </p:attrNameLst>
+                                      </p:cBhvr>
+                                      <p:to>
+                                        <p:strVal val="visible"/>
+                                      </p:to>
+                                    </p:set>
+                                  </p:childTnLst>
+                                </p:cTn>
+                              </p:par>
                             </p:childTnLst>
                           </p:cTn>
                         </p:par>
@@ -14407,12 +16988,190 @@
       <p:bldP spid="18" grpId="0"/>
       <p:bldP spid="19" grpId="0" animBg="1"/>
       <p:bldP spid="20" grpId="0" animBg="1"/>
+      <p:bldP spid="4" grpId="0"/>
     </p:bldLst>
   </p:timing>
 </p:sld>
 </file>
 
-<file path=ppt/slides/slide15.xml><?xml version="1.0" encoding="utf-8"?>
+<file path=ppt/slides/slide16.xml><?xml version="1.0" encoding="utf-8"?>
+<p:sld xmlns:a="http://schemas.openxmlformats.org/drawingml/2006/main" xmlns:r="http://schemas.openxmlformats.org/officeDocument/2006/relationships" xmlns:p="http://schemas.openxmlformats.org/presentationml/2006/main">
+  <p:cSld>
+    <p:spTree>
+      <p:nvGrpSpPr>
+        <p:cNvPr id="1" name="">
+          <a:extLst>
+            <a:ext uri="{FF2B5EF4-FFF2-40B4-BE49-F238E27FC236}">
+              <a16:creationId xmlns:a16="http://schemas.microsoft.com/office/drawing/2014/main" id="{28B9A681-3645-65CA-EE40-1DFCC8EC2D66}"/>
+            </a:ext>
+          </a:extLst>
+        </p:cNvPr>
+        <p:cNvGrpSpPr/>
+        <p:nvPr/>
+      </p:nvGrpSpPr>
+      <p:grpSpPr>
+        <a:xfrm>
+          <a:off x="0" y="0"/>
+          <a:ext cx="0" cy="0"/>
+          <a:chOff x="0" y="0"/>
+          <a:chExt cx="0" cy="0"/>
+        </a:xfrm>
+      </p:grpSpPr>
+      <p:sp>
+        <p:nvSpPr>
+          <p:cNvPr id="2" name="Title 1">
+            <a:extLst>
+              <a:ext uri="{FF2B5EF4-FFF2-40B4-BE49-F238E27FC236}">
+                <a16:creationId xmlns:a16="http://schemas.microsoft.com/office/drawing/2014/main" id="{663F9036-05C3-93E6-D76D-9FA44549B0E5}"/>
+              </a:ext>
+            </a:extLst>
+          </p:cNvPr>
+          <p:cNvSpPr>
+            <a:spLocks noGrp="1"/>
+          </p:cNvSpPr>
+          <p:nvPr>
+            <p:ph type="ctrTitle"/>
+          </p:nvPr>
+        </p:nvSpPr>
+        <p:spPr>
+          <a:xfrm>
+            <a:off x="91440" y="132080"/>
+            <a:ext cx="12009120" cy="573722"/>
+          </a:xfrm>
+        </p:spPr>
+        <p:txBody>
+          <a:bodyPr>
+            <a:normAutofit fontScale="90000"/>
+          </a:bodyPr>
+          <a:lstStyle/>
+          <a:p>
+            <a:pPr algn="l"/>
+            <a:r>
+              <a:rPr lang="en-US" sz="3600" dirty="0"/>
+              <a:t>How to know if I tested every behavior? Starting point is </a:t>
+            </a:r>
+            <a:r>
+              <a:rPr lang="en-US" sz="3600" b="1" dirty="0"/>
+              <a:t>code coverage</a:t>
+            </a:r>
+          </a:p>
+        </p:txBody>
+      </p:sp>
+      <p:sp>
+        <p:nvSpPr>
+          <p:cNvPr id="3" name="Slide Number Placeholder 2">
+            <a:extLst>
+              <a:ext uri="{FF2B5EF4-FFF2-40B4-BE49-F238E27FC236}">
+                <a16:creationId xmlns:a16="http://schemas.microsoft.com/office/drawing/2014/main" id="{84997825-0F37-0C9F-7145-14670A3E6EEB}"/>
+              </a:ext>
+            </a:extLst>
+          </p:cNvPr>
+          <p:cNvSpPr>
+            <a:spLocks noGrp="1"/>
+          </p:cNvSpPr>
+          <p:nvPr>
+            <p:ph type="sldNum" sz="quarter" idx="12"/>
+          </p:nvPr>
+        </p:nvSpPr>
+        <p:spPr/>
+        <p:txBody>
+          <a:bodyPr/>
+          <a:lstStyle/>
+          <a:p>
+            <a:fld id="{F00CFC7C-F3DD-4CCA-A309-41102AB6D153}" type="slidenum">
+              <a:rPr lang="en-US" smtClean="0"/>
+              <a:t>16</a:t>
+            </a:fld>
+            <a:endParaRPr lang="en-US"/>
+          </a:p>
+        </p:txBody>
+      </p:sp>
+      <p:pic>
+        <p:nvPicPr>
+          <p:cNvPr id="22" name="Picture 21">
+            <a:extLst>
+              <a:ext uri="{FF2B5EF4-FFF2-40B4-BE49-F238E27FC236}">
+                <a16:creationId xmlns:a16="http://schemas.microsoft.com/office/drawing/2014/main" id="{FE39BF53-7C5F-8514-31DB-046310D88BB6}"/>
+              </a:ext>
+            </a:extLst>
+          </p:cNvPr>
+          <p:cNvPicPr>
+            <a:picLocks noChangeAspect="1"/>
+          </p:cNvPicPr>
+          <p:nvPr/>
+        </p:nvPicPr>
+        <p:blipFill>
+          <a:blip r:embed="rId3"/>
+          <a:stretch>
+            <a:fillRect/>
+          </a:stretch>
+        </p:blipFill>
+        <p:spPr>
+          <a:xfrm>
+            <a:off x="220975" y="1114097"/>
+            <a:ext cx="11568684" cy="1745753"/>
+          </a:xfrm>
+          <a:prstGeom prst="rect">
+            <a:avLst/>
+          </a:prstGeom>
+        </p:spPr>
+      </p:pic>
+      <p:sp>
+        <p:nvSpPr>
+          <p:cNvPr id="24" name="TextBox 23">
+            <a:extLst>
+              <a:ext uri="{FF2B5EF4-FFF2-40B4-BE49-F238E27FC236}">
+                <a16:creationId xmlns:a16="http://schemas.microsoft.com/office/drawing/2014/main" id="{78331A30-9ED2-1EF5-5238-2443CB34AA0B}"/>
+              </a:ext>
+            </a:extLst>
+          </p:cNvPr>
+          <p:cNvSpPr txBox="1"/>
+          <p:nvPr/>
+        </p:nvSpPr>
+        <p:spPr>
+          <a:xfrm>
+            <a:off x="3046249" y="2898813"/>
+            <a:ext cx="5427576" cy="369332"/>
+          </a:xfrm>
+          <a:prstGeom prst="rect">
+            <a:avLst/>
+          </a:prstGeom>
+          <a:noFill/>
+        </p:spPr>
+        <p:txBody>
+          <a:bodyPr wrap="none" rtlCol="0">
+            <a:spAutoFit/>
+          </a:bodyPr>
+          <a:lstStyle/>
+          <a:p>
+            <a:r>
+              <a:rPr lang="en-US" dirty="0"/>
+              <a:t>Source: </a:t>
+            </a:r>
+            <a:r>
+              <a:rPr lang="en-US" dirty="0">
+                <a:hlinkClick r:id="rId4"/>
+              </a:rPr>
+              <a:t>https://en.wikipedia.org/wiki/Code_coverage</a:t>
+            </a:r>
+            <a:endParaRPr lang="en-US" dirty="0"/>
+          </a:p>
+        </p:txBody>
+      </p:sp>
+    </p:spTree>
+    <p:extLst>
+      <p:ext uri="{BB962C8B-B14F-4D97-AF65-F5344CB8AC3E}">
+        <p14:creationId xmlns:p14="http://schemas.microsoft.com/office/powerpoint/2010/main" val="2129151713"/>
+      </p:ext>
+    </p:extLst>
+  </p:cSld>
+  <p:clrMapOvr>
+    <a:masterClrMapping/>
+  </p:clrMapOvr>
+</p:sld>
+</file>
+
+<file path=ppt/slides/slide17.xml><?xml version="1.0" encoding="utf-8"?>
 <p:sld xmlns:a="http://schemas.openxmlformats.org/drawingml/2006/main" xmlns:r="http://schemas.openxmlformats.org/officeDocument/2006/relationships" xmlns:p="http://schemas.openxmlformats.org/presentationml/2006/main">
   <p:cSld>
     <p:spTree>
@@ -14488,7 +17247,7 @@
         <p:spPr>
           <a:xfrm>
             <a:off x="351431" y="1243324"/>
-            <a:ext cx="9747609" cy="3584484"/>
+            <a:ext cx="10873617" cy="3584484"/>
           </a:xfrm>
           <a:prstGeom prst="rect">
             <a:avLst/>
@@ -14673,25 +17432,7 @@
                 </a:solidFill>
                 <a:latin typeface="AmericanSans"/>
               </a:rPr>
-              <a:t>Implement the unit tests of the implemented </a:t>
-            </a:r>
-            <a:r>
-              <a:rPr lang="en-US" sz="2000" b="0" dirty="0" err="1">
-                <a:solidFill>
-                  <a:schemeClr val="tx1"/>
-                </a:solidFill>
-                <a:latin typeface="AmericanSans"/>
-              </a:rPr>
-              <a:t>function`divide</a:t>
-            </a:r>
-            <a:r>
-              <a:rPr lang="en-US" sz="2000" b="0" dirty="0">
-                <a:solidFill>
-                  <a:schemeClr val="tx1"/>
-                </a:solidFill>
-                <a:latin typeface="AmericanSans"/>
-              </a:rPr>
-              <a:t>` in the calculator.py script.</a:t>
+              <a:t>Check out how the unit tests were created for the function `add` as a starting point.</a:t>
             </a:r>
           </a:p>
           <a:p>
@@ -14713,6 +17454,30 @@
             </a:endParaRPr>
           </a:p>
           <a:p>
+            <a:r>
+              <a:rPr lang="en-US" sz="2000" b="0" dirty="0">
+                <a:solidFill>
+                  <a:schemeClr val="tx1"/>
+                </a:solidFill>
+                <a:latin typeface="AmericanSans"/>
+                <a:hlinkClick r:id="rId3"/>
+              </a:rPr>
+              <a:t>https://github.com/sefop/training-testing-python/blob/main/tests/test_calculator_add.py</a:t>
+            </a:r>
+            <a:r>
+              <a:rPr lang="en-US" sz="2000" b="0" dirty="0">
+                <a:solidFill>
+                  <a:schemeClr val="tx1"/>
+                </a:solidFill>
+                <a:latin typeface="AmericanSans"/>
+              </a:rPr>
+              <a:t> </a:t>
+            </a:r>
+          </a:p>
+          <a:p>
+            <a:pPr marL="342900" indent="-342900">
+              <a:buChar char="•"/>
+            </a:pPr>
             <a:endParaRPr lang="en-US" sz="2000" b="0" dirty="0">
               <a:solidFill>
                 <a:schemeClr val="tx1"/>
@@ -14721,6 +17486,9 @@
             </a:endParaRPr>
           </a:p>
           <a:p>
+            <a:pPr marL="342900" indent="-342900">
+              <a:buChar char="•"/>
+            </a:pPr>
             <a:endParaRPr lang="en-US" sz="2000" b="0" dirty="0">
               <a:solidFill>
                 <a:schemeClr val="tx1"/>
@@ -14730,6 +17498,90 @@
           </a:p>
           <a:p>
             <a:pPr marL="342900" indent="-342900">
+              <a:buChar char="•"/>
+            </a:pPr>
+            <a:r>
+              <a:rPr lang="en-US" sz="2000" b="0" dirty="0">
+                <a:solidFill>
+                  <a:schemeClr val="tx1"/>
+                </a:solidFill>
+                <a:latin typeface="AmericanSans"/>
+              </a:rPr>
+              <a:t>Implement the unit tests of the implemented </a:t>
+            </a:r>
+            <a:r>
+              <a:rPr lang="en-US" sz="2000" b="0" dirty="0" err="1">
+                <a:solidFill>
+                  <a:schemeClr val="tx1"/>
+                </a:solidFill>
+                <a:latin typeface="AmericanSans"/>
+              </a:rPr>
+              <a:t>function`divide</a:t>
+            </a:r>
+            <a:r>
+              <a:rPr lang="en-US" sz="2000" b="0" dirty="0">
+                <a:solidFill>
+                  <a:schemeClr val="tx1"/>
+                </a:solidFill>
+                <a:latin typeface="AmericanSans"/>
+              </a:rPr>
+              <a:t>` in the calculator.py script until you reach </a:t>
+            </a:r>
+            <a:r>
+              <a:rPr lang="en-US" sz="2000" dirty="0">
+                <a:solidFill>
+                  <a:schemeClr val="tx1"/>
+                </a:solidFill>
+                <a:latin typeface="AmericanSans"/>
+              </a:rPr>
+              <a:t>100% code coverage </a:t>
+            </a:r>
+            <a:r>
+              <a:rPr lang="en-US" sz="2000" b="0" dirty="0">
+                <a:solidFill>
+                  <a:schemeClr val="tx1"/>
+                </a:solidFill>
+                <a:latin typeface="AmericanSans"/>
+              </a:rPr>
+              <a:t>in the </a:t>
+            </a:r>
+            <a:r>
+              <a:rPr lang="en-US" sz="2000" dirty="0">
+                <a:solidFill>
+                  <a:schemeClr val="tx1"/>
+                </a:solidFill>
+                <a:latin typeface="AmericanSans"/>
+              </a:rPr>
+              <a:t>calculator.py</a:t>
+            </a:r>
+            <a:r>
+              <a:rPr lang="en-US" sz="2000" b="0" dirty="0">
+                <a:solidFill>
+                  <a:schemeClr val="tx1"/>
+                </a:solidFill>
+                <a:latin typeface="AmericanSans"/>
+              </a:rPr>
+              <a:t> script.</a:t>
+            </a:r>
+          </a:p>
+          <a:p>
+            <a:endParaRPr lang="en-US" sz="2000" b="0" dirty="0">
+              <a:solidFill>
+                <a:schemeClr val="tx1"/>
+              </a:solidFill>
+              <a:latin typeface="AmericanSans"/>
+            </a:endParaRPr>
+          </a:p>
+          <a:p>
+            <a:endParaRPr lang="en-US" sz="2000" b="0" dirty="0">
+              <a:solidFill>
+                <a:schemeClr val="tx1"/>
+              </a:solidFill>
+              <a:latin typeface="AmericanSans"/>
+            </a:endParaRPr>
+          </a:p>
+          <a:p>
+            <a:pPr marL="342900" indent="-342900">
               <a:buFont typeface="Arial" panose="020B0604020202020204" pitchFamily="34" charset="0"/>
               <a:buChar char="•"/>
             </a:pPr>
@@ -14750,7 +17602,7 @@
                   <a:schemeClr val="tx1"/>
                 </a:solidFill>
                 <a:latin typeface="AmericanSans"/>
-                <a:hlinkClick r:id="rId3"/>
+                <a:hlinkClick r:id="rId4"/>
               </a:rPr>
               <a:t>https://github.com/sefop/training-testing-python/blob/main/tests/test_calculator_divide.py</a:t>
             </a:r>
@@ -14789,7 +17641,7 @@
           <a:p>
             <a:fld id="{F00CFC7C-F3DD-4CCA-A309-41102AB6D153}" type="slidenum">
               <a:rPr lang="en-US" smtClean="0"/>
-              <a:t>15</a:t>
+              <a:t>17</a:t>
             </a:fld>
             <a:endParaRPr lang="en-US"/>
           </a:p>
@@ -14869,208 +17721,6 @@
       </p:sp>
       <p:sp>
         <p:nvSpPr>
-          <p:cNvPr id="3" name="Text Placeholder 5">
-            <a:extLst>
-              <a:ext uri="{FF2B5EF4-FFF2-40B4-BE49-F238E27FC236}">
-                <a16:creationId xmlns:a16="http://schemas.microsoft.com/office/drawing/2014/main" id="{87A4DC20-0704-98AE-2B5E-F2F892BF3BD0}"/>
-              </a:ext>
-            </a:extLst>
-          </p:cNvPr>
-          <p:cNvSpPr txBox="1">
-            <a:spLocks/>
-          </p:cNvSpPr>
-          <p:nvPr/>
-        </p:nvSpPr>
-        <p:spPr>
-          <a:xfrm>
-            <a:off x="1832042" y="5634075"/>
-            <a:ext cx="8941974" cy="494961"/>
-          </a:xfrm>
-          <a:prstGeom prst="rect">
-            <a:avLst/>
-          </a:prstGeom>
-        </p:spPr>
-        <p:txBody>
-          <a:bodyPr vert="horz" lIns="91440" tIns="45720" rIns="91440" bIns="45720" rtlCol="0">
-            <a:noAutofit/>
-          </a:bodyPr>
-          <a:lstStyle>
-            <a:lvl1pPr marL="0" indent="0" algn="l" defTabSz="914400" rtl="0" eaLnBrk="1" latinLnBrk="0" hangingPunct="1">
-              <a:lnSpc>
-                <a:spcPct val="90000"/>
-              </a:lnSpc>
-              <a:spcBef>
-                <a:spcPts val="1000"/>
-              </a:spcBef>
-              <a:buFont typeface="Arial" panose="020B0604020202020204" pitchFamily="34" charset="0"/>
-              <a:buNone/>
-              <a:defRPr sz="2800" kern="1200">
-                <a:solidFill>
-                  <a:srgbClr val="36495A"/>
-                </a:solidFill>
-                <a:latin typeface="+mn-lt"/>
-                <a:ea typeface="+mn-ea"/>
-                <a:cs typeface="+mn-cs"/>
-              </a:defRPr>
-            </a:lvl1pPr>
-            <a:lvl2pPr marL="457200" indent="0" algn="l" defTabSz="914400" rtl="0" eaLnBrk="1" latinLnBrk="0" hangingPunct="1">
-              <a:lnSpc>
-                <a:spcPct val="90000"/>
-              </a:lnSpc>
-              <a:spcBef>
-                <a:spcPts val="500"/>
-              </a:spcBef>
-              <a:buFont typeface="Arial" panose="020B0604020202020204" pitchFamily="34" charset="0"/>
-              <a:buNone/>
-              <a:defRPr sz="2400" kern="1200">
-                <a:solidFill>
-                  <a:schemeClr val="tx1"/>
-                </a:solidFill>
-                <a:latin typeface="+mn-lt"/>
-                <a:ea typeface="+mn-ea"/>
-                <a:cs typeface="+mn-cs"/>
-              </a:defRPr>
-            </a:lvl2pPr>
-            <a:lvl3pPr marL="914400" indent="0" algn="l" defTabSz="914400" rtl="0" eaLnBrk="1" latinLnBrk="0" hangingPunct="1">
-              <a:lnSpc>
-                <a:spcPct val="90000"/>
-              </a:lnSpc>
-              <a:spcBef>
-                <a:spcPts val="500"/>
-              </a:spcBef>
-              <a:buFont typeface="Arial" panose="020B0604020202020204" pitchFamily="34" charset="0"/>
-              <a:buNone/>
-              <a:defRPr sz="2000" kern="1200">
-                <a:solidFill>
-                  <a:schemeClr val="tx1"/>
-                </a:solidFill>
-                <a:latin typeface="+mn-lt"/>
-                <a:ea typeface="+mn-ea"/>
-                <a:cs typeface="+mn-cs"/>
-              </a:defRPr>
-            </a:lvl3pPr>
-            <a:lvl4pPr marL="1371600" indent="0" algn="l" defTabSz="914400" rtl="0" eaLnBrk="1" latinLnBrk="0" hangingPunct="1">
-              <a:lnSpc>
-                <a:spcPct val="90000"/>
-              </a:lnSpc>
-              <a:spcBef>
-                <a:spcPts val="500"/>
-              </a:spcBef>
-              <a:buFont typeface="Arial" panose="020B0604020202020204" pitchFamily="34" charset="0"/>
-              <a:buNone/>
-              <a:defRPr sz="1800" kern="1200">
-                <a:solidFill>
-                  <a:schemeClr val="tx1"/>
-                </a:solidFill>
-                <a:latin typeface="+mn-lt"/>
-                <a:ea typeface="+mn-ea"/>
-                <a:cs typeface="+mn-cs"/>
-              </a:defRPr>
-            </a:lvl4pPr>
-            <a:lvl5pPr marL="1828800" indent="0" algn="l" defTabSz="914400" rtl="0" eaLnBrk="1" latinLnBrk="0" hangingPunct="1">
-              <a:lnSpc>
-                <a:spcPct val="90000"/>
-              </a:lnSpc>
-              <a:spcBef>
-                <a:spcPts val="500"/>
-              </a:spcBef>
-              <a:buFont typeface="Arial" panose="020B0604020202020204" pitchFamily="34" charset="0"/>
-              <a:buNone/>
-              <a:defRPr sz="1800" kern="1200">
-                <a:solidFill>
-                  <a:schemeClr val="tx1"/>
-                </a:solidFill>
-                <a:latin typeface="+mn-lt"/>
-                <a:ea typeface="+mn-ea"/>
-                <a:cs typeface="+mn-cs"/>
-              </a:defRPr>
-            </a:lvl5pPr>
-            <a:lvl6pPr marL="2514600" indent="-228600" algn="l" defTabSz="914400" rtl="0" eaLnBrk="1" latinLnBrk="0" hangingPunct="1">
-              <a:lnSpc>
-                <a:spcPct val="90000"/>
-              </a:lnSpc>
-              <a:spcBef>
-                <a:spcPts val="500"/>
-              </a:spcBef>
-              <a:buFont typeface="Arial" panose="020B0604020202020204" pitchFamily="34" charset="0"/>
-              <a:buChar char="•"/>
-              <a:defRPr sz="1800" kern="1200">
-                <a:solidFill>
-                  <a:schemeClr val="tx1"/>
-                </a:solidFill>
-                <a:latin typeface="+mn-lt"/>
-                <a:ea typeface="+mn-ea"/>
-                <a:cs typeface="+mn-cs"/>
-              </a:defRPr>
-            </a:lvl6pPr>
-            <a:lvl7pPr marL="2971800" indent="-228600" algn="l" defTabSz="914400" rtl="0" eaLnBrk="1" latinLnBrk="0" hangingPunct="1">
-              <a:lnSpc>
-                <a:spcPct val="90000"/>
-              </a:lnSpc>
-              <a:spcBef>
-                <a:spcPts val="500"/>
-              </a:spcBef>
-              <a:buFont typeface="Arial" panose="020B0604020202020204" pitchFamily="34" charset="0"/>
-              <a:buChar char="•"/>
-              <a:defRPr sz="1800" kern="1200">
-                <a:solidFill>
-                  <a:schemeClr val="tx1"/>
-                </a:solidFill>
-                <a:latin typeface="+mn-lt"/>
-                <a:ea typeface="+mn-ea"/>
-                <a:cs typeface="+mn-cs"/>
-              </a:defRPr>
-            </a:lvl7pPr>
-            <a:lvl8pPr marL="3429000" indent="-228600" algn="l" defTabSz="914400" rtl="0" eaLnBrk="1" latinLnBrk="0" hangingPunct="1">
-              <a:lnSpc>
-                <a:spcPct val="90000"/>
-              </a:lnSpc>
-              <a:spcBef>
-                <a:spcPts val="500"/>
-              </a:spcBef>
-              <a:buFont typeface="Arial" panose="020B0604020202020204" pitchFamily="34" charset="0"/>
-              <a:buChar char="•"/>
-              <a:defRPr sz="1800" kern="1200">
-                <a:solidFill>
-                  <a:schemeClr val="tx1"/>
-                </a:solidFill>
-                <a:latin typeface="+mn-lt"/>
-                <a:ea typeface="+mn-ea"/>
-                <a:cs typeface="+mn-cs"/>
-              </a:defRPr>
-            </a:lvl8pPr>
-            <a:lvl9pPr marL="3886200" indent="-228600" algn="l" defTabSz="914400" rtl="0" eaLnBrk="1" latinLnBrk="0" hangingPunct="1">
-              <a:lnSpc>
-                <a:spcPct val="90000"/>
-              </a:lnSpc>
-              <a:spcBef>
-                <a:spcPts val="500"/>
-              </a:spcBef>
-              <a:buFont typeface="Arial" panose="020B0604020202020204" pitchFamily="34" charset="0"/>
-              <a:buChar char="•"/>
-              <a:defRPr sz="1800" kern="1200">
-                <a:solidFill>
-                  <a:schemeClr val="tx1"/>
-                </a:solidFill>
-                <a:latin typeface="+mn-lt"/>
-                <a:ea typeface="+mn-ea"/>
-                <a:cs typeface="+mn-cs"/>
-              </a:defRPr>
-            </a:lvl9pPr>
-          </a:lstStyle>
-          <a:p>
-            <a:endParaRPr lang="en-US" sz="2000">
-              <a:solidFill>
-                <a:schemeClr val="tx1">
-                  <a:lumMod val="75000"/>
-                </a:schemeClr>
-              </a:solidFill>
-            </a:endParaRPr>
-          </a:p>
-        </p:txBody>
-      </p:sp>
-      <p:sp>
-        <p:nvSpPr>
           <p:cNvPr id="4" name="Rectangle 3">
             <a:extLst>
               <a:ext uri="{FF2B5EF4-FFF2-40B4-BE49-F238E27FC236}">
@@ -15273,6 +17923,69 @@
               <a:t>2</a:t>
             </a:fld>
             <a:endParaRPr lang="en-US"/>
+          </a:p>
+        </p:txBody>
+      </p:sp>
+      <p:sp>
+        <p:nvSpPr>
+          <p:cNvPr id="9" name="Speech Bubble: Rectangle 8">
+            <a:extLst>
+              <a:ext uri="{FF2B5EF4-FFF2-40B4-BE49-F238E27FC236}">
+                <a16:creationId xmlns:a16="http://schemas.microsoft.com/office/drawing/2014/main" id="{09DD81FD-7D04-ABB4-B16F-1D59C6CA5DF8}"/>
+              </a:ext>
+            </a:extLst>
+          </p:cNvPr>
+          <p:cNvSpPr/>
+          <p:nvPr/>
+        </p:nvSpPr>
+        <p:spPr>
+          <a:xfrm>
+            <a:off x="1965434" y="5050752"/>
+            <a:ext cx="2711669" cy="583324"/>
+          </a:xfrm>
+          <a:prstGeom prst="wedgeRectCallout">
+            <a:avLst>
+              <a:gd name="adj1" fmla="val -21667"/>
+              <a:gd name="adj2" fmla="val -88158"/>
+            </a:avLst>
+          </a:prstGeom>
+          <a:solidFill>
+            <a:srgbClr val="F8F7C1"/>
+          </a:solidFill>
+          <a:ln>
+            <a:solidFill>
+              <a:schemeClr val="tx1"/>
+            </a:solidFill>
+          </a:ln>
+        </p:spPr>
+        <p:style>
+          <a:lnRef idx="2">
+            <a:schemeClr val="accent1">
+              <a:shade val="15000"/>
+            </a:schemeClr>
+          </a:lnRef>
+          <a:fillRef idx="1">
+            <a:schemeClr val="accent1"/>
+          </a:fillRef>
+          <a:effectRef idx="0">
+            <a:schemeClr val="accent1"/>
+          </a:effectRef>
+          <a:fontRef idx="minor">
+            <a:schemeClr val="lt1"/>
+          </a:fontRef>
+        </p:style>
+        <p:txBody>
+          <a:bodyPr rtlCol="0" anchor="ctr"/>
+          <a:lstStyle/>
+          <a:p>
+            <a:r>
+              <a:rPr lang="en-US" sz="2000" b="1" dirty="0">
+                <a:solidFill>
+                  <a:schemeClr val="tx1"/>
+                </a:solidFill>
+              </a:rPr>
+              <a:t>Focus of this session</a:t>
+            </a:r>
           </a:p>
         </p:txBody>
       </p:sp>
